--- a/presentations/RITMO_052026/fig/!abb.pptx
+++ b/presentations/RITMO_052026/fig/!abb.pptx
@@ -16,7 +16,11 @@
     <p:sldId id="264" r:id="rId13"/>
     <p:sldId id="266" r:id="rId14"/>
     <p:sldId id="267" r:id="rId15"/>
-    <p:sldId id="265" r:id="rId16"/>
+    <p:sldId id="268" r:id="rId16"/>
+    <p:sldId id="269" r:id="rId17"/>
+    <p:sldId id="265" r:id="rId18"/>
+    <p:sldId id="270" r:id="rId19"/>
+    <p:sldId id="271" r:id="rId20"/>
   </p:sldIdLst>
   <p:sldSz cx="12192000" cy="6858000"/>
   <p:notesSz cx="6858000" cy="9144000"/>
@@ -3671,8 +3675,124 @@
         </p:nvSpPr>
         <p:spPr>
           <a:xfrm>
-            <a:off x="939800" y="800100"/>
+            <a:off x="4038600" y="4882297"/>
             <a:ext cx="2184400" cy="647700"/>
+          </a:xfrm>
+          <a:prstGeom prst="rect">
+            <a:avLst/>
+          </a:prstGeom>
+        </p:spPr>
+        <p:style>
+          <a:lnRef idx="2">
+            <a:schemeClr val="dk1"/>
+          </a:lnRef>
+          <a:fillRef idx="1">
+            <a:schemeClr val="lt1"/>
+          </a:fillRef>
+          <a:effectRef idx="0">
+            <a:schemeClr val="dk1"/>
+          </a:effectRef>
+          <a:fontRef idx="minor">
+            <a:schemeClr val="dk1"/>
+          </a:fontRef>
+        </p:style>
+        <p:txBody>
+          <a:bodyPr rtlCol="0" anchor="ctr"/>
+          <a:lstStyle/>
+          <a:p>
+            <a:pPr algn="ctr"/>
+            <a:r>
+              <a:rPr lang="de-DE" b="1" dirty="0"/>
+              <a:t>Customer </a:t>
+            </a:r>
+            <a:r>
+              <a:rPr lang="de-DE" b="1" dirty="0" err="1"/>
+              <a:t>orders</a:t>
+            </a:r>
+            <a:endParaRPr lang="de-DE" b="1" dirty="0"/>
+          </a:p>
+        </p:txBody>
+      </p:sp>
+      <p:sp>
+        <p:nvSpPr>
+          <p:cNvPr id="5" name="Textfeld 4">
+            <a:extLst>
+              <a:ext uri="{FF2B5EF4-FFF2-40B4-BE49-F238E27FC236}">
+                <a16:creationId xmlns:a16="http://schemas.microsoft.com/office/drawing/2014/main" id="{1AE6B901-E927-42DC-0037-FF0B5C4CF657}"/>
+              </a:ext>
+            </a:extLst>
+          </p:cNvPr>
+          <p:cNvSpPr txBox="1"/>
+          <p:nvPr/>
+        </p:nvSpPr>
+        <p:spPr>
+          <a:xfrm>
+            <a:off x="3793478" y="5529997"/>
+            <a:ext cx="2674643" cy="646331"/>
+          </a:xfrm>
+          <a:prstGeom prst="rect">
+            <a:avLst/>
+          </a:prstGeom>
+          <a:noFill/>
+        </p:spPr>
+        <p:txBody>
+          <a:bodyPr wrap="none" rtlCol="0">
+            <a:spAutoFit/>
+          </a:bodyPr>
+          <a:lstStyle/>
+          <a:p>
+            <a:pPr algn="ctr"/>
+            <a:r>
+              <a:rPr lang="de-DE" dirty="0" err="1"/>
+              <a:t>Quantity</a:t>
+            </a:r>
+            <a:r>
+              <a:rPr lang="de-DE" dirty="0"/>
+              <a:t>/</a:t>
+            </a:r>
+            <a:r>
+              <a:rPr lang="de-DE" dirty="0" err="1"/>
+              <a:t>payload</a:t>
+            </a:r>
+            <a:r>
+              <a:rPr lang="de-DE" dirty="0"/>
+              <a:t>, </a:t>
+            </a:r>
+          </a:p>
+          <a:p>
+            <a:pPr algn="ctr"/>
+            <a:r>
+              <a:rPr lang="de-DE" dirty="0" err="1"/>
+              <a:t>coordinates</a:t>
+            </a:r>
+            <a:r>
+              <a:rPr lang="de-DE" dirty="0"/>
+              <a:t>, </a:t>
+            </a:r>
+            <a:r>
+              <a:rPr lang="de-DE" dirty="0" err="1"/>
+              <a:t>preferences</a:t>
+            </a:r>
+            <a:endParaRPr lang="de-DE" dirty="0"/>
+          </a:p>
+        </p:txBody>
+      </p:sp>
+      <p:sp>
+        <p:nvSpPr>
+          <p:cNvPr id="6" name="Rechteck 5">
+            <a:extLst>
+              <a:ext uri="{FF2B5EF4-FFF2-40B4-BE49-F238E27FC236}">
+                <a16:creationId xmlns:a16="http://schemas.microsoft.com/office/drawing/2014/main" id="{4BD7E54D-693E-420B-4087-AC42D13B8448}"/>
+              </a:ext>
+            </a:extLst>
+          </p:cNvPr>
+          <p:cNvSpPr/>
+          <p:nvPr/>
+        </p:nvSpPr>
+        <p:spPr>
+          <a:xfrm>
+            <a:off x="459214" y="2851665"/>
+            <a:ext cx="2209800" cy="646332"/>
           </a:xfrm>
           <a:prstGeom prst="rect">
             <a:avLst/>
@@ -3700,23 +3820,18 @@
           <a:p>
             <a:pPr algn="ctr"/>
             <a:r>
-              <a:rPr lang="de-DE" dirty="0"/>
-              <a:t>Customer </a:t>
-            </a:r>
-            <a:r>
-              <a:rPr lang="de-DE" dirty="0" err="1"/>
-              <a:t>order</a:t>
-            </a:r>
-            <a:endParaRPr lang="de-DE" dirty="0"/>
-          </a:p>
-        </p:txBody>
-      </p:sp>
-      <p:sp>
-        <p:nvSpPr>
-          <p:cNvPr id="5" name="Textfeld 4">
-            <a:extLst>
-              <a:ext uri="{FF2B5EF4-FFF2-40B4-BE49-F238E27FC236}">
-                <a16:creationId xmlns:a16="http://schemas.microsoft.com/office/drawing/2014/main" id="{1AE6B901-E927-42DC-0037-FF0B5C4CF657}"/>
+              <a:rPr lang="de-DE" b="1" dirty="0"/>
+              <a:t>Truck Fleet</a:t>
+            </a:r>
+          </a:p>
+        </p:txBody>
+      </p:sp>
+      <p:sp>
+        <p:nvSpPr>
+          <p:cNvPr id="7" name="Textfeld 6">
+            <a:extLst>
+              <a:ext uri="{FF2B5EF4-FFF2-40B4-BE49-F238E27FC236}">
+                <a16:creationId xmlns:a16="http://schemas.microsoft.com/office/drawing/2014/main" id="{394369F6-A62C-E6A9-CAB7-3397513A17CA}"/>
               </a:ext>
             </a:extLst>
           </p:cNvPr>
@@ -3725,8 +3840,8 @@
         </p:nvSpPr>
         <p:spPr>
           <a:xfrm>
-            <a:off x="3378200" y="1143000"/>
-            <a:ext cx="4306051" cy="369332"/>
+            <a:off x="0" y="3588266"/>
+            <a:ext cx="3128229" cy="646331"/>
           </a:xfrm>
           <a:prstGeom prst="rect">
             <a:avLst/>
@@ -3739,9 +3854,18 @@
           </a:bodyPr>
           <a:lstStyle/>
           <a:p>
+            <a:pPr algn="ctr"/>
             <a:r>
               <a:rPr lang="de-DE" dirty="0" err="1"/>
-              <a:t>Quantity</a:t>
+              <a:t>number</a:t>
+            </a:r>
+            <a:r>
+              <a:rPr lang="de-DE" dirty="0"/>
+              <a:t>, </a:t>
+            </a:r>
+            <a:r>
+              <a:rPr lang="de-DE" dirty="0" err="1"/>
+              <a:t>technical</a:t>
             </a:r>
             <a:r>
               <a:rPr lang="de-DE" dirty="0"/>
@@ -3749,23 +3873,638 @@
             </a:r>
             <a:r>
               <a:rPr lang="de-DE" dirty="0" err="1"/>
-              <a:t>payload</a:t>
+              <a:t>economic</a:t>
             </a:r>
             <a:r>
               <a:rPr lang="de-DE" dirty="0"/>
-              <a:t>, </a:t>
-            </a:r>
+              <a:t>/</a:t>
+            </a:r>
+          </a:p>
+          <a:p>
+            <a:pPr algn="ctr"/>
             <a:r>
               <a:rPr lang="de-DE" dirty="0" err="1"/>
-              <a:t>coordinates</a:t>
-            </a:r>
-            <a:r>
-              <a:rPr lang="de-DE"/>
-              <a:t>, Präferenz </a:t>
-            </a:r>
-          </a:p>
-        </p:txBody>
-      </p:sp>
+              <a:t>ecological</a:t>
+            </a:r>
+            <a:r>
+              <a:rPr lang="de-DE" dirty="0"/>
+              <a:t> </a:t>
+            </a:r>
+            <a:r>
+              <a:rPr lang="de-DE" dirty="0" err="1"/>
+              <a:t>specifications</a:t>
+            </a:r>
+            <a:r>
+              <a:rPr lang="de-DE" dirty="0"/>
+              <a:t> </a:t>
+            </a:r>
+          </a:p>
+        </p:txBody>
+      </p:sp>
+      <p:sp>
+        <p:nvSpPr>
+          <p:cNvPr id="8" name="Rechteck 7">
+            <a:extLst>
+              <a:ext uri="{FF2B5EF4-FFF2-40B4-BE49-F238E27FC236}">
+                <a16:creationId xmlns:a16="http://schemas.microsoft.com/office/drawing/2014/main" id="{E31FA318-D5E4-194F-FDD1-928FB469C131}"/>
+              </a:ext>
+            </a:extLst>
+          </p:cNvPr>
+          <p:cNvSpPr/>
+          <p:nvPr/>
+        </p:nvSpPr>
+        <p:spPr>
+          <a:xfrm>
+            <a:off x="3854449" y="954900"/>
+            <a:ext cx="2781300" cy="646332"/>
+          </a:xfrm>
+          <a:prstGeom prst="rect">
+            <a:avLst/>
+          </a:prstGeom>
+        </p:spPr>
+        <p:style>
+          <a:lnRef idx="2">
+            <a:schemeClr val="accent1">
+              <a:shade val="15000"/>
+            </a:schemeClr>
+          </a:lnRef>
+          <a:fillRef idx="1">
+            <a:schemeClr val="accent1"/>
+          </a:fillRef>
+          <a:effectRef idx="0">
+            <a:schemeClr val="accent1"/>
+          </a:effectRef>
+          <a:fontRef idx="minor">
+            <a:schemeClr val="lt1"/>
+          </a:fontRef>
+        </p:style>
+        <p:txBody>
+          <a:bodyPr rtlCol="0" anchor="ctr"/>
+          <a:lstStyle/>
+          <a:p>
+            <a:pPr algn="ctr"/>
+            <a:r>
+              <a:rPr lang="de-DE" b="1" dirty="0" err="1"/>
+              <a:t>Costing</a:t>
+            </a:r>
+            <a:r>
+              <a:rPr lang="de-DE" b="1" dirty="0"/>
+              <a:t> </a:t>
+            </a:r>
+            <a:r>
+              <a:rPr lang="de-DE" b="1" dirty="0" err="1"/>
+              <a:t>tarifs</a:t>
+            </a:r>
+            <a:r>
+              <a:rPr lang="de-DE" b="1" dirty="0"/>
+              <a:t> &amp; </a:t>
+            </a:r>
+            <a:r>
+              <a:rPr lang="de-DE" b="1" dirty="0" err="1"/>
+              <a:t>emission</a:t>
+            </a:r>
+            <a:r>
+              <a:rPr lang="de-DE" b="1" dirty="0"/>
+              <a:t> </a:t>
+            </a:r>
+            <a:r>
+              <a:rPr lang="de-DE" b="1" dirty="0" err="1"/>
+              <a:t>declaration</a:t>
+            </a:r>
+            <a:r>
+              <a:rPr lang="de-DE" b="1" dirty="0"/>
+              <a:t> </a:t>
+            </a:r>
+            <a:r>
+              <a:rPr lang="de-DE" b="1" dirty="0" err="1"/>
+              <a:t>rules</a:t>
+            </a:r>
+            <a:endParaRPr lang="de-DE" b="1" dirty="0"/>
+          </a:p>
+        </p:txBody>
+      </p:sp>
+      <p:sp>
+        <p:nvSpPr>
+          <p:cNvPr id="9" name="Textfeld 8">
+            <a:extLst>
+              <a:ext uri="{FF2B5EF4-FFF2-40B4-BE49-F238E27FC236}">
+                <a16:creationId xmlns:a16="http://schemas.microsoft.com/office/drawing/2014/main" id="{E82A406C-6978-AAC2-58FB-31FE638A9806}"/>
+              </a:ext>
+            </a:extLst>
+          </p:cNvPr>
+          <p:cNvSpPr txBox="1"/>
+          <p:nvPr/>
+        </p:nvSpPr>
+        <p:spPr>
+          <a:xfrm>
+            <a:off x="3560246" y="497006"/>
+            <a:ext cx="3369705" cy="369332"/>
+          </a:xfrm>
+          <a:prstGeom prst="rect">
+            <a:avLst/>
+          </a:prstGeom>
+          <a:noFill/>
+        </p:spPr>
+        <p:txBody>
+          <a:bodyPr wrap="none" rtlCol="0">
+            <a:spAutoFit/>
+          </a:bodyPr>
+          <a:lstStyle/>
+          <a:p>
+            <a:pPr algn="ctr"/>
+            <a:r>
+              <a:rPr lang="de-DE" dirty="0" err="1"/>
+              <a:t>Allocation</a:t>
+            </a:r>
+            <a:r>
+              <a:rPr lang="de-DE" dirty="0"/>
+              <a:t> </a:t>
+            </a:r>
+            <a:r>
+              <a:rPr lang="de-DE" dirty="0" err="1"/>
+              <a:t>rules</a:t>
+            </a:r>
+            <a:r>
+              <a:rPr lang="de-DE" dirty="0"/>
+              <a:t>, pricing </a:t>
+            </a:r>
+            <a:r>
+              <a:rPr lang="de-DE" dirty="0" err="1"/>
+              <a:t>scheme</a:t>
+            </a:r>
+            <a:endParaRPr lang="de-DE" dirty="0"/>
+          </a:p>
+        </p:txBody>
+      </p:sp>
+      <p:sp>
+        <p:nvSpPr>
+          <p:cNvPr id="10" name="Rechteck: abgerundete Ecken 9">
+            <a:extLst>
+              <a:ext uri="{FF2B5EF4-FFF2-40B4-BE49-F238E27FC236}">
+                <a16:creationId xmlns:a16="http://schemas.microsoft.com/office/drawing/2014/main" id="{7E7AFD1E-1EFB-007D-4D5B-33BF7D1CD4D9}"/>
+              </a:ext>
+            </a:extLst>
+          </p:cNvPr>
+          <p:cNvSpPr/>
+          <p:nvPr/>
+        </p:nvSpPr>
+        <p:spPr>
+          <a:xfrm>
+            <a:off x="3412477" y="2103731"/>
+            <a:ext cx="3517473" cy="2315868"/>
+          </a:xfrm>
+          <a:prstGeom prst="roundRect">
+            <a:avLst/>
+          </a:prstGeom>
+        </p:spPr>
+        <p:style>
+          <a:lnRef idx="2">
+            <a:schemeClr val="accent1">
+              <a:shade val="15000"/>
+            </a:schemeClr>
+          </a:lnRef>
+          <a:fillRef idx="1">
+            <a:schemeClr val="accent1"/>
+          </a:fillRef>
+          <a:effectRef idx="0">
+            <a:schemeClr val="accent1"/>
+          </a:effectRef>
+          <a:fontRef idx="minor">
+            <a:schemeClr val="lt1"/>
+          </a:fontRef>
+        </p:style>
+        <p:txBody>
+          <a:bodyPr rtlCol="0" anchor="ctr"/>
+          <a:lstStyle/>
+          <a:p>
+            <a:pPr marL="285750" indent="-285750">
+              <a:spcAft>
+                <a:spcPts val="600"/>
+              </a:spcAft>
+              <a:buFont typeface="Arial" panose="020B0604020202020204" pitchFamily="34" charset="0"/>
+              <a:buChar char="•"/>
+            </a:pPr>
+            <a:r>
+              <a:rPr lang="en-US" b="1" i="1" noProof="0" dirty="0"/>
+              <a:t>Assignment</a:t>
+            </a:r>
+            <a:r>
+              <a:rPr lang="en-US" noProof="0" dirty="0"/>
+              <a:t> </a:t>
+            </a:r>
+            <a:r>
+              <a:rPr lang="en-US" noProof="0" dirty="0">
+                <a:sym typeface="Wingdings" panose="05000000000000000000" pitchFamily="2" charset="2"/>
+              </a:rPr>
+              <a:t> customers to vehicles</a:t>
+            </a:r>
+          </a:p>
+          <a:p>
+            <a:pPr marL="285750" indent="-285750">
+              <a:spcAft>
+                <a:spcPts val="600"/>
+              </a:spcAft>
+              <a:buFont typeface="Arial" panose="020B0604020202020204" pitchFamily="34" charset="0"/>
+              <a:buChar char="•"/>
+            </a:pPr>
+            <a:r>
+              <a:rPr lang="en-US" b="1" i="1" noProof="0" dirty="0">
+                <a:sym typeface="Wingdings" panose="05000000000000000000" pitchFamily="2" charset="2"/>
+              </a:rPr>
+              <a:t>Routing</a:t>
+            </a:r>
+            <a:r>
+              <a:rPr lang="en-US" noProof="0" dirty="0">
+                <a:sym typeface="Wingdings" panose="05000000000000000000" pitchFamily="2" charset="2"/>
+              </a:rPr>
+              <a:t>  sequence of customer visits</a:t>
+            </a:r>
+          </a:p>
+          <a:p>
+            <a:pPr marL="285750" indent="-285750">
+              <a:buFont typeface="Arial" panose="020B0604020202020204" pitchFamily="34" charset="0"/>
+              <a:buChar char="•"/>
+            </a:pPr>
+            <a:r>
+              <a:rPr lang="en-US" b="1" i="1" noProof="0" dirty="0">
+                <a:sym typeface="Wingdings" panose="05000000000000000000" pitchFamily="2" charset="2"/>
+              </a:rPr>
+              <a:t>Declaration</a:t>
+            </a:r>
+            <a:r>
+              <a:rPr lang="en-US" noProof="0" dirty="0">
+                <a:sym typeface="Wingdings" panose="05000000000000000000" pitchFamily="2" charset="2"/>
+              </a:rPr>
+              <a:t>  cost and emission declaration per customer</a:t>
+            </a:r>
+          </a:p>
+        </p:txBody>
+      </p:sp>
+      <p:pic>
+        <p:nvPicPr>
+          <p:cNvPr id="12" name="Grafik 11" descr="Blatt Silhouette">
+            <a:extLst>
+              <a:ext uri="{FF2B5EF4-FFF2-40B4-BE49-F238E27FC236}">
+                <a16:creationId xmlns:a16="http://schemas.microsoft.com/office/drawing/2014/main" id="{ED5DB579-C6ED-7F0E-DF46-9A79C8453F2A}"/>
+              </a:ext>
+            </a:extLst>
+          </p:cNvPr>
+          <p:cNvPicPr>
+            <a:picLocks noChangeAspect="1"/>
+          </p:cNvPicPr>
+          <p:nvPr/>
+        </p:nvPicPr>
+        <p:blipFill>
+          <a:blip>
+            <a:extLst>
+              <a:ext uri="{96DAC541-7B7A-43D3-8B79-37D633B846F1}">
+                <asvg:svgBlip xmlns:asvg="http://schemas.microsoft.com/office/drawing/2016/SVG/main" r:embed="rId2"/>
+              </a:ext>
+            </a:extLst>
+          </a:blip>
+          <a:stretch>
+            <a:fillRect/>
+          </a:stretch>
+        </p:blipFill>
+        <p:spPr>
+          <a:xfrm>
+            <a:off x="6521449" y="5529997"/>
+            <a:ext cx="787400" cy="787400"/>
+          </a:xfrm>
+          <a:prstGeom prst="rect">
+            <a:avLst/>
+          </a:prstGeom>
+        </p:spPr>
+      </p:pic>
+      <p:pic>
+        <p:nvPicPr>
+          <p:cNvPr id="15" name="Grafik 14" descr="LKW mit einfarbiger Füllung">
+            <a:extLst>
+              <a:ext uri="{FF2B5EF4-FFF2-40B4-BE49-F238E27FC236}">
+                <a16:creationId xmlns:a16="http://schemas.microsoft.com/office/drawing/2014/main" id="{97EFF3A3-C8C4-EF7E-EB01-D5C19A70FA6D}"/>
+              </a:ext>
+            </a:extLst>
+          </p:cNvPr>
+          <p:cNvPicPr>
+            <a:picLocks noChangeAspect="1"/>
+          </p:cNvPicPr>
+          <p:nvPr/>
+        </p:nvPicPr>
+        <p:blipFill>
+          <a:blip>
+            <a:extLst>
+              <a:ext uri="{96DAC541-7B7A-43D3-8B79-37D633B846F1}">
+                <asvg:svgBlip xmlns:asvg="http://schemas.microsoft.com/office/drawing/2016/SVG/main" r:embed="rId3"/>
+              </a:ext>
+            </a:extLst>
+          </a:blip>
+          <a:stretch>
+            <a:fillRect/>
+          </a:stretch>
+        </p:blipFill>
+        <p:spPr>
+          <a:xfrm>
+            <a:off x="299194" y="1937265"/>
+            <a:ext cx="914400" cy="914400"/>
+          </a:xfrm>
+          <a:prstGeom prst="rect">
+            <a:avLst/>
+          </a:prstGeom>
+        </p:spPr>
+      </p:pic>
+      <mc:AlternateContent xmlns:mc="http://schemas.openxmlformats.org/markup-compatibility/2006">
+        <mc:Choice xmlns:a14="http://schemas.microsoft.com/office/drawing/2010/main" Requires="a14">
+          <p:sp>
+            <p:nvSpPr>
+              <p:cNvPr id="17" name="Textfeld 16">
+                <a:extLst>
+                  <a:ext uri="{FF2B5EF4-FFF2-40B4-BE49-F238E27FC236}">
+                    <a16:creationId xmlns:a16="http://schemas.microsoft.com/office/drawing/2014/main" id="{5872E874-C2EA-C631-D916-B1F57CDBAAF6}"/>
+                  </a:ext>
+                </a:extLst>
+              </p:cNvPr>
+              <p:cNvSpPr txBox="1"/>
+              <p:nvPr/>
+            </p:nvSpPr>
+            <p:spPr>
+              <a:xfrm>
+                <a:off x="6605292" y="4791333"/>
+                <a:ext cx="575478" cy="830997"/>
+              </a:xfrm>
+              <a:prstGeom prst="rect">
+                <a:avLst/>
+              </a:prstGeom>
+              <a:noFill/>
+            </p:spPr>
+            <p:txBody>
+              <a:bodyPr wrap="none" lIns="0" tIns="0" rIns="0" bIns="0" rtlCol="0">
+                <a:spAutoFit/>
+              </a:bodyPr>
+              <a:lstStyle/>
+              <a:p>
+                <a14:m>
+                  <m:oMathPara xmlns:m="http://schemas.openxmlformats.org/officeDocument/2006/math">
+                    <m:oMathParaPr>
+                      <m:jc m:val="centerGroup"/>
+                    </m:oMathParaPr>
+                    <m:oMath xmlns:m="http://schemas.openxmlformats.org/officeDocument/2006/math">
+                      <m:r>
+                        <a:rPr lang="de-DE" sz="5400" b="1" i="1" smtClean="0">
+                          <a:latin typeface="Cambria Math" panose="02040503050406030204" pitchFamily="18" charset="0"/>
+                        </a:rPr>
+                        <m:t>€</m:t>
+                      </m:r>
+                    </m:oMath>
+                  </m:oMathPara>
+                </a14:m>
+                <a:endParaRPr lang="de-DE" sz="4800" b="1" dirty="0"/>
+              </a:p>
+            </p:txBody>
+          </p:sp>
+        </mc:Choice>
+        <mc:Fallback>
+          <p:sp>
+            <p:nvSpPr>
+              <p:cNvPr id="17" name="Textfeld 16">
+                <a:extLst>
+                  <a:ext uri="{FF2B5EF4-FFF2-40B4-BE49-F238E27FC236}">
+                    <a16:creationId xmlns:a16="http://schemas.microsoft.com/office/drawing/2014/main" id="{5872E874-C2EA-C631-D916-B1F57CDBAAF6}"/>
+                  </a:ext>
+                </a:extLst>
+              </p:cNvPr>
+              <p:cNvSpPr txBox="1">
+                <a:spLocks noRot="1" noChangeAspect="1" noMove="1" noResize="1" noEditPoints="1" noAdjustHandles="1" noChangeArrowheads="1" noChangeShapeType="1" noTextEdit="1"/>
+              </p:cNvSpPr>
+              <p:nvPr/>
+            </p:nvSpPr>
+            <p:spPr>
+              <a:xfrm>
+                <a:off x="6605292" y="4791333"/>
+                <a:ext cx="575478" cy="830997"/>
+              </a:xfrm>
+              <a:prstGeom prst="rect">
+                <a:avLst/>
+              </a:prstGeom>
+              <a:blipFill>
+                <a:blip r:embed="rId4"/>
+                <a:stretch>
+                  <a:fillRect/>
+                </a:stretch>
+              </a:blipFill>
+            </p:spPr>
+            <p:txBody>
+              <a:bodyPr/>
+              <a:lstStyle/>
+              <a:p>
+                <a:r>
+                  <a:rPr lang="de-DE">
+                    <a:noFill/>
+                  </a:rPr>
+                  <a:t> </a:t>
+                </a:r>
+              </a:p>
+            </p:txBody>
+          </p:sp>
+        </mc:Fallback>
+      </mc:AlternateContent>
+      <p:sp>
+        <p:nvSpPr>
+          <p:cNvPr id="18" name="Pfeil: nach oben 17">
+            <a:extLst>
+              <a:ext uri="{FF2B5EF4-FFF2-40B4-BE49-F238E27FC236}">
+                <a16:creationId xmlns:a16="http://schemas.microsoft.com/office/drawing/2014/main" id="{6055A4FB-F3CE-087C-539C-045EDDACD489}"/>
+              </a:ext>
+            </a:extLst>
+          </p:cNvPr>
+          <p:cNvSpPr/>
+          <p:nvPr/>
+        </p:nvSpPr>
+        <p:spPr>
+          <a:xfrm>
+            <a:off x="4883474" y="4422001"/>
+            <a:ext cx="463226" cy="460296"/>
+          </a:xfrm>
+          <a:prstGeom prst="upArrow">
+            <a:avLst/>
+          </a:prstGeom>
+        </p:spPr>
+        <p:style>
+          <a:lnRef idx="2">
+            <a:schemeClr val="accent1">
+              <a:shade val="15000"/>
+            </a:schemeClr>
+          </a:lnRef>
+          <a:fillRef idx="1">
+            <a:schemeClr val="accent1"/>
+          </a:fillRef>
+          <a:effectRef idx="0">
+            <a:schemeClr val="accent1"/>
+          </a:effectRef>
+          <a:fontRef idx="minor">
+            <a:schemeClr val="lt1"/>
+          </a:fontRef>
+        </p:style>
+        <p:txBody>
+          <a:bodyPr rtlCol="0" anchor="ctr"/>
+          <a:lstStyle/>
+          <a:p>
+            <a:pPr algn="ctr"/>
+            <a:endParaRPr lang="de-DE"/>
+          </a:p>
+        </p:txBody>
+      </p:sp>
+      <p:sp>
+        <p:nvSpPr>
+          <p:cNvPr id="19" name="Pfeil: nach oben 18">
+            <a:extLst>
+              <a:ext uri="{FF2B5EF4-FFF2-40B4-BE49-F238E27FC236}">
+                <a16:creationId xmlns:a16="http://schemas.microsoft.com/office/drawing/2014/main" id="{1772042A-D861-CB6D-DC74-E5A6C661346B}"/>
+              </a:ext>
+            </a:extLst>
+          </p:cNvPr>
+          <p:cNvSpPr/>
+          <p:nvPr/>
+        </p:nvSpPr>
+        <p:spPr>
+          <a:xfrm rot="5400000">
+            <a:off x="2808592" y="2802559"/>
+            <a:ext cx="463226" cy="744544"/>
+          </a:xfrm>
+          <a:prstGeom prst="upArrow">
+            <a:avLst/>
+          </a:prstGeom>
+        </p:spPr>
+        <p:style>
+          <a:lnRef idx="2">
+            <a:schemeClr val="accent1">
+              <a:shade val="15000"/>
+            </a:schemeClr>
+          </a:lnRef>
+          <a:fillRef idx="1">
+            <a:schemeClr val="accent1"/>
+          </a:fillRef>
+          <a:effectRef idx="0">
+            <a:schemeClr val="accent1"/>
+          </a:effectRef>
+          <a:fontRef idx="minor">
+            <a:schemeClr val="lt1"/>
+          </a:fontRef>
+        </p:style>
+        <p:txBody>
+          <a:bodyPr rtlCol="0" anchor="ctr"/>
+          <a:lstStyle/>
+          <a:p>
+            <a:pPr algn="ctr"/>
+            <a:endParaRPr lang="de-DE"/>
+          </a:p>
+        </p:txBody>
+      </p:sp>
+      <p:sp>
+        <p:nvSpPr>
+          <p:cNvPr id="20" name="Pfeil: nach oben 19">
+            <a:extLst>
+              <a:ext uri="{FF2B5EF4-FFF2-40B4-BE49-F238E27FC236}">
+                <a16:creationId xmlns:a16="http://schemas.microsoft.com/office/drawing/2014/main" id="{0FEA608C-E2D8-74D7-DCD5-3DB7C207D3AE}"/>
+              </a:ext>
+            </a:extLst>
+          </p:cNvPr>
+          <p:cNvSpPr/>
+          <p:nvPr/>
+        </p:nvSpPr>
+        <p:spPr>
+          <a:xfrm rot="10800000">
+            <a:off x="4908874" y="1622334"/>
+            <a:ext cx="463226" cy="460296"/>
+          </a:xfrm>
+          <a:prstGeom prst="upArrow">
+            <a:avLst/>
+          </a:prstGeom>
+        </p:spPr>
+        <p:style>
+          <a:lnRef idx="2">
+            <a:schemeClr val="accent1">
+              <a:shade val="15000"/>
+            </a:schemeClr>
+          </a:lnRef>
+          <a:fillRef idx="1">
+            <a:schemeClr val="accent1"/>
+          </a:fillRef>
+          <a:effectRef idx="0">
+            <a:schemeClr val="accent1"/>
+          </a:effectRef>
+          <a:fontRef idx="minor">
+            <a:schemeClr val="lt1"/>
+          </a:fontRef>
+        </p:style>
+        <p:txBody>
+          <a:bodyPr rtlCol="0" anchor="ctr"/>
+          <a:lstStyle/>
+          <a:p>
+            <a:pPr algn="ctr"/>
+            <a:endParaRPr lang="de-DE"/>
+          </a:p>
+        </p:txBody>
+      </p:sp>
+      <p:pic>
+        <p:nvPicPr>
+          <p:cNvPr id="21" name="Grafik 20" descr="Electric cargo truck icon">
+            <a:extLst>
+              <a:ext uri="{FF2B5EF4-FFF2-40B4-BE49-F238E27FC236}">
+                <a16:creationId xmlns:a16="http://schemas.microsoft.com/office/drawing/2014/main" id="{FF5332BC-C075-C6C0-501F-D095EADE5812}"/>
+              </a:ext>
+            </a:extLst>
+          </p:cNvPr>
+          <p:cNvPicPr>
+            <a:picLocks noChangeAspect="1"/>
+          </p:cNvPicPr>
+          <p:nvPr/>
+        </p:nvPicPr>
+        <p:blipFill>
+          <a:blip r:embed="rId5">
+            <a:clrChange>
+              <a:clrFrom>
+                <a:srgbClr val="FFFFFF"/>
+              </a:clrFrom>
+              <a:clrTo>
+                <a:srgbClr val="FFFFFF">
+                  <a:alpha val="0"/>
+                </a:srgbClr>
+              </a:clrTo>
+            </a:clrChange>
+            <a:duotone>
+              <a:schemeClr val="accent6">
+                <a:shade val="45000"/>
+                <a:satMod val="135000"/>
+              </a:schemeClr>
+              <a:prstClr val="white"/>
+            </a:duotone>
+            <a:extLst>
+              <a:ext uri="{BEBA8EAE-BF5A-486C-A8C5-ECC9F3942E4B}">
+                <a14:imgProps xmlns:a14="http://schemas.microsoft.com/office/drawing/2010/main">
+                  <a14:imgLayer r:embed="rId6">
+                    <a14:imgEffect>
+                      <a14:saturation sat="400000"/>
+                    </a14:imgEffect>
+                  </a14:imgLayer>
+                </a14:imgProps>
+              </a:ext>
+            </a:extLst>
+          </a:blip>
+          <a:srcRect t="17328" b="15892"/>
+          <a:stretch>
+            <a:fillRect/>
+          </a:stretch>
+        </p:blipFill>
+        <p:spPr>
+          <a:xfrm>
+            <a:off x="1484989" y="2090002"/>
+            <a:ext cx="967861" cy="646332"/>
+          </a:xfrm>
+          <a:prstGeom prst="rect">
+            <a:avLst/>
+          </a:prstGeom>
+        </p:spPr>
+      </p:pic>
     </p:spTree>
     <p:extLst>
       <p:ext uri="{BB962C8B-B14F-4D97-AF65-F5344CB8AC3E}">
@@ -3784,7 +4523,13 @@
   <p:cSld>
     <p:spTree>
       <p:nvGrpSpPr>
-        <p:cNvPr id="1" name=""/>
+        <p:cNvPr id="1" name="">
+          <a:extLst>
+            <a:ext uri="{FF2B5EF4-FFF2-40B4-BE49-F238E27FC236}">
+              <a16:creationId xmlns:a16="http://schemas.microsoft.com/office/drawing/2014/main" id="{063823DD-7241-E83E-D49C-35EA4A63A699}"/>
+            </a:ext>
+          </a:extLst>
+        </p:cNvPr>
         <p:cNvGrpSpPr/>
         <p:nvPr/>
       </p:nvGrpSpPr>
@@ -3798,10 +4543,10 @@
       </p:grpSpPr>
       <p:sp>
         <p:nvSpPr>
-          <p:cNvPr id="4" name="Rechteck: abgerundete Ecken 3">
-            <a:extLst>
-              <a:ext uri="{FF2B5EF4-FFF2-40B4-BE49-F238E27FC236}">
-                <a16:creationId xmlns:a16="http://schemas.microsoft.com/office/drawing/2014/main" id="{57FED58F-2330-73E9-196C-AFB3F7DA8845}"/>
+          <p:cNvPr id="4" name="Rechteck 3">
+            <a:extLst>
+              <a:ext uri="{FF2B5EF4-FFF2-40B4-BE49-F238E27FC236}">
+                <a16:creationId xmlns:a16="http://schemas.microsoft.com/office/drawing/2014/main" id="{73D084C4-BBD2-6F65-9B9A-062EA6F679F9}"/>
               </a:ext>
             </a:extLst>
           </p:cNvPr>
@@ -3810,10 +4555,126 @@
         </p:nvSpPr>
         <p:spPr>
           <a:xfrm>
-            <a:off x="3009900" y="1028700"/>
-            <a:ext cx="3251200" cy="800100"/>
-          </a:xfrm>
-          <a:prstGeom prst="roundRect">
+            <a:off x="4038600" y="4882297"/>
+            <a:ext cx="2184400" cy="647700"/>
+          </a:xfrm>
+          <a:prstGeom prst="rect">
+            <a:avLst/>
+          </a:prstGeom>
+        </p:spPr>
+        <p:style>
+          <a:lnRef idx="2">
+            <a:schemeClr val="dk1"/>
+          </a:lnRef>
+          <a:fillRef idx="1">
+            <a:schemeClr val="lt1"/>
+          </a:fillRef>
+          <a:effectRef idx="0">
+            <a:schemeClr val="dk1"/>
+          </a:effectRef>
+          <a:fontRef idx="minor">
+            <a:schemeClr val="dk1"/>
+          </a:fontRef>
+        </p:style>
+        <p:txBody>
+          <a:bodyPr rtlCol="0" anchor="ctr"/>
+          <a:lstStyle/>
+          <a:p>
+            <a:pPr algn="ctr"/>
+            <a:r>
+              <a:rPr lang="de-DE" b="1" dirty="0"/>
+              <a:t>Customer </a:t>
+            </a:r>
+            <a:r>
+              <a:rPr lang="de-DE" b="1" dirty="0" err="1"/>
+              <a:t>orders</a:t>
+            </a:r>
+            <a:endParaRPr lang="de-DE" b="1" dirty="0"/>
+          </a:p>
+        </p:txBody>
+      </p:sp>
+      <p:sp>
+        <p:nvSpPr>
+          <p:cNvPr id="5" name="Textfeld 4">
+            <a:extLst>
+              <a:ext uri="{FF2B5EF4-FFF2-40B4-BE49-F238E27FC236}">
+                <a16:creationId xmlns:a16="http://schemas.microsoft.com/office/drawing/2014/main" id="{EE25498F-3A7B-8710-F081-C739C1D5DBF5}"/>
+              </a:ext>
+            </a:extLst>
+          </p:cNvPr>
+          <p:cNvSpPr txBox="1"/>
+          <p:nvPr/>
+        </p:nvSpPr>
+        <p:spPr>
+          <a:xfrm>
+            <a:off x="3793478" y="5529997"/>
+            <a:ext cx="2674643" cy="646331"/>
+          </a:xfrm>
+          <a:prstGeom prst="rect">
+            <a:avLst/>
+          </a:prstGeom>
+          <a:noFill/>
+        </p:spPr>
+        <p:txBody>
+          <a:bodyPr wrap="none" rtlCol="0">
+            <a:spAutoFit/>
+          </a:bodyPr>
+          <a:lstStyle/>
+          <a:p>
+            <a:pPr algn="ctr"/>
+            <a:r>
+              <a:rPr lang="de-DE" dirty="0" err="1"/>
+              <a:t>Quantity</a:t>
+            </a:r>
+            <a:r>
+              <a:rPr lang="de-DE" dirty="0"/>
+              <a:t>/</a:t>
+            </a:r>
+            <a:r>
+              <a:rPr lang="de-DE" dirty="0" err="1"/>
+              <a:t>payload</a:t>
+            </a:r>
+            <a:r>
+              <a:rPr lang="de-DE" dirty="0"/>
+              <a:t>, </a:t>
+            </a:r>
+          </a:p>
+          <a:p>
+            <a:pPr algn="ctr"/>
+            <a:r>
+              <a:rPr lang="de-DE" dirty="0" err="1"/>
+              <a:t>coordinates</a:t>
+            </a:r>
+            <a:r>
+              <a:rPr lang="de-DE" dirty="0"/>
+              <a:t>, </a:t>
+            </a:r>
+            <a:r>
+              <a:rPr lang="de-DE" dirty="0" err="1"/>
+              <a:t>preferences</a:t>
+            </a:r>
+            <a:endParaRPr lang="de-DE" dirty="0"/>
+          </a:p>
+        </p:txBody>
+      </p:sp>
+      <p:sp>
+        <p:nvSpPr>
+          <p:cNvPr id="6" name="Rechteck 5">
+            <a:extLst>
+              <a:ext uri="{FF2B5EF4-FFF2-40B4-BE49-F238E27FC236}">
+                <a16:creationId xmlns:a16="http://schemas.microsoft.com/office/drawing/2014/main" id="{3AE7E38C-4B36-395A-0E41-6829E66422B7}"/>
+              </a:ext>
+            </a:extLst>
+          </p:cNvPr>
+          <p:cNvSpPr/>
+          <p:nvPr/>
+        </p:nvSpPr>
+        <p:spPr>
+          <a:xfrm>
+            <a:off x="459214" y="2851665"/>
+            <a:ext cx="2209800" cy="646332"/>
+          </a:xfrm>
+          <a:prstGeom prst="rect">
             <a:avLst/>
           </a:prstGeom>
         </p:spPr>
@@ -3839,26 +4700,93 @@
           <a:p>
             <a:pPr algn="ctr"/>
             <a:r>
-              <a:rPr lang="de-DE" sz="2400" b="1" dirty="0"/>
-              <a:t>Fleet </a:t>
-            </a:r>
-            <a:r>
-              <a:rPr lang="de-DE" sz="2400" b="1" dirty="0" err="1"/>
-              <a:t>size</a:t>
-            </a:r>
-            <a:r>
-              <a:rPr lang="de-DE" sz="2400" b="1" dirty="0"/>
-              <a:t> &amp; mix </a:t>
-            </a:r>
-          </a:p>
-        </p:txBody>
-      </p:sp>
-      <p:sp>
-        <p:nvSpPr>
-          <p:cNvPr id="5" name="Rechteck: abgerundete Ecken 4">
-            <a:extLst>
-              <a:ext uri="{FF2B5EF4-FFF2-40B4-BE49-F238E27FC236}">
-                <a16:creationId xmlns:a16="http://schemas.microsoft.com/office/drawing/2014/main" id="{8F346665-7912-451F-A1CB-62AA3253F316}"/>
+              <a:rPr lang="de-DE" b="1" dirty="0"/>
+              <a:t>Truck Fleet</a:t>
+            </a:r>
+          </a:p>
+        </p:txBody>
+      </p:sp>
+      <p:sp>
+        <p:nvSpPr>
+          <p:cNvPr id="7" name="Textfeld 6">
+            <a:extLst>
+              <a:ext uri="{FF2B5EF4-FFF2-40B4-BE49-F238E27FC236}">
+                <a16:creationId xmlns:a16="http://schemas.microsoft.com/office/drawing/2014/main" id="{BE532174-BB7E-F112-D153-3DCECBCB83A7}"/>
+              </a:ext>
+            </a:extLst>
+          </p:cNvPr>
+          <p:cNvSpPr txBox="1"/>
+          <p:nvPr/>
+        </p:nvSpPr>
+        <p:spPr>
+          <a:xfrm>
+            <a:off x="0" y="3588266"/>
+            <a:ext cx="3128229" cy="646331"/>
+          </a:xfrm>
+          <a:prstGeom prst="rect">
+            <a:avLst/>
+          </a:prstGeom>
+          <a:noFill/>
+        </p:spPr>
+        <p:txBody>
+          <a:bodyPr wrap="none" rtlCol="0">
+            <a:spAutoFit/>
+          </a:bodyPr>
+          <a:lstStyle/>
+          <a:p>
+            <a:pPr algn="ctr"/>
+            <a:r>
+              <a:rPr lang="de-DE" dirty="0" err="1"/>
+              <a:t>number</a:t>
+            </a:r>
+            <a:r>
+              <a:rPr lang="de-DE" dirty="0"/>
+              <a:t>, </a:t>
+            </a:r>
+            <a:r>
+              <a:rPr lang="de-DE" dirty="0" err="1"/>
+              <a:t>technical</a:t>
+            </a:r>
+            <a:r>
+              <a:rPr lang="de-DE" dirty="0"/>
+              <a:t>/</a:t>
+            </a:r>
+            <a:r>
+              <a:rPr lang="de-DE" dirty="0" err="1"/>
+              <a:t>economic</a:t>
+            </a:r>
+            <a:r>
+              <a:rPr lang="de-DE" dirty="0"/>
+              <a:t>/</a:t>
+            </a:r>
+          </a:p>
+          <a:p>
+            <a:pPr algn="ctr"/>
+            <a:r>
+              <a:rPr lang="de-DE" dirty="0" err="1"/>
+              <a:t>ecological</a:t>
+            </a:r>
+            <a:r>
+              <a:rPr lang="de-DE" dirty="0"/>
+              <a:t> </a:t>
+            </a:r>
+            <a:r>
+              <a:rPr lang="de-DE" dirty="0" err="1"/>
+              <a:t>specifications</a:t>
+            </a:r>
+            <a:r>
+              <a:rPr lang="de-DE" dirty="0"/>
+              <a:t> </a:t>
+            </a:r>
+          </a:p>
+        </p:txBody>
+      </p:sp>
+      <p:sp>
+        <p:nvSpPr>
+          <p:cNvPr id="8" name="Rechteck 7">
+            <a:extLst>
+              <a:ext uri="{FF2B5EF4-FFF2-40B4-BE49-F238E27FC236}">
+                <a16:creationId xmlns:a16="http://schemas.microsoft.com/office/drawing/2014/main" id="{9E308A23-0ECD-8F5E-80A0-CA545CC99C4D}"/>
               </a:ext>
             </a:extLst>
           </p:cNvPr>
@@ -3867,10 +4795,10 @@
         </p:nvSpPr>
         <p:spPr>
           <a:xfrm>
-            <a:off x="3009900" y="2425700"/>
-            <a:ext cx="3251200" cy="800100"/>
-          </a:xfrm>
-          <a:prstGeom prst="roundRect">
+            <a:off x="3854449" y="954900"/>
+            <a:ext cx="2781300" cy="646332"/>
+          </a:xfrm>
+          <a:prstGeom prst="rect">
             <a:avLst/>
           </a:prstGeom>
         </p:spPr>
@@ -3896,30 +4824,332 @@
           <a:p>
             <a:pPr algn="ctr"/>
             <a:r>
-              <a:rPr lang="de-DE" sz="2400" b="1" dirty="0" err="1"/>
-              <a:t>Cost</a:t>
-            </a:r>
-            <a:r>
-              <a:rPr lang="de-DE" sz="2400" b="1" dirty="0"/>
+              <a:rPr lang="de-DE" b="1" dirty="0" err="1"/>
+              <a:t>Costing</a:t>
+            </a:r>
+            <a:r>
+              <a:rPr lang="de-DE" b="1" dirty="0"/>
               <a:t> </a:t>
             </a:r>
             <a:r>
-              <a:rPr lang="de-DE" sz="2400" b="1" dirty="0" err="1"/>
-              <a:t>Tarifing</a:t>
-            </a:r>
-            <a:r>
-              <a:rPr lang="de-DE" sz="2400" b="1" dirty="0"/>
-              <a:t> &amp; Emission Declaration</a:t>
-            </a:r>
-          </a:p>
-        </p:txBody>
-      </p:sp>
-      <p:sp>
-        <p:nvSpPr>
-          <p:cNvPr id="6" name="Rechteck: abgerundete Ecken 5">
-            <a:extLst>
-              <a:ext uri="{FF2B5EF4-FFF2-40B4-BE49-F238E27FC236}">
-                <a16:creationId xmlns:a16="http://schemas.microsoft.com/office/drawing/2014/main" id="{E61BFAA7-58AB-1AD5-C92F-E747557E060E}"/>
+              <a:rPr lang="de-DE" b="1" dirty="0" err="1"/>
+              <a:t>tarifs</a:t>
+            </a:r>
+            <a:r>
+              <a:rPr lang="de-DE" b="1" dirty="0"/>
+              <a:t> &amp; </a:t>
+            </a:r>
+            <a:r>
+              <a:rPr lang="de-DE" b="1" dirty="0" err="1"/>
+              <a:t>emission</a:t>
+            </a:r>
+            <a:r>
+              <a:rPr lang="de-DE" b="1" dirty="0"/>
+              <a:t> </a:t>
+            </a:r>
+            <a:r>
+              <a:rPr lang="de-DE" b="1" dirty="0" err="1"/>
+              <a:t>declaration</a:t>
+            </a:r>
+            <a:r>
+              <a:rPr lang="de-DE" b="1" dirty="0"/>
+              <a:t> </a:t>
+            </a:r>
+            <a:r>
+              <a:rPr lang="de-DE" b="1" dirty="0" err="1"/>
+              <a:t>rules</a:t>
+            </a:r>
+            <a:endParaRPr lang="de-DE" b="1" dirty="0"/>
+          </a:p>
+        </p:txBody>
+      </p:sp>
+      <p:sp>
+        <p:nvSpPr>
+          <p:cNvPr id="9" name="Textfeld 8">
+            <a:extLst>
+              <a:ext uri="{FF2B5EF4-FFF2-40B4-BE49-F238E27FC236}">
+                <a16:creationId xmlns:a16="http://schemas.microsoft.com/office/drawing/2014/main" id="{801889D2-24C1-4EE2-9DC8-33757496F7A2}"/>
+              </a:ext>
+            </a:extLst>
+          </p:cNvPr>
+          <p:cNvSpPr txBox="1"/>
+          <p:nvPr/>
+        </p:nvSpPr>
+        <p:spPr>
+          <a:xfrm>
+            <a:off x="3560246" y="497006"/>
+            <a:ext cx="3369705" cy="369332"/>
+          </a:xfrm>
+          <a:prstGeom prst="rect">
+            <a:avLst/>
+          </a:prstGeom>
+          <a:noFill/>
+        </p:spPr>
+        <p:txBody>
+          <a:bodyPr wrap="none" rtlCol="0">
+            <a:spAutoFit/>
+          </a:bodyPr>
+          <a:lstStyle/>
+          <a:p>
+            <a:pPr algn="ctr"/>
+            <a:r>
+              <a:rPr lang="de-DE" dirty="0" err="1"/>
+              <a:t>Allocation</a:t>
+            </a:r>
+            <a:r>
+              <a:rPr lang="de-DE" dirty="0"/>
+              <a:t> </a:t>
+            </a:r>
+            <a:r>
+              <a:rPr lang="de-DE" dirty="0" err="1"/>
+              <a:t>rules</a:t>
+            </a:r>
+            <a:r>
+              <a:rPr lang="de-DE" dirty="0"/>
+              <a:t>, pricing </a:t>
+            </a:r>
+            <a:r>
+              <a:rPr lang="de-DE" dirty="0" err="1"/>
+              <a:t>scheme</a:t>
+            </a:r>
+            <a:endParaRPr lang="de-DE" dirty="0"/>
+          </a:p>
+        </p:txBody>
+      </p:sp>
+      <p:pic>
+        <p:nvPicPr>
+          <p:cNvPr id="12" name="Grafik 11" descr="Blatt Silhouette">
+            <a:extLst>
+              <a:ext uri="{FF2B5EF4-FFF2-40B4-BE49-F238E27FC236}">
+                <a16:creationId xmlns:a16="http://schemas.microsoft.com/office/drawing/2014/main" id="{A7060789-08BA-496C-643D-7555C4E37CA7}"/>
+              </a:ext>
+            </a:extLst>
+          </p:cNvPr>
+          <p:cNvPicPr>
+            <a:picLocks noChangeAspect="1"/>
+          </p:cNvPicPr>
+          <p:nvPr/>
+        </p:nvPicPr>
+        <p:blipFill>
+          <a:blip>
+            <a:extLst>
+              <a:ext uri="{96DAC541-7B7A-43D3-8B79-37D633B846F1}">
+                <asvg:svgBlip xmlns:asvg="http://schemas.microsoft.com/office/drawing/2016/SVG/main" r:embed="rId2"/>
+              </a:ext>
+            </a:extLst>
+          </a:blip>
+          <a:stretch>
+            <a:fillRect/>
+          </a:stretch>
+        </p:blipFill>
+        <p:spPr>
+          <a:xfrm>
+            <a:off x="6521449" y="5529997"/>
+            <a:ext cx="787400" cy="787400"/>
+          </a:xfrm>
+          <a:prstGeom prst="rect">
+            <a:avLst/>
+          </a:prstGeom>
+        </p:spPr>
+      </p:pic>
+      <p:pic>
+        <p:nvPicPr>
+          <p:cNvPr id="15" name="Grafik 14" descr="LKW mit einfarbiger Füllung">
+            <a:extLst>
+              <a:ext uri="{FF2B5EF4-FFF2-40B4-BE49-F238E27FC236}">
+                <a16:creationId xmlns:a16="http://schemas.microsoft.com/office/drawing/2014/main" id="{9BCE7510-4AD0-CECF-16D6-07A4DC6309F3}"/>
+              </a:ext>
+            </a:extLst>
+          </p:cNvPr>
+          <p:cNvPicPr>
+            <a:picLocks noChangeAspect="1"/>
+          </p:cNvPicPr>
+          <p:nvPr/>
+        </p:nvPicPr>
+        <p:blipFill>
+          <a:blip>
+            <a:extLst>
+              <a:ext uri="{96DAC541-7B7A-43D3-8B79-37D633B846F1}">
+                <asvg:svgBlip xmlns:asvg="http://schemas.microsoft.com/office/drawing/2016/SVG/main" r:embed="rId3"/>
+              </a:ext>
+            </a:extLst>
+          </a:blip>
+          <a:stretch>
+            <a:fillRect/>
+          </a:stretch>
+        </p:blipFill>
+        <p:spPr>
+          <a:xfrm>
+            <a:off x="299194" y="1937265"/>
+            <a:ext cx="914400" cy="914400"/>
+          </a:xfrm>
+          <a:prstGeom prst="rect">
+            <a:avLst/>
+          </a:prstGeom>
+        </p:spPr>
+      </p:pic>
+      <p:pic>
+        <p:nvPicPr>
+          <p:cNvPr id="16" name="Grafik 15" descr="Electric cargo truck icon">
+            <a:extLst>
+              <a:ext uri="{FF2B5EF4-FFF2-40B4-BE49-F238E27FC236}">
+                <a16:creationId xmlns:a16="http://schemas.microsoft.com/office/drawing/2014/main" id="{33DB5B34-5A31-A5D5-E9EB-060A531D7E02}"/>
+              </a:ext>
+            </a:extLst>
+          </p:cNvPr>
+          <p:cNvPicPr>
+            <a:picLocks noChangeAspect="1"/>
+          </p:cNvPicPr>
+          <p:nvPr/>
+        </p:nvPicPr>
+        <p:blipFill>
+          <a:blip r:embed="rId4">
+            <a:clrChange>
+              <a:clrFrom>
+                <a:srgbClr val="FFFFFF"/>
+              </a:clrFrom>
+              <a:clrTo>
+                <a:srgbClr val="FFFFFF">
+                  <a:alpha val="0"/>
+                </a:srgbClr>
+              </a:clrTo>
+            </a:clrChange>
+            <a:duotone>
+              <a:schemeClr val="accent6">
+                <a:shade val="45000"/>
+                <a:satMod val="135000"/>
+              </a:schemeClr>
+              <a:prstClr val="white"/>
+            </a:duotone>
+            <a:extLst>
+              <a:ext uri="{BEBA8EAE-BF5A-486C-A8C5-ECC9F3942E4B}">
+                <a14:imgProps xmlns:a14="http://schemas.microsoft.com/office/drawing/2010/main">
+                  <a14:imgLayer r:embed="rId5">
+                    <a14:imgEffect>
+                      <a14:saturation sat="400000"/>
+                    </a14:imgEffect>
+                  </a14:imgLayer>
+                </a14:imgProps>
+              </a:ext>
+            </a:extLst>
+          </a:blip>
+          <a:srcRect t="17328" b="15892"/>
+          <a:stretch>
+            <a:fillRect/>
+          </a:stretch>
+        </p:blipFill>
+        <p:spPr>
+          <a:xfrm>
+            <a:off x="1484989" y="2090002"/>
+            <a:ext cx="967861" cy="646332"/>
+          </a:xfrm>
+          <a:prstGeom prst="rect">
+            <a:avLst/>
+          </a:prstGeom>
+        </p:spPr>
+      </p:pic>
+      <mc:AlternateContent xmlns:mc="http://schemas.openxmlformats.org/markup-compatibility/2006">
+        <mc:Choice xmlns:a14="http://schemas.microsoft.com/office/drawing/2010/main" Requires="a14">
+          <p:sp>
+            <p:nvSpPr>
+              <p:cNvPr id="17" name="Textfeld 16">
+                <a:extLst>
+                  <a:ext uri="{FF2B5EF4-FFF2-40B4-BE49-F238E27FC236}">
+                    <a16:creationId xmlns:a16="http://schemas.microsoft.com/office/drawing/2014/main" id="{FBA074BD-AB63-DC7E-60FF-CB44A1771FF0}"/>
+                  </a:ext>
+                </a:extLst>
+              </p:cNvPr>
+              <p:cNvSpPr txBox="1"/>
+              <p:nvPr/>
+            </p:nvSpPr>
+            <p:spPr>
+              <a:xfrm>
+                <a:off x="6605292" y="4791333"/>
+                <a:ext cx="575478" cy="830997"/>
+              </a:xfrm>
+              <a:prstGeom prst="rect">
+                <a:avLst/>
+              </a:prstGeom>
+              <a:noFill/>
+            </p:spPr>
+            <p:txBody>
+              <a:bodyPr wrap="none" lIns="0" tIns="0" rIns="0" bIns="0" rtlCol="0">
+                <a:spAutoFit/>
+              </a:bodyPr>
+              <a:lstStyle/>
+              <a:p>
+                <a:pPr/>
+                <a14:m>
+                  <m:oMathPara xmlns:m="http://schemas.openxmlformats.org/officeDocument/2006/math">
+                    <m:oMathParaPr>
+                      <m:jc m:val="centerGroup"/>
+                    </m:oMathParaPr>
+                    <m:oMath xmlns:m="http://schemas.openxmlformats.org/officeDocument/2006/math">
+                      <m:r>
+                        <a:rPr lang="de-DE" sz="5400" b="1" i="1" smtClean="0">
+                          <a:latin typeface="Cambria Math" panose="02040503050406030204" pitchFamily="18" charset="0"/>
+                        </a:rPr>
+                        <m:t>€</m:t>
+                      </m:r>
+                    </m:oMath>
+                  </m:oMathPara>
+                </a14:m>
+                <a:endParaRPr lang="de-DE" sz="4800" b="1" dirty="0"/>
+              </a:p>
+            </p:txBody>
+          </p:sp>
+        </mc:Choice>
+        <mc:Fallback>
+          <p:sp>
+            <p:nvSpPr>
+              <p:cNvPr id="17" name="Textfeld 16">
+                <a:extLst>
+                  <a:ext uri="{FF2B5EF4-FFF2-40B4-BE49-F238E27FC236}">
+                    <a16:creationId xmlns:a16="http://schemas.microsoft.com/office/drawing/2014/main" id="{FBA074BD-AB63-DC7E-60FF-CB44A1771FF0}"/>
+                  </a:ext>
+                </a:extLst>
+              </p:cNvPr>
+              <p:cNvSpPr txBox="1">
+                <a:spLocks noRot="1" noChangeAspect="1" noMove="1" noResize="1" noEditPoints="1" noAdjustHandles="1" noChangeArrowheads="1" noChangeShapeType="1" noTextEdit="1"/>
+              </p:cNvSpPr>
+              <p:nvPr/>
+            </p:nvSpPr>
+            <p:spPr>
+              <a:xfrm>
+                <a:off x="6605292" y="4791333"/>
+                <a:ext cx="575478" cy="830997"/>
+              </a:xfrm>
+              <a:prstGeom prst="rect">
+                <a:avLst/>
+              </a:prstGeom>
+              <a:blipFill>
+                <a:blip r:embed="rId6"/>
+                <a:stretch>
+                  <a:fillRect/>
+                </a:stretch>
+              </a:blipFill>
+            </p:spPr>
+            <p:txBody>
+              <a:bodyPr/>
+              <a:lstStyle/>
+              <a:p>
+                <a:r>
+                  <a:rPr lang="de-DE">
+                    <a:noFill/>
+                  </a:rPr>
+                  <a:t> </a:t>
+                </a:r>
+              </a:p>
+            </p:txBody>
+          </p:sp>
+        </mc:Fallback>
+      </mc:AlternateContent>
+      <p:sp>
+        <p:nvSpPr>
+          <p:cNvPr id="18" name="Pfeil: nach oben 17">
+            <a:extLst>
+              <a:ext uri="{FF2B5EF4-FFF2-40B4-BE49-F238E27FC236}">
+                <a16:creationId xmlns:a16="http://schemas.microsoft.com/office/drawing/2014/main" id="{72FA917B-DD17-8FD7-2101-F21F2220E3B7}"/>
               </a:ext>
             </a:extLst>
           </p:cNvPr>
@@ -3928,10 +5158,10 @@
         </p:nvSpPr>
         <p:spPr>
           <a:xfrm>
-            <a:off x="3009900" y="3835400"/>
-            <a:ext cx="3251200" cy="800100"/>
-          </a:xfrm>
-          <a:prstGeom prst="roundRect">
+            <a:off x="4883474" y="4422001"/>
+            <a:ext cx="463226" cy="460296"/>
+          </a:xfrm>
+          <a:prstGeom prst="upArrow">
             <a:avLst/>
           </a:prstGeom>
         </p:spPr>
@@ -3956,6 +5186,2491 @@
           <a:lstStyle/>
           <a:p>
             <a:pPr algn="ctr"/>
+            <a:endParaRPr lang="de-DE"/>
+          </a:p>
+        </p:txBody>
+      </p:sp>
+      <p:sp>
+        <p:nvSpPr>
+          <p:cNvPr id="19" name="Pfeil: nach oben 18">
+            <a:extLst>
+              <a:ext uri="{FF2B5EF4-FFF2-40B4-BE49-F238E27FC236}">
+                <a16:creationId xmlns:a16="http://schemas.microsoft.com/office/drawing/2014/main" id="{8E0EB6FE-FEE3-047B-1837-48F65E45F7CB}"/>
+              </a:ext>
+            </a:extLst>
+          </p:cNvPr>
+          <p:cNvSpPr/>
+          <p:nvPr/>
+        </p:nvSpPr>
+        <p:spPr>
+          <a:xfrm rot="5400000">
+            <a:off x="2808592" y="2802559"/>
+            <a:ext cx="463226" cy="744544"/>
+          </a:xfrm>
+          <a:prstGeom prst="upArrow">
+            <a:avLst/>
+          </a:prstGeom>
+        </p:spPr>
+        <p:style>
+          <a:lnRef idx="2">
+            <a:schemeClr val="accent1">
+              <a:shade val="15000"/>
+            </a:schemeClr>
+          </a:lnRef>
+          <a:fillRef idx="1">
+            <a:schemeClr val="accent1"/>
+          </a:fillRef>
+          <a:effectRef idx="0">
+            <a:schemeClr val="accent1"/>
+          </a:effectRef>
+          <a:fontRef idx="minor">
+            <a:schemeClr val="lt1"/>
+          </a:fontRef>
+        </p:style>
+        <p:txBody>
+          <a:bodyPr rtlCol="0" anchor="ctr"/>
+          <a:lstStyle/>
+          <a:p>
+            <a:pPr algn="ctr"/>
+            <a:endParaRPr lang="de-DE"/>
+          </a:p>
+        </p:txBody>
+      </p:sp>
+      <p:sp>
+        <p:nvSpPr>
+          <p:cNvPr id="20" name="Pfeil: nach oben 19">
+            <a:extLst>
+              <a:ext uri="{FF2B5EF4-FFF2-40B4-BE49-F238E27FC236}">
+                <a16:creationId xmlns:a16="http://schemas.microsoft.com/office/drawing/2014/main" id="{5CA1F519-B42A-3C6A-EBDD-1AEC92FA7A24}"/>
+              </a:ext>
+            </a:extLst>
+          </p:cNvPr>
+          <p:cNvSpPr/>
+          <p:nvPr/>
+        </p:nvSpPr>
+        <p:spPr>
+          <a:xfrm rot="10800000">
+            <a:off x="4908874" y="1622334"/>
+            <a:ext cx="463226" cy="460296"/>
+          </a:xfrm>
+          <a:prstGeom prst="upArrow">
+            <a:avLst/>
+          </a:prstGeom>
+        </p:spPr>
+        <p:style>
+          <a:lnRef idx="2">
+            <a:schemeClr val="accent1">
+              <a:shade val="15000"/>
+            </a:schemeClr>
+          </a:lnRef>
+          <a:fillRef idx="1">
+            <a:schemeClr val="accent1"/>
+          </a:fillRef>
+          <a:effectRef idx="0">
+            <a:schemeClr val="accent1"/>
+          </a:effectRef>
+          <a:fontRef idx="minor">
+            <a:schemeClr val="lt1"/>
+          </a:fontRef>
+        </p:style>
+        <p:txBody>
+          <a:bodyPr rtlCol="0" anchor="ctr"/>
+          <a:lstStyle/>
+          <a:p>
+            <a:pPr algn="ctr"/>
+            <a:endParaRPr lang="de-DE"/>
+          </a:p>
+        </p:txBody>
+      </p:sp>
+      <p:sp>
+        <p:nvSpPr>
+          <p:cNvPr id="2" name="Ellipse 1">
+            <a:extLst>
+              <a:ext uri="{FF2B5EF4-FFF2-40B4-BE49-F238E27FC236}">
+                <a16:creationId xmlns:a16="http://schemas.microsoft.com/office/drawing/2014/main" id="{4B1C8A52-8AEF-DB0D-8E31-DC4717A7C0DD}"/>
+              </a:ext>
+            </a:extLst>
+          </p:cNvPr>
+          <p:cNvSpPr/>
+          <p:nvPr/>
+        </p:nvSpPr>
+        <p:spPr>
+          <a:xfrm>
+            <a:off x="4406900" y="2336800"/>
+            <a:ext cx="324000" cy="324000"/>
+          </a:xfrm>
+          <a:prstGeom prst="ellipse">
+            <a:avLst/>
+          </a:prstGeom>
+        </p:spPr>
+        <p:style>
+          <a:lnRef idx="3">
+            <a:schemeClr val="lt1"/>
+          </a:lnRef>
+          <a:fillRef idx="1">
+            <a:schemeClr val="accent2"/>
+          </a:fillRef>
+          <a:effectRef idx="1">
+            <a:schemeClr val="accent2"/>
+          </a:effectRef>
+          <a:fontRef idx="minor">
+            <a:schemeClr val="lt1"/>
+          </a:fontRef>
+        </p:style>
+        <p:txBody>
+          <a:bodyPr rtlCol="0" anchor="ctr"/>
+          <a:lstStyle/>
+          <a:p>
+            <a:pPr algn="ctr"/>
+            <a:r>
+              <a:rPr lang="de-DE" dirty="0"/>
+              <a:t>€</a:t>
+            </a:r>
+          </a:p>
+        </p:txBody>
+      </p:sp>
+      <p:sp>
+        <p:nvSpPr>
+          <p:cNvPr id="11" name="Ellipse 10">
+            <a:extLst>
+              <a:ext uri="{FF2B5EF4-FFF2-40B4-BE49-F238E27FC236}">
+                <a16:creationId xmlns:a16="http://schemas.microsoft.com/office/drawing/2014/main" id="{B781820A-39FF-386C-B41E-E14CB4933471}"/>
+              </a:ext>
+            </a:extLst>
+          </p:cNvPr>
+          <p:cNvSpPr/>
+          <p:nvPr/>
+        </p:nvSpPr>
+        <p:spPr>
+          <a:xfrm>
+            <a:off x="4867761" y="3632986"/>
+            <a:ext cx="288000" cy="288000"/>
+          </a:xfrm>
+          <a:prstGeom prst="ellipse">
+            <a:avLst/>
+          </a:prstGeom>
+        </p:spPr>
+        <p:style>
+          <a:lnRef idx="3">
+            <a:schemeClr val="lt1"/>
+          </a:lnRef>
+          <a:fillRef idx="1">
+            <a:schemeClr val="accent2"/>
+          </a:fillRef>
+          <a:effectRef idx="1">
+            <a:schemeClr val="accent2"/>
+          </a:effectRef>
+          <a:fontRef idx="minor">
+            <a:schemeClr val="lt1"/>
+          </a:fontRef>
+        </p:style>
+        <p:txBody>
+          <a:bodyPr rtlCol="0" anchor="ctr"/>
+          <a:lstStyle/>
+          <a:p>
+            <a:pPr algn="ctr"/>
+            <a:r>
+              <a:rPr lang="de-DE" dirty="0"/>
+              <a:t>€</a:t>
+            </a:r>
+          </a:p>
+        </p:txBody>
+      </p:sp>
+      <p:sp>
+        <p:nvSpPr>
+          <p:cNvPr id="14" name="Rechteck 13">
+            <a:extLst>
+              <a:ext uri="{FF2B5EF4-FFF2-40B4-BE49-F238E27FC236}">
+                <a16:creationId xmlns:a16="http://schemas.microsoft.com/office/drawing/2014/main" id="{BCECBEAD-A7C7-8701-9F38-DC751DDF59A4}"/>
+              </a:ext>
+            </a:extLst>
+          </p:cNvPr>
+          <p:cNvSpPr/>
+          <p:nvPr/>
+        </p:nvSpPr>
+        <p:spPr>
+          <a:xfrm>
+            <a:off x="4756748" y="3094235"/>
+            <a:ext cx="216000" cy="216000"/>
+          </a:xfrm>
+          <a:prstGeom prst="rect">
+            <a:avLst/>
+          </a:prstGeom>
+        </p:spPr>
+        <p:style>
+          <a:lnRef idx="2">
+            <a:schemeClr val="dk1">
+              <a:shade val="15000"/>
+            </a:schemeClr>
+          </a:lnRef>
+          <a:fillRef idx="1">
+            <a:schemeClr val="dk1"/>
+          </a:fillRef>
+          <a:effectRef idx="0">
+            <a:schemeClr val="dk1"/>
+          </a:effectRef>
+          <a:fontRef idx="minor">
+            <a:schemeClr val="lt1"/>
+          </a:fontRef>
+        </p:style>
+        <p:txBody>
+          <a:bodyPr rtlCol="0" anchor="ctr"/>
+          <a:lstStyle/>
+          <a:p>
+            <a:pPr algn="ctr"/>
+            <a:endParaRPr lang="de-DE"/>
+          </a:p>
+        </p:txBody>
+      </p:sp>
+      <p:grpSp>
+        <p:nvGrpSpPr>
+          <p:cNvPr id="35" name="Gruppieren 34">
+            <a:extLst>
+              <a:ext uri="{FF2B5EF4-FFF2-40B4-BE49-F238E27FC236}">
+                <a16:creationId xmlns:a16="http://schemas.microsoft.com/office/drawing/2014/main" id="{24504D09-A144-9B28-8BDC-7347DEB522FB}"/>
+              </a:ext>
+            </a:extLst>
+          </p:cNvPr>
+          <p:cNvGrpSpPr/>
+          <p:nvPr/>
+        </p:nvGrpSpPr>
+        <p:grpSpPr>
+          <a:xfrm>
+            <a:off x="3655437" y="2556334"/>
+            <a:ext cx="360000" cy="360000"/>
+            <a:chOff x="5475900" y="2556549"/>
+            <a:chExt cx="360000" cy="360000"/>
+          </a:xfrm>
+        </p:grpSpPr>
+        <p:sp>
+          <p:nvSpPr>
+            <p:cNvPr id="3" name="Ellipse 2">
+              <a:extLst>
+                <a:ext uri="{FF2B5EF4-FFF2-40B4-BE49-F238E27FC236}">
+                  <a16:creationId xmlns:a16="http://schemas.microsoft.com/office/drawing/2014/main" id="{8F850D80-72E8-9A31-5B6D-DB3A5CEDADA0}"/>
+                </a:ext>
+              </a:extLst>
+            </p:cNvPr>
+            <p:cNvSpPr/>
+            <p:nvPr/>
+          </p:nvSpPr>
+          <p:spPr>
+            <a:xfrm>
+              <a:off x="5475900" y="2556549"/>
+              <a:ext cx="360000" cy="360000"/>
+            </a:xfrm>
+            <a:prstGeom prst="ellipse">
+              <a:avLst/>
+            </a:prstGeom>
+          </p:spPr>
+          <p:style>
+            <a:lnRef idx="3">
+              <a:schemeClr val="lt1"/>
+            </a:lnRef>
+            <a:fillRef idx="1">
+              <a:schemeClr val="accent6"/>
+            </a:fillRef>
+            <a:effectRef idx="1">
+              <a:schemeClr val="accent6"/>
+            </a:effectRef>
+            <a:fontRef idx="minor">
+              <a:schemeClr val="lt1"/>
+            </a:fontRef>
+          </p:style>
+          <p:txBody>
+            <a:bodyPr rtlCol="0" anchor="ctr"/>
+            <a:lstStyle/>
+            <a:p>
+              <a:pPr algn="ctr"/>
+              <a:endParaRPr lang="de-DE"/>
+            </a:p>
+          </p:txBody>
+        </p:sp>
+        <p:pic>
+          <p:nvPicPr>
+            <p:cNvPr id="23" name="Grafik 22" descr="Blatt mit einfarbiger Füllung">
+              <a:extLst>
+                <a:ext uri="{FF2B5EF4-FFF2-40B4-BE49-F238E27FC236}">
+                  <a16:creationId xmlns:a16="http://schemas.microsoft.com/office/drawing/2014/main" id="{A6162C8E-2DDA-EA7E-3B84-151D6425A17E}"/>
+                </a:ext>
+              </a:extLst>
+            </p:cNvPr>
+            <p:cNvPicPr>
+              <a:picLocks noChangeAspect="1"/>
+            </p:cNvPicPr>
+            <p:nvPr/>
+          </p:nvPicPr>
+          <p:blipFill>
+            <a:blip>
+              <a:extLst>
+                <a:ext uri="{96DAC541-7B7A-43D3-8B79-37D633B846F1}">
+                  <asvg:svgBlip xmlns:asvg="http://schemas.microsoft.com/office/drawing/2016/SVG/main" r:embed="rId7"/>
+                </a:ext>
+              </a:extLst>
+            </a:blip>
+            <a:stretch>
+              <a:fillRect/>
+            </a:stretch>
+          </p:blipFill>
+          <p:spPr>
+            <a:xfrm>
+              <a:off x="5520156" y="2589517"/>
+              <a:ext cx="288000" cy="288000"/>
+            </a:xfrm>
+            <a:prstGeom prst="rect">
+              <a:avLst/>
+            </a:prstGeom>
+          </p:spPr>
+        </p:pic>
+      </p:grpSp>
+      <p:grpSp>
+        <p:nvGrpSpPr>
+          <p:cNvPr id="36" name="Gruppieren 35">
+            <a:extLst>
+              <a:ext uri="{FF2B5EF4-FFF2-40B4-BE49-F238E27FC236}">
+                <a16:creationId xmlns:a16="http://schemas.microsoft.com/office/drawing/2014/main" id="{C33D2055-32B2-6591-1A0D-1869C13CB1E6}"/>
+              </a:ext>
+            </a:extLst>
+          </p:cNvPr>
+          <p:cNvGrpSpPr/>
+          <p:nvPr/>
+        </p:nvGrpSpPr>
+        <p:grpSpPr>
+          <a:xfrm>
+            <a:off x="5719474" y="3791740"/>
+            <a:ext cx="376526" cy="376526"/>
+            <a:chOff x="5719474" y="3791740"/>
+            <a:chExt cx="376526" cy="376526"/>
+          </a:xfrm>
+        </p:grpSpPr>
+        <p:sp>
+          <p:nvSpPr>
+            <p:cNvPr id="13" name="Ellipse 12">
+              <a:extLst>
+                <a:ext uri="{FF2B5EF4-FFF2-40B4-BE49-F238E27FC236}">
+                  <a16:creationId xmlns:a16="http://schemas.microsoft.com/office/drawing/2014/main" id="{249C96DC-7B79-FBCA-3ABB-26F3C6465E6D}"/>
+                </a:ext>
+              </a:extLst>
+            </p:cNvPr>
+            <p:cNvSpPr/>
+            <p:nvPr/>
+          </p:nvSpPr>
+          <p:spPr>
+            <a:xfrm>
+              <a:off x="5719474" y="3791740"/>
+              <a:ext cx="376526" cy="376526"/>
+            </a:xfrm>
+            <a:prstGeom prst="ellipse">
+              <a:avLst/>
+            </a:prstGeom>
+          </p:spPr>
+          <p:style>
+            <a:lnRef idx="3">
+              <a:schemeClr val="lt1"/>
+            </a:lnRef>
+            <a:fillRef idx="1">
+              <a:schemeClr val="accent6"/>
+            </a:fillRef>
+            <a:effectRef idx="1">
+              <a:schemeClr val="accent6"/>
+            </a:effectRef>
+            <a:fontRef idx="minor">
+              <a:schemeClr val="lt1"/>
+            </a:fontRef>
+          </p:style>
+          <p:txBody>
+            <a:bodyPr rtlCol="0" anchor="ctr"/>
+            <a:lstStyle/>
+            <a:p>
+              <a:pPr algn="ctr"/>
+              <a:endParaRPr lang="de-DE"/>
+            </a:p>
+          </p:txBody>
+        </p:sp>
+        <p:pic>
+          <p:nvPicPr>
+            <p:cNvPr id="24" name="Grafik 23" descr="Blatt mit einfarbiger Füllung">
+              <a:extLst>
+                <a:ext uri="{FF2B5EF4-FFF2-40B4-BE49-F238E27FC236}">
+                  <a16:creationId xmlns:a16="http://schemas.microsoft.com/office/drawing/2014/main" id="{EF20FBF0-D616-10AC-6C95-0D1ABB268293}"/>
+                </a:ext>
+              </a:extLst>
+            </p:cNvPr>
+            <p:cNvPicPr>
+              <a:picLocks noChangeAspect="1"/>
+            </p:cNvPicPr>
+            <p:nvPr/>
+          </p:nvPicPr>
+          <p:blipFill>
+            <a:blip>
+              <a:extLst>
+                <a:ext uri="{96DAC541-7B7A-43D3-8B79-37D633B846F1}">
+                  <asvg:svgBlip xmlns:asvg="http://schemas.microsoft.com/office/drawing/2016/SVG/main" r:embed="rId7"/>
+                </a:ext>
+              </a:extLst>
+            </a:blip>
+            <a:stretch>
+              <a:fillRect/>
+            </a:stretch>
+          </p:blipFill>
+          <p:spPr>
+            <a:xfrm>
+              <a:off x="5763737" y="3836003"/>
+              <a:ext cx="288000" cy="288000"/>
+            </a:xfrm>
+            <a:prstGeom prst="rect">
+              <a:avLst/>
+            </a:prstGeom>
+          </p:spPr>
+        </p:pic>
+      </p:grpSp>
+      <p:cxnSp>
+        <p:nvCxnSpPr>
+          <p:cNvPr id="26" name="Gerade Verbindung mit Pfeil 25">
+            <a:extLst>
+              <a:ext uri="{FF2B5EF4-FFF2-40B4-BE49-F238E27FC236}">
+                <a16:creationId xmlns:a16="http://schemas.microsoft.com/office/drawing/2014/main" id="{B62A26DF-F28D-8E8F-F7E2-275B99F992EB}"/>
+              </a:ext>
+            </a:extLst>
+          </p:cNvPr>
+          <p:cNvCxnSpPr>
+            <a:cxnSpLocks/>
+            <a:stCxn id="14" idx="2"/>
+            <a:endCxn id="11" idx="0"/>
+          </p:cNvCxnSpPr>
+          <p:nvPr/>
+        </p:nvCxnSpPr>
+        <p:spPr>
+          <a:xfrm>
+            <a:off x="4864748" y="3310235"/>
+            <a:ext cx="147013" cy="322751"/>
+          </a:xfrm>
+          <a:prstGeom prst="straightConnector1">
+            <a:avLst/>
+          </a:prstGeom>
+          <a:ln w="19050" cap="flat" cmpd="sng" algn="ctr">
+            <a:solidFill>
+              <a:schemeClr val="dk1"/>
+            </a:solidFill>
+            <a:prstDash val="solid"/>
+            <a:round/>
+            <a:headEnd type="none" w="med" len="med"/>
+            <a:tailEnd type="arrow" w="med" len="med"/>
+          </a:ln>
+        </p:spPr>
+        <p:style>
+          <a:lnRef idx="0">
+            <a:scrgbClr r="0" g="0" b="0"/>
+          </a:lnRef>
+          <a:fillRef idx="0">
+            <a:scrgbClr r="0" g="0" b="0"/>
+          </a:fillRef>
+          <a:effectRef idx="0">
+            <a:scrgbClr r="0" g="0" b="0"/>
+          </a:effectRef>
+          <a:fontRef idx="minor">
+            <a:schemeClr val="tx1"/>
+          </a:fontRef>
+        </p:style>
+      </p:cxnSp>
+      <p:cxnSp>
+        <p:nvCxnSpPr>
+          <p:cNvPr id="31" name="Gerade Verbindung mit Pfeil 30">
+            <a:extLst>
+              <a:ext uri="{FF2B5EF4-FFF2-40B4-BE49-F238E27FC236}">
+                <a16:creationId xmlns:a16="http://schemas.microsoft.com/office/drawing/2014/main" id="{54941331-AC8D-56E8-2093-2385A1B1B797}"/>
+              </a:ext>
+            </a:extLst>
+          </p:cNvPr>
+          <p:cNvCxnSpPr>
+            <a:cxnSpLocks/>
+            <a:stCxn id="2" idx="4"/>
+            <a:endCxn id="14" idx="0"/>
+          </p:cNvCxnSpPr>
+          <p:nvPr/>
+        </p:nvCxnSpPr>
+        <p:spPr>
+          <a:xfrm>
+            <a:off x="4568900" y="2660800"/>
+            <a:ext cx="295848" cy="433435"/>
+          </a:xfrm>
+          <a:prstGeom prst="straightConnector1">
+            <a:avLst/>
+          </a:prstGeom>
+          <a:ln w="19050" cap="flat" cmpd="sng" algn="ctr">
+            <a:solidFill>
+              <a:schemeClr val="dk1"/>
+            </a:solidFill>
+            <a:prstDash val="solid"/>
+            <a:round/>
+            <a:headEnd type="none" w="med" len="med"/>
+            <a:tailEnd type="arrow" w="med" len="med"/>
+          </a:ln>
+        </p:spPr>
+        <p:style>
+          <a:lnRef idx="0">
+            <a:scrgbClr r="0" g="0" b="0"/>
+          </a:lnRef>
+          <a:fillRef idx="0">
+            <a:scrgbClr r="0" g="0" b="0"/>
+          </a:fillRef>
+          <a:effectRef idx="0">
+            <a:scrgbClr r="0" g="0" b="0"/>
+          </a:effectRef>
+          <a:fontRef idx="minor">
+            <a:schemeClr val="tx1"/>
+          </a:fontRef>
+        </p:style>
+      </p:cxnSp>
+      <p:cxnSp>
+        <p:nvCxnSpPr>
+          <p:cNvPr id="40" name="Verbinder: gekrümmt 39">
+            <a:extLst>
+              <a:ext uri="{FF2B5EF4-FFF2-40B4-BE49-F238E27FC236}">
+                <a16:creationId xmlns:a16="http://schemas.microsoft.com/office/drawing/2014/main" id="{60E47089-7AC7-964E-9838-F8D8E0D1C936}"/>
+              </a:ext>
+            </a:extLst>
+          </p:cNvPr>
+          <p:cNvCxnSpPr>
+            <a:stCxn id="11" idx="6"/>
+            <a:endCxn id="2" idx="6"/>
+          </p:cNvCxnSpPr>
+          <p:nvPr/>
+        </p:nvCxnSpPr>
+        <p:spPr>
+          <a:xfrm flipH="1" flipV="1">
+            <a:off x="4730900" y="2498800"/>
+            <a:ext cx="424861" cy="1278186"/>
+          </a:xfrm>
+          <a:prstGeom prst="curvedConnector3">
+            <a:avLst>
+              <a:gd name="adj1" fmla="val -53806"/>
+            </a:avLst>
+          </a:prstGeom>
+          <a:ln w="19050" cap="flat" cmpd="sng" algn="ctr">
+            <a:solidFill>
+              <a:schemeClr val="dk1"/>
+            </a:solidFill>
+            <a:prstDash val="solid"/>
+            <a:round/>
+            <a:headEnd type="none" w="med" len="med"/>
+            <a:tailEnd type="arrow" w="med" len="med"/>
+          </a:ln>
+        </p:spPr>
+        <p:style>
+          <a:lnRef idx="0">
+            <a:scrgbClr r="0" g="0" b="0"/>
+          </a:lnRef>
+          <a:fillRef idx="0">
+            <a:scrgbClr r="0" g="0" b="0"/>
+          </a:fillRef>
+          <a:effectRef idx="0">
+            <a:scrgbClr r="0" g="0" b="0"/>
+          </a:effectRef>
+          <a:fontRef idx="minor">
+            <a:schemeClr val="tx1"/>
+          </a:fontRef>
+        </p:style>
+      </p:cxnSp>
+      <p:cxnSp>
+        <p:nvCxnSpPr>
+          <p:cNvPr id="41" name="Gerade Verbindung mit Pfeil 40">
+            <a:extLst>
+              <a:ext uri="{FF2B5EF4-FFF2-40B4-BE49-F238E27FC236}">
+                <a16:creationId xmlns:a16="http://schemas.microsoft.com/office/drawing/2014/main" id="{CB10F3EF-58CA-3CA4-A8A7-742314959111}"/>
+              </a:ext>
+            </a:extLst>
+          </p:cNvPr>
+          <p:cNvCxnSpPr>
+            <a:cxnSpLocks/>
+            <a:stCxn id="14" idx="3"/>
+            <a:endCxn id="13" idx="1"/>
+          </p:cNvCxnSpPr>
+          <p:nvPr/>
+        </p:nvCxnSpPr>
+        <p:spPr>
+          <a:xfrm>
+            <a:off x="4972748" y="3202235"/>
+            <a:ext cx="801867" cy="644646"/>
+          </a:xfrm>
+          <a:prstGeom prst="straightConnector1">
+            <a:avLst/>
+          </a:prstGeom>
+          <a:ln w="19050" cap="flat" cmpd="sng" algn="ctr">
+            <a:solidFill>
+              <a:schemeClr val="accent6"/>
+            </a:solidFill>
+            <a:prstDash val="solid"/>
+            <a:round/>
+            <a:headEnd type="none" w="med" len="med"/>
+            <a:tailEnd type="arrow" w="med" len="med"/>
+          </a:ln>
+        </p:spPr>
+        <p:style>
+          <a:lnRef idx="0">
+            <a:scrgbClr r="0" g="0" b="0"/>
+          </a:lnRef>
+          <a:fillRef idx="0">
+            <a:scrgbClr r="0" g="0" b="0"/>
+          </a:fillRef>
+          <a:effectRef idx="0">
+            <a:scrgbClr r="0" g="0" b="0"/>
+          </a:effectRef>
+          <a:fontRef idx="minor">
+            <a:schemeClr val="tx1"/>
+          </a:fontRef>
+        </p:style>
+      </p:cxnSp>
+      <p:cxnSp>
+        <p:nvCxnSpPr>
+          <p:cNvPr id="45" name="Verbinder: gekrümmt 44">
+            <a:extLst>
+              <a:ext uri="{FF2B5EF4-FFF2-40B4-BE49-F238E27FC236}">
+                <a16:creationId xmlns:a16="http://schemas.microsoft.com/office/drawing/2014/main" id="{183E95D0-65AA-4B86-8346-BB0E9053D112}"/>
+              </a:ext>
+            </a:extLst>
+          </p:cNvPr>
+          <p:cNvCxnSpPr>
+            <a:stCxn id="13" idx="3"/>
+            <a:endCxn id="3" idx="4"/>
+          </p:cNvCxnSpPr>
+          <p:nvPr/>
+        </p:nvCxnSpPr>
+        <p:spPr>
+          <a:xfrm rot="5400000" flipH="1">
+            <a:off x="4206630" y="2545141"/>
+            <a:ext cx="1196791" cy="1939178"/>
+          </a:xfrm>
+          <a:prstGeom prst="curvedConnector3">
+            <a:avLst>
+              <a:gd name="adj1" fmla="val -4607"/>
+            </a:avLst>
+          </a:prstGeom>
+          <a:ln w="19050" cap="flat" cmpd="sng" algn="ctr">
+            <a:solidFill>
+              <a:schemeClr val="accent6"/>
+            </a:solidFill>
+            <a:prstDash val="solid"/>
+            <a:round/>
+            <a:headEnd type="none" w="med" len="med"/>
+            <a:tailEnd type="arrow" w="med" len="med"/>
+          </a:ln>
+        </p:spPr>
+        <p:style>
+          <a:lnRef idx="0">
+            <a:scrgbClr r="0" g="0" b="0"/>
+          </a:lnRef>
+          <a:fillRef idx="0">
+            <a:scrgbClr r="0" g="0" b="0"/>
+          </a:fillRef>
+          <a:effectRef idx="0">
+            <a:scrgbClr r="0" g="0" b="0"/>
+          </a:effectRef>
+          <a:fontRef idx="minor">
+            <a:schemeClr val="tx1"/>
+          </a:fontRef>
+        </p:style>
+      </p:cxnSp>
+      <p:cxnSp>
+        <p:nvCxnSpPr>
+          <p:cNvPr id="47" name="Gerade Verbindung mit Pfeil 46">
+            <a:extLst>
+              <a:ext uri="{FF2B5EF4-FFF2-40B4-BE49-F238E27FC236}">
+                <a16:creationId xmlns:a16="http://schemas.microsoft.com/office/drawing/2014/main" id="{067C84F1-4384-9FBE-2B09-F759249D0556}"/>
+              </a:ext>
+            </a:extLst>
+          </p:cNvPr>
+          <p:cNvCxnSpPr>
+            <a:cxnSpLocks/>
+            <a:stCxn id="3" idx="6"/>
+            <a:endCxn id="14" idx="1"/>
+          </p:cNvCxnSpPr>
+          <p:nvPr/>
+        </p:nvCxnSpPr>
+        <p:spPr>
+          <a:xfrm>
+            <a:off x="4015437" y="2736334"/>
+            <a:ext cx="741311" cy="465901"/>
+          </a:xfrm>
+          <a:prstGeom prst="straightConnector1">
+            <a:avLst/>
+          </a:prstGeom>
+          <a:ln w="19050" cap="flat" cmpd="sng" algn="ctr">
+            <a:solidFill>
+              <a:schemeClr val="accent6"/>
+            </a:solidFill>
+            <a:prstDash val="solid"/>
+            <a:round/>
+            <a:headEnd type="none" w="med" len="med"/>
+            <a:tailEnd type="arrow" w="med" len="med"/>
+          </a:ln>
+        </p:spPr>
+        <p:style>
+          <a:lnRef idx="0">
+            <a:scrgbClr r="0" g="0" b="0"/>
+          </a:lnRef>
+          <a:fillRef idx="0">
+            <a:scrgbClr r="0" g="0" b="0"/>
+          </a:fillRef>
+          <a:effectRef idx="0">
+            <a:scrgbClr r="0" g="0" b="0"/>
+          </a:effectRef>
+          <a:fontRef idx="minor">
+            <a:schemeClr val="tx1"/>
+          </a:fontRef>
+        </p:style>
+      </p:cxnSp>
+      <p:sp>
+        <p:nvSpPr>
+          <p:cNvPr id="51" name="Textfeld 50">
+            <a:extLst>
+              <a:ext uri="{FF2B5EF4-FFF2-40B4-BE49-F238E27FC236}">
+                <a16:creationId xmlns:a16="http://schemas.microsoft.com/office/drawing/2014/main" id="{8ED00451-B7C4-5C12-A860-48938A0AA604}"/>
+              </a:ext>
+            </a:extLst>
+          </p:cNvPr>
+          <p:cNvSpPr txBox="1"/>
+          <p:nvPr/>
+        </p:nvSpPr>
+        <p:spPr>
+          <a:xfrm>
+            <a:off x="5433785" y="3286944"/>
+            <a:ext cx="2403928" cy="369332"/>
+          </a:xfrm>
+          <a:prstGeom prst="rect">
+            <a:avLst/>
+          </a:prstGeom>
+          <a:noFill/>
+        </p:spPr>
+        <p:txBody>
+          <a:bodyPr wrap="none" rtlCol="0">
+            <a:spAutoFit/>
+          </a:bodyPr>
+          <a:lstStyle/>
+          <a:p>
+            <a:r>
+              <a:rPr lang="de-DE" dirty="0">
+                <a:solidFill>
+                  <a:schemeClr val="accent6"/>
+                </a:solidFill>
+              </a:rPr>
+              <a:t>20 km | 30 € | 5 kg CO2</a:t>
+            </a:r>
+          </a:p>
+        </p:txBody>
+      </p:sp>
+      <p:sp>
+        <p:nvSpPr>
+          <p:cNvPr id="52" name="Textfeld 51">
+            <a:extLst>
+              <a:ext uri="{FF2B5EF4-FFF2-40B4-BE49-F238E27FC236}">
+                <a16:creationId xmlns:a16="http://schemas.microsoft.com/office/drawing/2014/main" id="{3F705A74-F95F-A868-328E-89FBED623D27}"/>
+              </a:ext>
+            </a:extLst>
+          </p:cNvPr>
+          <p:cNvSpPr txBox="1"/>
+          <p:nvPr/>
+        </p:nvSpPr>
+        <p:spPr>
+          <a:xfrm>
+            <a:off x="5284363" y="2498800"/>
+            <a:ext cx="2527359" cy="369332"/>
+          </a:xfrm>
+          <a:prstGeom prst="rect">
+            <a:avLst/>
+          </a:prstGeom>
+          <a:noFill/>
+        </p:spPr>
+        <p:txBody>
+          <a:bodyPr wrap="none" rtlCol="0">
+            <a:spAutoFit/>
+          </a:bodyPr>
+          <a:lstStyle/>
+          <a:p>
+            <a:r>
+              <a:rPr lang="de-DE" dirty="0"/>
+              <a:t>10 km | 10 € | 15 kg CO2</a:t>
+            </a:r>
+          </a:p>
+        </p:txBody>
+      </p:sp>
+    </p:spTree>
+    <p:extLst>
+      <p:ext uri="{BB962C8B-B14F-4D97-AF65-F5344CB8AC3E}">
+        <p14:creationId xmlns:p14="http://schemas.microsoft.com/office/powerpoint/2010/main" val="1779026504"/>
+      </p:ext>
+    </p:extLst>
+  </p:cSld>
+  <p:clrMapOvr>
+    <a:masterClrMapping/>
+  </p:clrMapOvr>
+</p:sld>
+</file>
+
+<file path=ppt/slides/slide13.xml><?xml version="1.0" encoding="utf-8"?>
+<p:sld xmlns:a="http://schemas.openxmlformats.org/drawingml/2006/main" xmlns:r="http://schemas.openxmlformats.org/officeDocument/2006/relationships" xmlns:p="http://schemas.openxmlformats.org/presentationml/2006/main">
+  <p:cSld>
+    <p:spTree>
+      <p:nvGrpSpPr>
+        <p:cNvPr id="1" name="">
+          <a:extLst>
+            <a:ext uri="{FF2B5EF4-FFF2-40B4-BE49-F238E27FC236}">
+              <a16:creationId xmlns:a16="http://schemas.microsoft.com/office/drawing/2014/main" id="{815EAB2A-FC6A-2E70-F202-4A3E0769FB64}"/>
+            </a:ext>
+          </a:extLst>
+        </p:cNvPr>
+        <p:cNvGrpSpPr/>
+        <p:nvPr/>
+      </p:nvGrpSpPr>
+      <p:grpSpPr>
+        <a:xfrm>
+          <a:off x="0" y="0"/>
+          <a:ext cx="0" cy="0"/>
+          <a:chOff x="0" y="0"/>
+          <a:chExt cx="0" cy="0"/>
+        </a:xfrm>
+      </p:grpSpPr>
+      <p:sp>
+        <p:nvSpPr>
+          <p:cNvPr id="4" name="Rechteck 3">
+            <a:extLst>
+              <a:ext uri="{FF2B5EF4-FFF2-40B4-BE49-F238E27FC236}">
+                <a16:creationId xmlns:a16="http://schemas.microsoft.com/office/drawing/2014/main" id="{AE9436CA-A4DB-20DB-816D-16B0AB9CBC43}"/>
+              </a:ext>
+            </a:extLst>
+          </p:cNvPr>
+          <p:cNvSpPr/>
+          <p:nvPr/>
+        </p:nvSpPr>
+        <p:spPr>
+          <a:xfrm>
+            <a:off x="4038600" y="4882297"/>
+            <a:ext cx="2184400" cy="647700"/>
+          </a:xfrm>
+          <a:prstGeom prst="rect">
+            <a:avLst/>
+          </a:prstGeom>
+        </p:spPr>
+        <p:style>
+          <a:lnRef idx="2">
+            <a:schemeClr val="dk1"/>
+          </a:lnRef>
+          <a:fillRef idx="1">
+            <a:schemeClr val="lt1"/>
+          </a:fillRef>
+          <a:effectRef idx="0">
+            <a:schemeClr val="dk1"/>
+          </a:effectRef>
+          <a:fontRef idx="minor">
+            <a:schemeClr val="dk1"/>
+          </a:fontRef>
+        </p:style>
+        <p:txBody>
+          <a:bodyPr rtlCol="0" anchor="ctr"/>
+          <a:lstStyle/>
+          <a:p>
+            <a:pPr algn="ctr"/>
+            <a:r>
+              <a:rPr lang="de-DE" b="1" dirty="0"/>
+              <a:t>Customer </a:t>
+            </a:r>
+            <a:r>
+              <a:rPr lang="de-DE" b="1" dirty="0" err="1"/>
+              <a:t>orders</a:t>
+            </a:r>
+            <a:endParaRPr lang="de-DE" b="1" dirty="0"/>
+          </a:p>
+        </p:txBody>
+      </p:sp>
+      <p:sp>
+        <p:nvSpPr>
+          <p:cNvPr id="5" name="Textfeld 4">
+            <a:extLst>
+              <a:ext uri="{FF2B5EF4-FFF2-40B4-BE49-F238E27FC236}">
+                <a16:creationId xmlns:a16="http://schemas.microsoft.com/office/drawing/2014/main" id="{F8C415EA-990B-02EB-5516-C19BE75BC496}"/>
+              </a:ext>
+            </a:extLst>
+          </p:cNvPr>
+          <p:cNvSpPr txBox="1"/>
+          <p:nvPr/>
+        </p:nvSpPr>
+        <p:spPr>
+          <a:xfrm>
+            <a:off x="3793478" y="5529997"/>
+            <a:ext cx="2674643" cy="646331"/>
+          </a:xfrm>
+          <a:prstGeom prst="rect">
+            <a:avLst/>
+          </a:prstGeom>
+          <a:noFill/>
+        </p:spPr>
+        <p:txBody>
+          <a:bodyPr wrap="none" rtlCol="0">
+            <a:spAutoFit/>
+          </a:bodyPr>
+          <a:lstStyle/>
+          <a:p>
+            <a:pPr algn="ctr"/>
+            <a:r>
+              <a:rPr lang="de-DE" dirty="0" err="1"/>
+              <a:t>Quantity</a:t>
+            </a:r>
+            <a:r>
+              <a:rPr lang="de-DE" dirty="0"/>
+              <a:t>/</a:t>
+            </a:r>
+            <a:r>
+              <a:rPr lang="de-DE" dirty="0" err="1"/>
+              <a:t>payload</a:t>
+            </a:r>
+            <a:r>
+              <a:rPr lang="de-DE" dirty="0"/>
+              <a:t>, </a:t>
+            </a:r>
+          </a:p>
+          <a:p>
+            <a:pPr algn="ctr"/>
+            <a:r>
+              <a:rPr lang="de-DE" dirty="0" err="1"/>
+              <a:t>coordinates</a:t>
+            </a:r>
+            <a:r>
+              <a:rPr lang="de-DE" dirty="0"/>
+              <a:t>, </a:t>
+            </a:r>
+            <a:r>
+              <a:rPr lang="de-DE" dirty="0" err="1"/>
+              <a:t>preferences</a:t>
+            </a:r>
+            <a:endParaRPr lang="de-DE" dirty="0"/>
+          </a:p>
+        </p:txBody>
+      </p:sp>
+      <p:sp>
+        <p:nvSpPr>
+          <p:cNvPr id="6" name="Rechteck 5">
+            <a:extLst>
+              <a:ext uri="{FF2B5EF4-FFF2-40B4-BE49-F238E27FC236}">
+                <a16:creationId xmlns:a16="http://schemas.microsoft.com/office/drawing/2014/main" id="{F861A19D-7FA7-51A2-3A8B-7DDC6A412B27}"/>
+              </a:ext>
+            </a:extLst>
+          </p:cNvPr>
+          <p:cNvSpPr/>
+          <p:nvPr/>
+        </p:nvSpPr>
+        <p:spPr>
+          <a:xfrm>
+            <a:off x="459214" y="2851665"/>
+            <a:ext cx="2209800" cy="646332"/>
+          </a:xfrm>
+          <a:prstGeom prst="rect">
+            <a:avLst/>
+          </a:prstGeom>
+        </p:spPr>
+        <p:style>
+          <a:lnRef idx="2">
+            <a:schemeClr val="accent1">
+              <a:shade val="15000"/>
+            </a:schemeClr>
+          </a:lnRef>
+          <a:fillRef idx="1">
+            <a:schemeClr val="accent1"/>
+          </a:fillRef>
+          <a:effectRef idx="0">
+            <a:schemeClr val="accent1"/>
+          </a:effectRef>
+          <a:fontRef idx="minor">
+            <a:schemeClr val="lt1"/>
+          </a:fontRef>
+        </p:style>
+        <p:txBody>
+          <a:bodyPr rtlCol="0" anchor="ctr"/>
+          <a:lstStyle/>
+          <a:p>
+            <a:pPr algn="ctr"/>
+            <a:r>
+              <a:rPr lang="de-DE" b="1" dirty="0"/>
+              <a:t>Truck Fleet</a:t>
+            </a:r>
+          </a:p>
+        </p:txBody>
+      </p:sp>
+      <p:sp>
+        <p:nvSpPr>
+          <p:cNvPr id="7" name="Textfeld 6">
+            <a:extLst>
+              <a:ext uri="{FF2B5EF4-FFF2-40B4-BE49-F238E27FC236}">
+                <a16:creationId xmlns:a16="http://schemas.microsoft.com/office/drawing/2014/main" id="{7F9E6D8C-659E-D49A-2845-19CDBD677427}"/>
+              </a:ext>
+            </a:extLst>
+          </p:cNvPr>
+          <p:cNvSpPr txBox="1"/>
+          <p:nvPr/>
+        </p:nvSpPr>
+        <p:spPr>
+          <a:xfrm>
+            <a:off x="0" y="3588266"/>
+            <a:ext cx="3128229" cy="646331"/>
+          </a:xfrm>
+          <a:prstGeom prst="rect">
+            <a:avLst/>
+          </a:prstGeom>
+          <a:noFill/>
+        </p:spPr>
+        <p:txBody>
+          <a:bodyPr wrap="none" rtlCol="0">
+            <a:spAutoFit/>
+          </a:bodyPr>
+          <a:lstStyle/>
+          <a:p>
+            <a:pPr algn="ctr"/>
+            <a:r>
+              <a:rPr lang="de-DE" dirty="0" err="1"/>
+              <a:t>number</a:t>
+            </a:r>
+            <a:r>
+              <a:rPr lang="de-DE" dirty="0"/>
+              <a:t>, </a:t>
+            </a:r>
+            <a:r>
+              <a:rPr lang="de-DE" dirty="0" err="1"/>
+              <a:t>technical</a:t>
+            </a:r>
+            <a:r>
+              <a:rPr lang="de-DE" dirty="0"/>
+              <a:t>/</a:t>
+            </a:r>
+            <a:r>
+              <a:rPr lang="de-DE" dirty="0" err="1"/>
+              <a:t>economic</a:t>
+            </a:r>
+            <a:r>
+              <a:rPr lang="de-DE" dirty="0"/>
+              <a:t>/</a:t>
+            </a:r>
+          </a:p>
+          <a:p>
+            <a:pPr algn="ctr"/>
+            <a:r>
+              <a:rPr lang="de-DE" dirty="0" err="1"/>
+              <a:t>ecological</a:t>
+            </a:r>
+            <a:r>
+              <a:rPr lang="de-DE" dirty="0"/>
+              <a:t> </a:t>
+            </a:r>
+            <a:r>
+              <a:rPr lang="de-DE" dirty="0" err="1"/>
+              <a:t>specifications</a:t>
+            </a:r>
+            <a:r>
+              <a:rPr lang="de-DE" dirty="0"/>
+              <a:t> </a:t>
+            </a:r>
+          </a:p>
+        </p:txBody>
+      </p:sp>
+      <p:sp>
+        <p:nvSpPr>
+          <p:cNvPr id="8" name="Rechteck 7">
+            <a:extLst>
+              <a:ext uri="{FF2B5EF4-FFF2-40B4-BE49-F238E27FC236}">
+                <a16:creationId xmlns:a16="http://schemas.microsoft.com/office/drawing/2014/main" id="{97CB1177-AA4A-B75E-90A7-97B88B7A8EC6}"/>
+              </a:ext>
+            </a:extLst>
+          </p:cNvPr>
+          <p:cNvSpPr/>
+          <p:nvPr/>
+        </p:nvSpPr>
+        <p:spPr>
+          <a:xfrm>
+            <a:off x="3854449" y="954900"/>
+            <a:ext cx="2781300" cy="646332"/>
+          </a:xfrm>
+          <a:prstGeom prst="rect">
+            <a:avLst/>
+          </a:prstGeom>
+        </p:spPr>
+        <p:style>
+          <a:lnRef idx="2">
+            <a:schemeClr val="accent1">
+              <a:shade val="15000"/>
+            </a:schemeClr>
+          </a:lnRef>
+          <a:fillRef idx="1">
+            <a:schemeClr val="accent1"/>
+          </a:fillRef>
+          <a:effectRef idx="0">
+            <a:schemeClr val="accent1"/>
+          </a:effectRef>
+          <a:fontRef idx="minor">
+            <a:schemeClr val="lt1"/>
+          </a:fontRef>
+        </p:style>
+        <p:txBody>
+          <a:bodyPr rtlCol="0" anchor="ctr"/>
+          <a:lstStyle/>
+          <a:p>
+            <a:pPr algn="ctr"/>
+            <a:r>
+              <a:rPr lang="de-DE" b="1" dirty="0" err="1"/>
+              <a:t>Costing</a:t>
+            </a:r>
+            <a:r>
+              <a:rPr lang="de-DE" b="1" dirty="0"/>
+              <a:t> </a:t>
+            </a:r>
+            <a:r>
+              <a:rPr lang="de-DE" b="1" dirty="0" err="1"/>
+              <a:t>tarifs</a:t>
+            </a:r>
+            <a:r>
+              <a:rPr lang="de-DE" b="1" dirty="0"/>
+              <a:t> &amp; </a:t>
+            </a:r>
+            <a:r>
+              <a:rPr lang="de-DE" b="1" dirty="0" err="1"/>
+              <a:t>emission</a:t>
+            </a:r>
+            <a:r>
+              <a:rPr lang="de-DE" b="1" dirty="0"/>
+              <a:t> </a:t>
+            </a:r>
+            <a:r>
+              <a:rPr lang="de-DE" b="1" dirty="0" err="1"/>
+              <a:t>declaration</a:t>
+            </a:r>
+            <a:r>
+              <a:rPr lang="de-DE" b="1" dirty="0"/>
+              <a:t> </a:t>
+            </a:r>
+            <a:r>
+              <a:rPr lang="de-DE" b="1" dirty="0" err="1"/>
+              <a:t>rules</a:t>
+            </a:r>
+            <a:endParaRPr lang="de-DE" b="1" dirty="0"/>
+          </a:p>
+        </p:txBody>
+      </p:sp>
+      <p:sp>
+        <p:nvSpPr>
+          <p:cNvPr id="9" name="Textfeld 8">
+            <a:extLst>
+              <a:ext uri="{FF2B5EF4-FFF2-40B4-BE49-F238E27FC236}">
+                <a16:creationId xmlns:a16="http://schemas.microsoft.com/office/drawing/2014/main" id="{BF255771-20FF-56BA-B929-7F7A63AAEAFE}"/>
+              </a:ext>
+            </a:extLst>
+          </p:cNvPr>
+          <p:cNvSpPr txBox="1"/>
+          <p:nvPr/>
+        </p:nvSpPr>
+        <p:spPr>
+          <a:xfrm>
+            <a:off x="3560246" y="497006"/>
+            <a:ext cx="3369705" cy="369332"/>
+          </a:xfrm>
+          <a:prstGeom prst="rect">
+            <a:avLst/>
+          </a:prstGeom>
+          <a:noFill/>
+        </p:spPr>
+        <p:txBody>
+          <a:bodyPr wrap="none" rtlCol="0">
+            <a:spAutoFit/>
+          </a:bodyPr>
+          <a:lstStyle/>
+          <a:p>
+            <a:pPr algn="ctr"/>
+            <a:r>
+              <a:rPr lang="de-DE" dirty="0" err="1"/>
+              <a:t>Allocation</a:t>
+            </a:r>
+            <a:r>
+              <a:rPr lang="de-DE" dirty="0"/>
+              <a:t> </a:t>
+            </a:r>
+            <a:r>
+              <a:rPr lang="de-DE" dirty="0" err="1"/>
+              <a:t>rules</a:t>
+            </a:r>
+            <a:r>
+              <a:rPr lang="de-DE" dirty="0"/>
+              <a:t>, pricing </a:t>
+            </a:r>
+            <a:r>
+              <a:rPr lang="de-DE" dirty="0" err="1"/>
+              <a:t>scheme</a:t>
+            </a:r>
+            <a:endParaRPr lang="de-DE" dirty="0"/>
+          </a:p>
+        </p:txBody>
+      </p:sp>
+      <p:pic>
+        <p:nvPicPr>
+          <p:cNvPr id="12" name="Grafik 11" descr="Blatt Silhouette">
+            <a:extLst>
+              <a:ext uri="{FF2B5EF4-FFF2-40B4-BE49-F238E27FC236}">
+                <a16:creationId xmlns:a16="http://schemas.microsoft.com/office/drawing/2014/main" id="{B097FD65-F3BB-C449-48A6-65EA24ECEE44}"/>
+              </a:ext>
+            </a:extLst>
+          </p:cNvPr>
+          <p:cNvPicPr>
+            <a:picLocks noChangeAspect="1"/>
+          </p:cNvPicPr>
+          <p:nvPr/>
+        </p:nvPicPr>
+        <p:blipFill>
+          <a:blip>
+            <a:extLst>
+              <a:ext uri="{96DAC541-7B7A-43D3-8B79-37D633B846F1}">
+                <asvg:svgBlip xmlns:asvg="http://schemas.microsoft.com/office/drawing/2016/SVG/main" r:embed="rId2"/>
+              </a:ext>
+            </a:extLst>
+          </a:blip>
+          <a:stretch>
+            <a:fillRect/>
+          </a:stretch>
+        </p:blipFill>
+        <p:spPr>
+          <a:xfrm>
+            <a:off x="6521449" y="5529997"/>
+            <a:ext cx="787400" cy="787400"/>
+          </a:xfrm>
+          <a:prstGeom prst="rect">
+            <a:avLst/>
+          </a:prstGeom>
+        </p:spPr>
+      </p:pic>
+      <p:pic>
+        <p:nvPicPr>
+          <p:cNvPr id="15" name="Grafik 14" descr="LKW mit einfarbiger Füllung">
+            <a:extLst>
+              <a:ext uri="{FF2B5EF4-FFF2-40B4-BE49-F238E27FC236}">
+                <a16:creationId xmlns:a16="http://schemas.microsoft.com/office/drawing/2014/main" id="{5BF8427D-DF09-8528-C257-3FC17E44267C}"/>
+              </a:ext>
+            </a:extLst>
+          </p:cNvPr>
+          <p:cNvPicPr>
+            <a:picLocks noChangeAspect="1"/>
+          </p:cNvPicPr>
+          <p:nvPr/>
+        </p:nvPicPr>
+        <p:blipFill>
+          <a:blip>
+            <a:extLst>
+              <a:ext uri="{96DAC541-7B7A-43D3-8B79-37D633B846F1}">
+                <asvg:svgBlip xmlns:asvg="http://schemas.microsoft.com/office/drawing/2016/SVG/main" r:embed="rId3"/>
+              </a:ext>
+            </a:extLst>
+          </a:blip>
+          <a:stretch>
+            <a:fillRect/>
+          </a:stretch>
+        </p:blipFill>
+        <p:spPr>
+          <a:xfrm>
+            <a:off x="299194" y="1937265"/>
+            <a:ext cx="914400" cy="914400"/>
+          </a:xfrm>
+          <a:prstGeom prst="rect">
+            <a:avLst/>
+          </a:prstGeom>
+        </p:spPr>
+      </p:pic>
+      <p:pic>
+        <p:nvPicPr>
+          <p:cNvPr id="16" name="Grafik 15" descr="Electric cargo truck icon">
+            <a:extLst>
+              <a:ext uri="{FF2B5EF4-FFF2-40B4-BE49-F238E27FC236}">
+                <a16:creationId xmlns:a16="http://schemas.microsoft.com/office/drawing/2014/main" id="{43EBDB55-80AA-1CF1-CF7B-279E5A2E7984}"/>
+              </a:ext>
+            </a:extLst>
+          </p:cNvPr>
+          <p:cNvPicPr>
+            <a:picLocks noChangeAspect="1"/>
+          </p:cNvPicPr>
+          <p:nvPr/>
+        </p:nvPicPr>
+        <p:blipFill>
+          <a:blip r:embed="rId4">
+            <a:clrChange>
+              <a:clrFrom>
+                <a:srgbClr val="FFFFFF"/>
+              </a:clrFrom>
+              <a:clrTo>
+                <a:srgbClr val="FFFFFF">
+                  <a:alpha val="0"/>
+                </a:srgbClr>
+              </a:clrTo>
+            </a:clrChange>
+            <a:duotone>
+              <a:schemeClr val="accent6">
+                <a:shade val="45000"/>
+                <a:satMod val="135000"/>
+              </a:schemeClr>
+              <a:prstClr val="white"/>
+            </a:duotone>
+            <a:extLst>
+              <a:ext uri="{BEBA8EAE-BF5A-486C-A8C5-ECC9F3942E4B}">
+                <a14:imgProps xmlns:a14="http://schemas.microsoft.com/office/drawing/2010/main">
+                  <a14:imgLayer r:embed="rId5">
+                    <a14:imgEffect>
+                      <a14:saturation sat="400000"/>
+                    </a14:imgEffect>
+                  </a14:imgLayer>
+                </a14:imgProps>
+              </a:ext>
+            </a:extLst>
+          </a:blip>
+          <a:srcRect t="17328" b="15892"/>
+          <a:stretch>
+            <a:fillRect/>
+          </a:stretch>
+        </p:blipFill>
+        <p:spPr>
+          <a:xfrm>
+            <a:off x="1484989" y="2090002"/>
+            <a:ext cx="967861" cy="646332"/>
+          </a:xfrm>
+          <a:prstGeom prst="rect">
+            <a:avLst/>
+          </a:prstGeom>
+        </p:spPr>
+      </p:pic>
+      <mc:AlternateContent xmlns:mc="http://schemas.openxmlformats.org/markup-compatibility/2006">
+        <mc:Choice xmlns:a14="http://schemas.microsoft.com/office/drawing/2010/main" Requires="a14">
+          <p:sp>
+            <p:nvSpPr>
+              <p:cNvPr id="17" name="Textfeld 16">
+                <a:extLst>
+                  <a:ext uri="{FF2B5EF4-FFF2-40B4-BE49-F238E27FC236}">
+                    <a16:creationId xmlns:a16="http://schemas.microsoft.com/office/drawing/2014/main" id="{1A10F356-7067-427F-DF8D-DFA068BF6A78}"/>
+                  </a:ext>
+                </a:extLst>
+              </p:cNvPr>
+              <p:cNvSpPr txBox="1"/>
+              <p:nvPr/>
+            </p:nvSpPr>
+            <p:spPr>
+              <a:xfrm>
+                <a:off x="6605292" y="4791333"/>
+                <a:ext cx="575478" cy="830997"/>
+              </a:xfrm>
+              <a:prstGeom prst="rect">
+                <a:avLst/>
+              </a:prstGeom>
+              <a:noFill/>
+            </p:spPr>
+            <p:txBody>
+              <a:bodyPr wrap="none" lIns="0" tIns="0" rIns="0" bIns="0" rtlCol="0">
+                <a:spAutoFit/>
+              </a:bodyPr>
+              <a:lstStyle/>
+              <a:p>
+                <a:pPr/>
+                <a14:m>
+                  <m:oMathPara xmlns:m="http://schemas.openxmlformats.org/officeDocument/2006/math">
+                    <m:oMathParaPr>
+                      <m:jc m:val="centerGroup"/>
+                    </m:oMathParaPr>
+                    <m:oMath xmlns:m="http://schemas.openxmlformats.org/officeDocument/2006/math">
+                      <m:r>
+                        <a:rPr lang="de-DE" sz="5400" b="1" i="1" smtClean="0">
+                          <a:latin typeface="Cambria Math" panose="02040503050406030204" pitchFamily="18" charset="0"/>
+                        </a:rPr>
+                        <m:t>€</m:t>
+                      </m:r>
+                    </m:oMath>
+                  </m:oMathPara>
+                </a14:m>
+                <a:endParaRPr lang="de-DE" sz="4800" b="1" dirty="0"/>
+              </a:p>
+            </p:txBody>
+          </p:sp>
+        </mc:Choice>
+        <mc:Fallback>
+          <p:sp>
+            <p:nvSpPr>
+              <p:cNvPr id="17" name="Textfeld 16">
+                <a:extLst>
+                  <a:ext uri="{FF2B5EF4-FFF2-40B4-BE49-F238E27FC236}">
+                    <a16:creationId xmlns:a16="http://schemas.microsoft.com/office/drawing/2014/main" id="{1A10F356-7067-427F-DF8D-DFA068BF6A78}"/>
+                  </a:ext>
+                </a:extLst>
+              </p:cNvPr>
+              <p:cNvSpPr txBox="1">
+                <a:spLocks noRot="1" noChangeAspect="1" noMove="1" noResize="1" noEditPoints="1" noAdjustHandles="1" noChangeArrowheads="1" noChangeShapeType="1" noTextEdit="1"/>
+              </p:cNvSpPr>
+              <p:nvPr/>
+            </p:nvSpPr>
+            <p:spPr>
+              <a:xfrm>
+                <a:off x="6605292" y="4791333"/>
+                <a:ext cx="575478" cy="830997"/>
+              </a:xfrm>
+              <a:prstGeom prst="rect">
+                <a:avLst/>
+              </a:prstGeom>
+              <a:blipFill>
+                <a:blip r:embed="rId6"/>
+                <a:stretch>
+                  <a:fillRect/>
+                </a:stretch>
+              </a:blipFill>
+            </p:spPr>
+            <p:txBody>
+              <a:bodyPr/>
+              <a:lstStyle/>
+              <a:p>
+                <a:r>
+                  <a:rPr lang="de-DE">
+                    <a:noFill/>
+                  </a:rPr>
+                  <a:t> </a:t>
+                </a:r>
+              </a:p>
+            </p:txBody>
+          </p:sp>
+        </mc:Fallback>
+      </mc:AlternateContent>
+      <p:sp>
+        <p:nvSpPr>
+          <p:cNvPr id="18" name="Pfeil: nach oben 17">
+            <a:extLst>
+              <a:ext uri="{FF2B5EF4-FFF2-40B4-BE49-F238E27FC236}">
+                <a16:creationId xmlns:a16="http://schemas.microsoft.com/office/drawing/2014/main" id="{ED9196AC-7169-6BF7-1670-BD075D4CA69E}"/>
+              </a:ext>
+            </a:extLst>
+          </p:cNvPr>
+          <p:cNvSpPr/>
+          <p:nvPr/>
+        </p:nvSpPr>
+        <p:spPr>
+          <a:xfrm>
+            <a:off x="4883474" y="4422001"/>
+            <a:ext cx="463226" cy="460296"/>
+          </a:xfrm>
+          <a:prstGeom prst="upArrow">
+            <a:avLst/>
+          </a:prstGeom>
+        </p:spPr>
+        <p:style>
+          <a:lnRef idx="2">
+            <a:schemeClr val="accent1">
+              <a:shade val="15000"/>
+            </a:schemeClr>
+          </a:lnRef>
+          <a:fillRef idx="1">
+            <a:schemeClr val="accent1"/>
+          </a:fillRef>
+          <a:effectRef idx="0">
+            <a:schemeClr val="accent1"/>
+          </a:effectRef>
+          <a:fontRef idx="minor">
+            <a:schemeClr val="lt1"/>
+          </a:fontRef>
+        </p:style>
+        <p:txBody>
+          <a:bodyPr rtlCol="0" anchor="ctr"/>
+          <a:lstStyle/>
+          <a:p>
+            <a:pPr algn="ctr"/>
+            <a:endParaRPr lang="de-DE"/>
+          </a:p>
+        </p:txBody>
+      </p:sp>
+      <p:sp>
+        <p:nvSpPr>
+          <p:cNvPr id="19" name="Pfeil: nach oben 18">
+            <a:extLst>
+              <a:ext uri="{FF2B5EF4-FFF2-40B4-BE49-F238E27FC236}">
+                <a16:creationId xmlns:a16="http://schemas.microsoft.com/office/drawing/2014/main" id="{56709174-11B7-D5A3-CBAD-2FFB6691AEA7}"/>
+              </a:ext>
+            </a:extLst>
+          </p:cNvPr>
+          <p:cNvSpPr/>
+          <p:nvPr/>
+        </p:nvSpPr>
+        <p:spPr>
+          <a:xfrm rot="5400000">
+            <a:off x="2808592" y="2802559"/>
+            <a:ext cx="463226" cy="744544"/>
+          </a:xfrm>
+          <a:prstGeom prst="upArrow">
+            <a:avLst/>
+          </a:prstGeom>
+        </p:spPr>
+        <p:style>
+          <a:lnRef idx="2">
+            <a:schemeClr val="accent1">
+              <a:shade val="15000"/>
+            </a:schemeClr>
+          </a:lnRef>
+          <a:fillRef idx="1">
+            <a:schemeClr val="accent1"/>
+          </a:fillRef>
+          <a:effectRef idx="0">
+            <a:schemeClr val="accent1"/>
+          </a:effectRef>
+          <a:fontRef idx="minor">
+            <a:schemeClr val="lt1"/>
+          </a:fontRef>
+        </p:style>
+        <p:txBody>
+          <a:bodyPr rtlCol="0" anchor="ctr"/>
+          <a:lstStyle/>
+          <a:p>
+            <a:pPr algn="ctr"/>
+            <a:endParaRPr lang="de-DE"/>
+          </a:p>
+        </p:txBody>
+      </p:sp>
+      <p:sp>
+        <p:nvSpPr>
+          <p:cNvPr id="20" name="Pfeil: nach oben 19">
+            <a:extLst>
+              <a:ext uri="{FF2B5EF4-FFF2-40B4-BE49-F238E27FC236}">
+                <a16:creationId xmlns:a16="http://schemas.microsoft.com/office/drawing/2014/main" id="{4042341E-237F-E961-EF38-BD94D9B68E3F}"/>
+              </a:ext>
+            </a:extLst>
+          </p:cNvPr>
+          <p:cNvSpPr/>
+          <p:nvPr/>
+        </p:nvSpPr>
+        <p:spPr>
+          <a:xfrm rot="10800000">
+            <a:off x="4908874" y="1622334"/>
+            <a:ext cx="463226" cy="460296"/>
+          </a:xfrm>
+          <a:prstGeom prst="upArrow">
+            <a:avLst/>
+          </a:prstGeom>
+        </p:spPr>
+        <p:style>
+          <a:lnRef idx="2">
+            <a:schemeClr val="accent1">
+              <a:shade val="15000"/>
+            </a:schemeClr>
+          </a:lnRef>
+          <a:fillRef idx="1">
+            <a:schemeClr val="accent1"/>
+          </a:fillRef>
+          <a:effectRef idx="0">
+            <a:schemeClr val="accent1"/>
+          </a:effectRef>
+          <a:fontRef idx="minor">
+            <a:schemeClr val="lt1"/>
+          </a:fontRef>
+        </p:style>
+        <p:txBody>
+          <a:bodyPr rtlCol="0" anchor="ctr"/>
+          <a:lstStyle/>
+          <a:p>
+            <a:pPr algn="ctr"/>
+            <a:endParaRPr lang="de-DE"/>
+          </a:p>
+        </p:txBody>
+      </p:sp>
+      <p:sp>
+        <p:nvSpPr>
+          <p:cNvPr id="2" name="Ellipse 1">
+            <a:extLst>
+              <a:ext uri="{FF2B5EF4-FFF2-40B4-BE49-F238E27FC236}">
+                <a16:creationId xmlns:a16="http://schemas.microsoft.com/office/drawing/2014/main" id="{39AEBB1B-3194-B87E-D428-E5AF5405F097}"/>
+              </a:ext>
+            </a:extLst>
+          </p:cNvPr>
+          <p:cNvSpPr/>
+          <p:nvPr/>
+        </p:nvSpPr>
+        <p:spPr>
+          <a:xfrm>
+            <a:off x="4406900" y="2336800"/>
+            <a:ext cx="324000" cy="324000"/>
+          </a:xfrm>
+          <a:prstGeom prst="ellipse">
+            <a:avLst/>
+          </a:prstGeom>
+        </p:spPr>
+        <p:style>
+          <a:lnRef idx="3">
+            <a:schemeClr val="lt1"/>
+          </a:lnRef>
+          <a:fillRef idx="1">
+            <a:schemeClr val="accent2"/>
+          </a:fillRef>
+          <a:effectRef idx="1">
+            <a:schemeClr val="accent2"/>
+          </a:effectRef>
+          <a:fontRef idx="minor">
+            <a:schemeClr val="lt1"/>
+          </a:fontRef>
+        </p:style>
+        <p:txBody>
+          <a:bodyPr rtlCol="0" anchor="ctr"/>
+          <a:lstStyle/>
+          <a:p>
+            <a:pPr algn="ctr"/>
+            <a:r>
+              <a:rPr lang="de-DE" dirty="0"/>
+              <a:t>€</a:t>
+            </a:r>
+          </a:p>
+        </p:txBody>
+      </p:sp>
+      <p:sp>
+        <p:nvSpPr>
+          <p:cNvPr id="11" name="Ellipse 10">
+            <a:extLst>
+              <a:ext uri="{FF2B5EF4-FFF2-40B4-BE49-F238E27FC236}">
+                <a16:creationId xmlns:a16="http://schemas.microsoft.com/office/drawing/2014/main" id="{5B72C9AB-0BAF-27C1-EEE6-69A28CD4EED7}"/>
+              </a:ext>
+            </a:extLst>
+          </p:cNvPr>
+          <p:cNvSpPr/>
+          <p:nvPr/>
+        </p:nvSpPr>
+        <p:spPr>
+          <a:xfrm>
+            <a:off x="4867761" y="3632986"/>
+            <a:ext cx="288000" cy="288000"/>
+          </a:xfrm>
+          <a:prstGeom prst="ellipse">
+            <a:avLst/>
+          </a:prstGeom>
+        </p:spPr>
+        <p:style>
+          <a:lnRef idx="3">
+            <a:schemeClr val="lt1"/>
+          </a:lnRef>
+          <a:fillRef idx="1">
+            <a:schemeClr val="accent2"/>
+          </a:fillRef>
+          <a:effectRef idx="1">
+            <a:schemeClr val="accent2"/>
+          </a:effectRef>
+          <a:fontRef idx="minor">
+            <a:schemeClr val="lt1"/>
+          </a:fontRef>
+        </p:style>
+        <p:txBody>
+          <a:bodyPr rtlCol="0" anchor="ctr"/>
+          <a:lstStyle/>
+          <a:p>
+            <a:pPr algn="ctr"/>
+            <a:r>
+              <a:rPr lang="de-DE" dirty="0"/>
+              <a:t>€</a:t>
+            </a:r>
+          </a:p>
+        </p:txBody>
+      </p:sp>
+      <p:sp>
+        <p:nvSpPr>
+          <p:cNvPr id="14" name="Rechteck 13">
+            <a:extLst>
+              <a:ext uri="{FF2B5EF4-FFF2-40B4-BE49-F238E27FC236}">
+                <a16:creationId xmlns:a16="http://schemas.microsoft.com/office/drawing/2014/main" id="{E0E60532-0F71-78D4-812A-D45608F0AD03}"/>
+              </a:ext>
+            </a:extLst>
+          </p:cNvPr>
+          <p:cNvSpPr/>
+          <p:nvPr/>
+        </p:nvSpPr>
+        <p:spPr>
+          <a:xfrm>
+            <a:off x="4756748" y="3094235"/>
+            <a:ext cx="216000" cy="216000"/>
+          </a:xfrm>
+          <a:prstGeom prst="rect">
+            <a:avLst/>
+          </a:prstGeom>
+        </p:spPr>
+        <p:style>
+          <a:lnRef idx="2">
+            <a:schemeClr val="dk1">
+              <a:shade val="15000"/>
+            </a:schemeClr>
+          </a:lnRef>
+          <a:fillRef idx="1">
+            <a:schemeClr val="dk1"/>
+          </a:fillRef>
+          <a:effectRef idx="0">
+            <a:schemeClr val="dk1"/>
+          </a:effectRef>
+          <a:fontRef idx="minor">
+            <a:schemeClr val="lt1"/>
+          </a:fontRef>
+        </p:style>
+        <p:txBody>
+          <a:bodyPr rtlCol="0" anchor="ctr"/>
+          <a:lstStyle/>
+          <a:p>
+            <a:pPr algn="ctr"/>
+            <a:endParaRPr lang="de-DE"/>
+          </a:p>
+        </p:txBody>
+      </p:sp>
+      <p:grpSp>
+        <p:nvGrpSpPr>
+          <p:cNvPr id="35" name="Gruppieren 34">
+            <a:extLst>
+              <a:ext uri="{FF2B5EF4-FFF2-40B4-BE49-F238E27FC236}">
+                <a16:creationId xmlns:a16="http://schemas.microsoft.com/office/drawing/2014/main" id="{11CF37C0-E9A9-FCED-372E-E8F30DBF6FBE}"/>
+              </a:ext>
+            </a:extLst>
+          </p:cNvPr>
+          <p:cNvGrpSpPr/>
+          <p:nvPr/>
+        </p:nvGrpSpPr>
+        <p:grpSpPr>
+          <a:xfrm>
+            <a:off x="3655437" y="2556334"/>
+            <a:ext cx="360000" cy="360000"/>
+            <a:chOff x="5475900" y="2556549"/>
+            <a:chExt cx="360000" cy="360000"/>
+          </a:xfrm>
+        </p:grpSpPr>
+        <p:sp>
+          <p:nvSpPr>
+            <p:cNvPr id="3" name="Ellipse 2">
+              <a:extLst>
+                <a:ext uri="{FF2B5EF4-FFF2-40B4-BE49-F238E27FC236}">
+                  <a16:creationId xmlns:a16="http://schemas.microsoft.com/office/drawing/2014/main" id="{8E693661-3CA3-06CA-0C4C-FDC81B8310C0}"/>
+                </a:ext>
+              </a:extLst>
+            </p:cNvPr>
+            <p:cNvSpPr/>
+            <p:nvPr/>
+          </p:nvSpPr>
+          <p:spPr>
+            <a:xfrm>
+              <a:off x="5475900" y="2556549"/>
+              <a:ext cx="360000" cy="360000"/>
+            </a:xfrm>
+            <a:prstGeom prst="ellipse">
+              <a:avLst/>
+            </a:prstGeom>
+          </p:spPr>
+          <p:style>
+            <a:lnRef idx="3">
+              <a:schemeClr val="lt1"/>
+            </a:lnRef>
+            <a:fillRef idx="1">
+              <a:schemeClr val="accent6"/>
+            </a:fillRef>
+            <a:effectRef idx="1">
+              <a:schemeClr val="accent6"/>
+            </a:effectRef>
+            <a:fontRef idx="minor">
+              <a:schemeClr val="lt1"/>
+            </a:fontRef>
+          </p:style>
+          <p:txBody>
+            <a:bodyPr rtlCol="0" anchor="ctr"/>
+            <a:lstStyle/>
+            <a:p>
+              <a:pPr algn="ctr"/>
+              <a:endParaRPr lang="de-DE"/>
+            </a:p>
+          </p:txBody>
+        </p:sp>
+        <p:pic>
+          <p:nvPicPr>
+            <p:cNvPr id="23" name="Grafik 22" descr="Blatt mit einfarbiger Füllung">
+              <a:extLst>
+                <a:ext uri="{FF2B5EF4-FFF2-40B4-BE49-F238E27FC236}">
+                  <a16:creationId xmlns:a16="http://schemas.microsoft.com/office/drawing/2014/main" id="{93DE8966-C03F-D86D-4741-E40AC6E2C98E}"/>
+                </a:ext>
+              </a:extLst>
+            </p:cNvPr>
+            <p:cNvPicPr>
+              <a:picLocks noChangeAspect="1"/>
+            </p:cNvPicPr>
+            <p:nvPr/>
+          </p:nvPicPr>
+          <p:blipFill>
+            <a:blip>
+              <a:extLst>
+                <a:ext uri="{96DAC541-7B7A-43D3-8B79-37D633B846F1}">
+                  <asvg:svgBlip xmlns:asvg="http://schemas.microsoft.com/office/drawing/2016/SVG/main" r:embed="rId7"/>
+                </a:ext>
+              </a:extLst>
+            </a:blip>
+            <a:stretch>
+              <a:fillRect/>
+            </a:stretch>
+          </p:blipFill>
+          <p:spPr>
+            <a:xfrm>
+              <a:off x="5520156" y="2589517"/>
+              <a:ext cx="288000" cy="288000"/>
+            </a:xfrm>
+            <a:prstGeom prst="rect">
+              <a:avLst/>
+            </a:prstGeom>
+          </p:spPr>
+        </p:pic>
+      </p:grpSp>
+      <p:grpSp>
+        <p:nvGrpSpPr>
+          <p:cNvPr id="36" name="Gruppieren 35">
+            <a:extLst>
+              <a:ext uri="{FF2B5EF4-FFF2-40B4-BE49-F238E27FC236}">
+                <a16:creationId xmlns:a16="http://schemas.microsoft.com/office/drawing/2014/main" id="{33692B93-2B61-9052-071C-65AD6F33E364}"/>
+              </a:ext>
+            </a:extLst>
+          </p:cNvPr>
+          <p:cNvGrpSpPr/>
+          <p:nvPr/>
+        </p:nvGrpSpPr>
+        <p:grpSpPr>
+          <a:xfrm>
+            <a:off x="5719474" y="3791740"/>
+            <a:ext cx="376526" cy="376526"/>
+            <a:chOff x="5719474" y="3791740"/>
+            <a:chExt cx="376526" cy="376526"/>
+          </a:xfrm>
+        </p:grpSpPr>
+        <p:sp>
+          <p:nvSpPr>
+            <p:cNvPr id="13" name="Ellipse 12">
+              <a:extLst>
+                <a:ext uri="{FF2B5EF4-FFF2-40B4-BE49-F238E27FC236}">
+                  <a16:creationId xmlns:a16="http://schemas.microsoft.com/office/drawing/2014/main" id="{8A274AFD-A52C-DEE9-7D8A-70FD648FF346}"/>
+                </a:ext>
+              </a:extLst>
+            </p:cNvPr>
+            <p:cNvSpPr/>
+            <p:nvPr/>
+          </p:nvSpPr>
+          <p:spPr>
+            <a:xfrm>
+              <a:off x="5719474" y="3791740"/>
+              <a:ext cx="376526" cy="376526"/>
+            </a:xfrm>
+            <a:prstGeom prst="ellipse">
+              <a:avLst/>
+            </a:prstGeom>
+          </p:spPr>
+          <p:style>
+            <a:lnRef idx="3">
+              <a:schemeClr val="lt1"/>
+            </a:lnRef>
+            <a:fillRef idx="1">
+              <a:schemeClr val="accent6"/>
+            </a:fillRef>
+            <a:effectRef idx="1">
+              <a:schemeClr val="accent6"/>
+            </a:effectRef>
+            <a:fontRef idx="minor">
+              <a:schemeClr val="lt1"/>
+            </a:fontRef>
+          </p:style>
+          <p:txBody>
+            <a:bodyPr rtlCol="0" anchor="ctr"/>
+            <a:lstStyle/>
+            <a:p>
+              <a:pPr algn="ctr"/>
+              <a:endParaRPr lang="de-DE"/>
+            </a:p>
+          </p:txBody>
+        </p:sp>
+        <p:pic>
+          <p:nvPicPr>
+            <p:cNvPr id="24" name="Grafik 23" descr="Blatt mit einfarbiger Füllung">
+              <a:extLst>
+                <a:ext uri="{FF2B5EF4-FFF2-40B4-BE49-F238E27FC236}">
+                  <a16:creationId xmlns:a16="http://schemas.microsoft.com/office/drawing/2014/main" id="{6E4DF6CC-6B06-FF75-D085-E0590A81EF39}"/>
+                </a:ext>
+              </a:extLst>
+            </p:cNvPr>
+            <p:cNvPicPr>
+              <a:picLocks noChangeAspect="1"/>
+            </p:cNvPicPr>
+            <p:nvPr/>
+          </p:nvPicPr>
+          <p:blipFill>
+            <a:blip>
+              <a:extLst>
+                <a:ext uri="{96DAC541-7B7A-43D3-8B79-37D633B846F1}">
+                  <asvg:svgBlip xmlns:asvg="http://schemas.microsoft.com/office/drawing/2016/SVG/main" r:embed="rId7"/>
+                </a:ext>
+              </a:extLst>
+            </a:blip>
+            <a:stretch>
+              <a:fillRect/>
+            </a:stretch>
+          </p:blipFill>
+          <p:spPr>
+            <a:xfrm>
+              <a:off x="5763737" y="3836003"/>
+              <a:ext cx="288000" cy="288000"/>
+            </a:xfrm>
+            <a:prstGeom prst="rect">
+              <a:avLst/>
+            </a:prstGeom>
+          </p:spPr>
+        </p:pic>
+      </p:grpSp>
+      <p:cxnSp>
+        <p:nvCxnSpPr>
+          <p:cNvPr id="26" name="Gerade Verbindung mit Pfeil 25">
+            <a:extLst>
+              <a:ext uri="{FF2B5EF4-FFF2-40B4-BE49-F238E27FC236}">
+                <a16:creationId xmlns:a16="http://schemas.microsoft.com/office/drawing/2014/main" id="{DFC6A666-2AD9-CA90-9B80-1B12B175226C}"/>
+              </a:ext>
+            </a:extLst>
+          </p:cNvPr>
+          <p:cNvCxnSpPr>
+            <a:cxnSpLocks/>
+            <a:stCxn id="14" idx="2"/>
+            <a:endCxn id="11" idx="1"/>
+          </p:cNvCxnSpPr>
+          <p:nvPr/>
+        </p:nvCxnSpPr>
+        <p:spPr>
+          <a:xfrm>
+            <a:off x="4864748" y="3310235"/>
+            <a:ext cx="45190" cy="364928"/>
+          </a:xfrm>
+          <a:prstGeom prst="straightConnector1">
+            <a:avLst/>
+          </a:prstGeom>
+          <a:ln w="19050" cap="flat" cmpd="sng" algn="ctr">
+            <a:solidFill>
+              <a:schemeClr val="dk1"/>
+            </a:solidFill>
+            <a:prstDash val="solid"/>
+            <a:round/>
+            <a:headEnd type="none" w="med" len="med"/>
+            <a:tailEnd type="arrow" w="med" len="med"/>
+          </a:ln>
+        </p:spPr>
+        <p:style>
+          <a:lnRef idx="0">
+            <a:scrgbClr r="0" g="0" b="0"/>
+          </a:lnRef>
+          <a:fillRef idx="0">
+            <a:scrgbClr r="0" g="0" b="0"/>
+          </a:fillRef>
+          <a:effectRef idx="0">
+            <a:scrgbClr r="0" g="0" b="0"/>
+          </a:effectRef>
+          <a:fontRef idx="minor">
+            <a:schemeClr val="tx1"/>
+          </a:fontRef>
+        </p:style>
+      </p:cxnSp>
+      <p:cxnSp>
+        <p:nvCxnSpPr>
+          <p:cNvPr id="41" name="Gerade Verbindung mit Pfeil 40">
+            <a:extLst>
+              <a:ext uri="{FF2B5EF4-FFF2-40B4-BE49-F238E27FC236}">
+                <a16:creationId xmlns:a16="http://schemas.microsoft.com/office/drawing/2014/main" id="{A227B860-D031-B0C9-B2B6-6F8F5B355ACE}"/>
+              </a:ext>
+            </a:extLst>
+          </p:cNvPr>
+          <p:cNvCxnSpPr>
+            <a:cxnSpLocks/>
+            <a:stCxn id="14" idx="0"/>
+            <a:endCxn id="2" idx="4"/>
+          </p:cNvCxnSpPr>
+          <p:nvPr/>
+        </p:nvCxnSpPr>
+        <p:spPr>
+          <a:xfrm flipH="1" flipV="1">
+            <a:off x="4568900" y="2660800"/>
+            <a:ext cx="295848" cy="433435"/>
+          </a:xfrm>
+          <a:prstGeom prst="straightConnector1">
+            <a:avLst/>
+          </a:prstGeom>
+          <a:ln w="19050" cap="flat" cmpd="sng" algn="ctr">
+            <a:solidFill>
+              <a:schemeClr val="accent6"/>
+            </a:solidFill>
+            <a:prstDash val="solid"/>
+            <a:round/>
+            <a:headEnd type="none" w="med" len="med"/>
+            <a:tailEnd type="arrow" w="med" len="med"/>
+          </a:ln>
+        </p:spPr>
+        <p:style>
+          <a:lnRef idx="0">
+            <a:scrgbClr r="0" g="0" b="0"/>
+          </a:lnRef>
+          <a:fillRef idx="0">
+            <a:scrgbClr r="0" g="0" b="0"/>
+          </a:fillRef>
+          <a:effectRef idx="0">
+            <a:scrgbClr r="0" g="0" b="0"/>
+          </a:effectRef>
+          <a:fontRef idx="minor">
+            <a:schemeClr val="tx1"/>
+          </a:fontRef>
+        </p:style>
+      </p:cxnSp>
+      <p:cxnSp>
+        <p:nvCxnSpPr>
+          <p:cNvPr id="47" name="Gerade Verbindung mit Pfeil 46">
+            <a:extLst>
+              <a:ext uri="{FF2B5EF4-FFF2-40B4-BE49-F238E27FC236}">
+                <a16:creationId xmlns:a16="http://schemas.microsoft.com/office/drawing/2014/main" id="{1BBE57EA-0A1B-DCA7-CF63-D3C9688BCCDA}"/>
+              </a:ext>
+            </a:extLst>
+          </p:cNvPr>
+          <p:cNvCxnSpPr>
+            <a:cxnSpLocks/>
+            <a:stCxn id="2" idx="2"/>
+            <a:endCxn id="3" idx="7"/>
+          </p:cNvCxnSpPr>
+          <p:nvPr/>
+        </p:nvCxnSpPr>
+        <p:spPr>
+          <a:xfrm flipH="1">
+            <a:off x="3962716" y="2498800"/>
+            <a:ext cx="444184" cy="110255"/>
+          </a:xfrm>
+          <a:prstGeom prst="straightConnector1">
+            <a:avLst/>
+          </a:prstGeom>
+          <a:ln w="19050" cap="flat" cmpd="sng" algn="ctr">
+            <a:solidFill>
+              <a:schemeClr val="accent6"/>
+            </a:solidFill>
+            <a:prstDash val="solid"/>
+            <a:round/>
+            <a:headEnd type="none" w="med" len="med"/>
+            <a:tailEnd type="arrow" w="med" len="med"/>
+          </a:ln>
+        </p:spPr>
+        <p:style>
+          <a:lnRef idx="0">
+            <a:scrgbClr r="0" g="0" b="0"/>
+          </a:lnRef>
+          <a:fillRef idx="0">
+            <a:scrgbClr r="0" g="0" b="0"/>
+          </a:fillRef>
+          <a:effectRef idx="0">
+            <a:scrgbClr r="0" g="0" b="0"/>
+          </a:effectRef>
+          <a:fontRef idx="minor">
+            <a:schemeClr val="tx1"/>
+          </a:fontRef>
+        </p:style>
+      </p:cxnSp>
+      <p:cxnSp>
+        <p:nvCxnSpPr>
+          <p:cNvPr id="10" name="Gerade Verbindung mit Pfeil 9">
+            <a:extLst>
+              <a:ext uri="{FF2B5EF4-FFF2-40B4-BE49-F238E27FC236}">
+                <a16:creationId xmlns:a16="http://schemas.microsoft.com/office/drawing/2014/main" id="{8256C52F-C615-C4FB-BF54-F53FF60C7FEB}"/>
+              </a:ext>
+            </a:extLst>
+          </p:cNvPr>
+          <p:cNvCxnSpPr>
+            <a:cxnSpLocks/>
+            <a:stCxn id="11" idx="6"/>
+            <a:endCxn id="13" idx="2"/>
+          </p:cNvCxnSpPr>
+          <p:nvPr/>
+        </p:nvCxnSpPr>
+        <p:spPr>
+          <a:xfrm>
+            <a:off x="5155761" y="3776986"/>
+            <a:ext cx="563713" cy="203017"/>
+          </a:xfrm>
+          <a:prstGeom prst="straightConnector1">
+            <a:avLst/>
+          </a:prstGeom>
+          <a:ln w="19050" cap="flat" cmpd="sng" algn="ctr">
+            <a:solidFill>
+              <a:schemeClr val="dk1"/>
+            </a:solidFill>
+            <a:prstDash val="solid"/>
+            <a:round/>
+            <a:headEnd type="none" w="med" len="med"/>
+            <a:tailEnd type="arrow" w="med" len="med"/>
+          </a:ln>
+        </p:spPr>
+        <p:style>
+          <a:lnRef idx="0">
+            <a:scrgbClr r="0" g="0" b="0"/>
+          </a:lnRef>
+          <a:fillRef idx="0">
+            <a:scrgbClr r="0" g="0" b="0"/>
+          </a:fillRef>
+          <a:effectRef idx="0">
+            <a:scrgbClr r="0" g="0" b="0"/>
+          </a:effectRef>
+          <a:fontRef idx="minor">
+            <a:schemeClr val="tx1"/>
+          </a:fontRef>
+        </p:style>
+      </p:cxnSp>
+      <p:cxnSp>
+        <p:nvCxnSpPr>
+          <p:cNvPr id="27" name="Gerade Verbindung mit Pfeil 26">
+            <a:extLst>
+              <a:ext uri="{FF2B5EF4-FFF2-40B4-BE49-F238E27FC236}">
+                <a16:creationId xmlns:a16="http://schemas.microsoft.com/office/drawing/2014/main" id="{F5559C8B-363F-0E6F-363F-D7193928B7E5}"/>
+              </a:ext>
+            </a:extLst>
+          </p:cNvPr>
+          <p:cNvCxnSpPr>
+            <a:cxnSpLocks/>
+            <a:stCxn id="13" idx="1"/>
+            <a:endCxn id="14" idx="3"/>
+          </p:cNvCxnSpPr>
+          <p:nvPr/>
+        </p:nvCxnSpPr>
+        <p:spPr>
+          <a:xfrm flipH="1" flipV="1">
+            <a:off x="4972748" y="3202235"/>
+            <a:ext cx="801867" cy="644646"/>
+          </a:xfrm>
+          <a:prstGeom prst="straightConnector1">
+            <a:avLst/>
+          </a:prstGeom>
+          <a:ln w="19050" cap="flat" cmpd="sng" algn="ctr">
+            <a:solidFill>
+              <a:schemeClr val="dk1"/>
+            </a:solidFill>
+            <a:prstDash val="solid"/>
+            <a:round/>
+            <a:headEnd type="none" w="med" len="med"/>
+            <a:tailEnd type="arrow" w="med" len="med"/>
+          </a:ln>
+        </p:spPr>
+        <p:style>
+          <a:lnRef idx="0">
+            <a:scrgbClr r="0" g="0" b="0"/>
+          </a:lnRef>
+          <a:fillRef idx="0">
+            <a:scrgbClr r="0" g="0" b="0"/>
+          </a:fillRef>
+          <a:effectRef idx="0">
+            <a:scrgbClr r="0" g="0" b="0"/>
+          </a:effectRef>
+          <a:fontRef idx="minor">
+            <a:schemeClr val="tx1"/>
+          </a:fontRef>
+        </p:style>
+      </p:cxnSp>
+      <p:cxnSp>
+        <p:nvCxnSpPr>
+          <p:cNvPr id="37" name="Gerade Verbindung mit Pfeil 36">
+            <a:extLst>
+              <a:ext uri="{FF2B5EF4-FFF2-40B4-BE49-F238E27FC236}">
+                <a16:creationId xmlns:a16="http://schemas.microsoft.com/office/drawing/2014/main" id="{7991B7B5-C4FF-F11E-7035-E4A689723F76}"/>
+              </a:ext>
+            </a:extLst>
+          </p:cNvPr>
+          <p:cNvCxnSpPr>
+            <a:cxnSpLocks/>
+            <a:stCxn id="3" idx="5"/>
+            <a:endCxn id="14" idx="1"/>
+          </p:cNvCxnSpPr>
+          <p:nvPr/>
+        </p:nvCxnSpPr>
+        <p:spPr>
+          <a:xfrm>
+            <a:off x="3962716" y="2863613"/>
+            <a:ext cx="794032" cy="338622"/>
+          </a:xfrm>
+          <a:prstGeom prst="straightConnector1">
+            <a:avLst/>
+          </a:prstGeom>
+          <a:ln w="19050" cap="flat" cmpd="sng" algn="ctr">
+            <a:solidFill>
+              <a:schemeClr val="accent6"/>
+            </a:solidFill>
+            <a:prstDash val="solid"/>
+            <a:round/>
+            <a:headEnd type="none" w="med" len="med"/>
+            <a:tailEnd type="arrow" w="med" len="med"/>
+          </a:ln>
+        </p:spPr>
+        <p:style>
+          <a:lnRef idx="0">
+            <a:scrgbClr r="0" g="0" b="0"/>
+          </a:lnRef>
+          <a:fillRef idx="0">
+            <a:scrgbClr r="0" g="0" b="0"/>
+          </a:fillRef>
+          <a:effectRef idx="0">
+            <a:scrgbClr r="0" g="0" b="0"/>
+          </a:effectRef>
+          <a:fontRef idx="minor">
+            <a:schemeClr val="tx1"/>
+          </a:fontRef>
+        </p:style>
+      </p:cxnSp>
+      <p:sp>
+        <p:nvSpPr>
+          <p:cNvPr id="42" name="Textfeld 41">
+            <a:extLst>
+              <a:ext uri="{FF2B5EF4-FFF2-40B4-BE49-F238E27FC236}">
+                <a16:creationId xmlns:a16="http://schemas.microsoft.com/office/drawing/2014/main" id="{3F59EDA0-E14A-F475-9928-1DAF1C58558E}"/>
+              </a:ext>
+            </a:extLst>
+          </p:cNvPr>
+          <p:cNvSpPr txBox="1"/>
+          <p:nvPr/>
+        </p:nvSpPr>
+        <p:spPr>
+          <a:xfrm>
+            <a:off x="4718612" y="2652237"/>
+            <a:ext cx="2280496" cy="369332"/>
+          </a:xfrm>
+          <a:prstGeom prst="rect">
+            <a:avLst/>
+          </a:prstGeom>
+          <a:noFill/>
+        </p:spPr>
+        <p:txBody>
+          <a:bodyPr wrap="none" rtlCol="0">
+            <a:spAutoFit/>
+          </a:bodyPr>
+          <a:lstStyle/>
+          <a:p>
+            <a:r>
+              <a:rPr lang="de-DE" dirty="0">
+                <a:solidFill>
+                  <a:schemeClr val="accent6"/>
+                </a:solidFill>
+              </a:rPr>
+              <a:t>8 km | 12 € | 2 kg CO2</a:t>
+            </a:r>
+          </a:p>
+        </p:txBody>
+      </p:sp>
+      <p:sp>
+        <p:nvSpPr>
+          <p:cNvPr id="43" name="Textfeld 42">
+            <a:extLst>
+              <a:ext uri="{FF2B5EF4-FFF2-40B4-BE49-F238E27FC236}">
+                <a16:creationId xmlns:a16="http://schemas.microsoft.com/office/drawing/2014/main" id="{25183C0E-F039-71E5-CEEA-7E22766D7C94}"/>
+              </a:ext>
+            </a:extLst>
+          </p:cNvPr>
+          <p:cNvSpPr txBox="1"/>
+          <p:nvPr/>
+        </p:nvSpPr>
+        <p:spPr>
+          <a:xfrm>
+            <a:off x="5437617" y="3315015"/>
+            <a:ext cx="2280496" cy="369332"/>
+          </a:xfrm>
+          <a:prstGeom prst="rect">
+            <a:avLst/>
+          </a:prstGeom>
+          <a:noFill/>
+        </p:spPr>
+        <p:txBody>
+          <a:bodyPr wrap="none" rtlCol="0">
+            <a:spAutoFit/>
+          </a:bodyPr>
+          <a:lstStyle/>
+          <a:p>
+            <a:r>
+              <a:rPr lang="de-DE" dirty="0"/>
+              <a:t>8 km | 8 € | 12 kg CO2</a:t>
+            </a:r>
+          </a:p>
+        </p:txBody>
+      </p:sp>
+    </p:spTree>
+    <p:extLst>
+      <p:ext uri="{BB962C8B-B14F-4D97-AF65-F5344CB8AC3E}">
+        <p14:creationId xmlns:p14="http://schemas.microsoft.com/office/powerpoint/2010/main" val="2865149643"/>
+      </p:ext>
+    </p:extLst>
+  </p:cSld>
+  <p:clrMapOvr>
+    <a:masterClrMapping/>
+  </p:clrMapOvr>
+</p:sld>
+</file>
+
+<file path=ppt/slides/slide14.xml><?xml version="1.0" encoding="utf-8"?>
+<p:sld xmlns:a="http://schemas.openxmlformats.org/drawingml/2006/main" xmlns:r="http://schemas.openxmlformats.org/officeDocument/2006/relationships" xmlns:p="http://schemas.openxmlformats.org/presentationml/2006/main">
+  <p:cSld>
+    <p:spTree>
+      <p:nvGrpSpPr>
+        <p:cNvPr id="1" name=""/>
+        <p:cNvGrpSpPr/>
+        <p:nvPr/>
+      </p:nvGrpSpPr>
+      <p:grpSpPr>
+        <a:xfrm>
+          <a:off x="0" y="0"/>
+          <a:ext cx="0" cy="0"/>
+          <a:chOff x="0" y="0"/>
+          <a:chExt cx="0" cy="0"/>
+        </a:xfrm>
+      </p:grpSpPr>
+      <p:sp>
+        <p:nvSpPr>
+          <p:cNvPr id="4" name="Rechteck: abgerundete Ecken 3">
+            <a:extLst>
+              <a:ext uri="{FF2B5EF4-FFF2-40B4-BE49-F238E27FC236}">
+                <a16:creationId xmlns:a16="http://schemas.microsoft.com/office/drawing/2014/main" id="{57FED58F-2330-73E9-196C-AFB3F7DA8845}"/>
+              </a:ext>
+            </a:extLst>
+          </p:cNvPr>
+          <p:cNvSpPr/>
+          <p:nvPr/>
+        </p:nvSpPr>
+        <p:spPr>
+          <a:xfrm>
+            <a:off x="3009900" y="1028700"/>
+            <a:ext cx="3251200" cy="800100"/>
+          </a:xfrm>
+          <a:prstGeom prst="roundRect">
+            <a:avLst/>
+          </a:prstGeom>
+        </p:spPr>
+        <p:style>
+          <a:lnRef idx="2">
+            <a:schemeClr val="accent1">
+              <a:shade val="15000"/>
+            </a:schemeClr>
+          </a:lnRef>
+          <a:fillRef idx="1">
+            <a:schemeClr val="accent1"/>
+          </a:fillRef>
+          <a:effectRef idx="0">
+            <a:schemeClr val="accent1"/>
+          </a:effectRef>
+          <a:fontRef idx="minor">
+            <a:schemeClr val="lt1"/>
+          </a:fontRef>
+        </p:style>
+        <p:txBody>
+          <a:bodyPr rtlCol="0" anchor="ctr"/>
+          <a:lstStyle/>
+          <a:p>
+            <a:pPr algn="ctr"/>
+            <a:r>
+              <a:rPr lang="de-DE" sz="2400" b="1" dirty="0"/>
+              <a:t>Fleet </a:t>
+            </a:r>
+            <a:r>
+              <a:rPr lang="de-DE" sz="2400" b="1" dirty="0" err="1"/>
+              <a:t>size</a:t>
+            </a:r>
+            <a:r>
+              <a:rPr lang="de-DE" sz="2400" b="1" dirty="0"/>
+              <a:t> &amp; mix </a:t>
+            </a:r>
+          </a:p>
+        </p:txBody>
+      </p:sp>
+      <p:sp>
+        <p:nvSpPr>
+          <p:cNvPr id="5" name="Rechteck: abgerundete Ecken 4">
+            <a:extLst>
+              <a:ext uri="{FF2B5EF4-FFF2-40B4-BE49-F238E27FC236}">
+                <a16:creationId xmlns:a16="http://schemas.microsoft.com/office/drawing/2014/main" id="{8F346665-7912-451F-A1CB-62AA3253F316}"/>
+              </a:ext>
+            </a:extLst>
+          </p:cNvPr>
+          <p:cNvSpPr/>
+          <p:nvPr/>
+        </p:nvSpPr>
+        <p:spPr>
+          <a:xfrm>
+            <a:off x="3009900" y="2425700"/>
+            <a:ext cx="3251200" cy="800100"/>
+          </a:xfrm>
+          <a:prstGeom prst="roundRect">
+            <a:avLst/>
+          </a:prstGeom>
+        </p:spPr>
+        <p:style>
+          <a:lnRef idx="2">
+            <a:schemeClr val="accent1">
+              <a:shade val="15000"/>
+            </a:schemeClr>
+          </a:lnRef>
+          <a:fillRef idx="1">
+            <a:schemeClr val="accent1"/>
+          </a:fillRef>
+          <a:effectRef idx="0">
+            <a:schemeClr val="accent1"/>
+          </a:effectRef>
+          <a:fontRef idx="minor">
+            <a:schemeClr val="lt1"/>
+          </a:fontRef>
+        </p:style>
+        <p:txBody>
+          <a:bodyPr rtlCol="0" anchor="ctr"/>
+          <a:lstStyle/>
+          <a:p>
+            <a:pPr algn="ctr"/>
+            <a:r>
+              <a:rPr lang="de-DE" sz="2400" b="1" dirty="0" err="1"/>
+              <a:t>Cost</a:t>
+            </a:r>
+            <a:r>
+              <a:rPr lang="de-DE" sz="2400" b="1" dirty="0"/>
+              <a:t> </a:t>
+            </a:r>
+            <a:r>
+              <a:rPr lang="de-DE" sz="2400" b="1" dirty="0" err="1"/>
+              <a:t>Tarifing</a:t>
+            </a:r>
+            <a:r>
+              <a:rPr lang="de-DE" sz="2400" b="1" dirty="0"/>
+              <a:t> &amp; Emission Declaration</a:t>
+            </a:r>
+          </a:p>
+        </p:txBody>
+      </p:sp>
+      <p:sp>
+        <p:nvSpPr>
+          <p:cNvPr id="6" name="Rechteck: abgerundete Ecken 5">
+            <a:extLst>
+              <a:ext uri="{FF2B5EF4-FFF2-40B4-BE49-F238E27FC236}">
+                <a16:creationId xmlns:a16="http://schemas.microsoft.com/office/drawing/2014/main" id="{E61BFAA7-58AB-1AD5-C92F-E747557E060E}"/>
+              </a:ext>
+            </a:extLst>
+          </p:cNvPr>
+          <p:cNvSpPr/>
+          <p:nvPr/>
+        </p:nvSpPr>
+        <p:spPr>
+          <a:xfrm>
+            <a:off x="3009900" y="3835400"/>
+            <a:ext cx="3251200" cy="800100"/>
+          </a:xfrm>
+          <a:prstGeom prst="roundRect">
+            <a:avLst/>
+          </a:prstGeom>
+        </p:spPr>
+        <p:style>
+          <a:lnRef idx="2">
+            <a:schemeClr val="accent1">
+              <a:shade val="15000"/>
+            </a:schemeClr>
+          </a:lnRef>
+          <a:fillRef idx="1">
+            <a:schemeClr val="accent1"/>
+          </a:fillRef>
+          <a:effectRef idx="0">
+            <a:schemeClr val="accent1"/>
+          </a:effectRef>
+          <a:fontRef idx="minor">
+            <a:schemeClr val="lt1"/>
+          </a:fontRef>
+        </p:style>
+        <p:txBody>
+          <a:bodyPr rtlCol="0" anchor="ctr"/>
+          <a:lstStyle/>
+          <a:p>
+            <a:pPr algn="ctr"/>
             <a:r>
               <a:rPr lang="de-DE" sz="2400" b="1" dirty="0"/>
               <a:t>Preference-</a:t>
@@ -4470,6 +8185,1760 @@
     <p:extLst>
       <p:ext uri="{BB962C8B-B14F-4D97-AF65-F5344CB8AC3E}">
         <p14:creationId xmlns:p14="http://schemas.microsoft.com/office/powerpoint/2010/main" val="1681904026"/>
+      </p:ext>
+    </p:extLst>
+  </p:cSld>
+  <p:clrMapOvr>
+    <a:masterClrMapping/>
+  </p:clrMapOvr>
+</p:sld>
+</file>
+
+<file path=ppt/slides/slide15.xml><?xml version="1.0" encoding="utf-8"?>
+<p:sld xmlns:a="http://schemas.openxmlformats.org/drawingml/2006/main" xmlns:r="http://schemas.openxmlformats.org/officeDocument/2006/relationships" xmlns:p="http://schemas.openxmlformats.org/presentationml/2006/main">
+  <p:cSld>
+    <p:spTree>
+      <p:nvGrpSpPr>
+        <p:cNvPr id="1" name=""/>
+        <p:cNvGrpSpPr/>
+        <p:nvPr/>
+      </p:nvGrpSpPr>
+      <p:grpSpPr>
+        <a:xfrm>
+          <a:off x="0" y="0"/>
+          <a:ext cx="0" cy="0"/>
+          <a:chOff x="0" y="0"/>
+          <a:chExt cx="0" cy="0"/>
+        </a:xfrm>
+      </p:grpSpPr>
+      <p:sp>
+        <p:nvSpPr>
+          <p:cNvPr id="4" name="Rechteck: abgerundete Ecken 3">
+            <a:extLst>
+              <a:ext uri="{FF2B5EF4-FFF2-40B4-BE49-F238E27FC236}">
+                <a16:creationId xmlns:a16="http://schemas.microsoft.com/office/drawing/2014/main" id="{D8D64C68-51D8-5C6F-6727-329D270FB46A}"/>
+              </a:ext>
+            </a:extLst>
+          </p:cNvPr>
+          <p:cNvSpPr/>
+          <p:nvPr/>
+        </p:nvSpPr>
+        <p:spPr>
+          <a:xfrm>
+            <a:off x="1892300" y="1485900"/>
+            <a:ext cx="3251200" cy="800100"/>
+          </a:xfrm>
+          <a:prstGeom prst="roundRect">
+            <a:avLst/>
+          </a:prstGeom>
+        </p:spPr>
+        <p:style>
+          <a:lnRef idx="2">
+            <a:schemeClr val="accent1">
+              <a:shade val="15000"/>
+            </a:schemeClr>
+          </a:lnRef>
+          <a:fillRef idx="1">
+            <a:schemeClr val="accent1"/>
+          </a:fillRef>
+          <a:effectRef idx="0">
+            <a:schemeClr val="accent1"/>
+          </a:effectRef>
+          <a:fontRef idx="minor">
+            <a:schemeClr val="lt1"/>
+          </a:fontRef>
+        </p:style>
+        <p:txBody>
+          <a:bodyPr rtlCol="0" anchor="ctr"/>
+          <a:lstStyle/>
+          <a:p>
+            <a:pPr algn="ctr"/>
+            <a:r>
+              <a:rPr lang="de-DE" sz="2400" b="1" dirty="0"/>
+              <a:t>Fleet </a:t>
+            </a:r>
+            <a:r>
+              <a:rPr lang="de-DE" sz="2400" b="1" dirty="0" err="1"/>
+              <a:t>size</a:t>
+            </a:r>
+            <a:r>
+              <a:rPr lang="de-DE" sz="2400" b="1" dirty="0"/>
+              <a:t> &amp; mix </a:t>
+            </a:r>
+          </a:p>
+        </p:txBody>
+      </p:sp>
+      <p:sp>
+        <p:nvSpPr>
+          <p:cNvPr id="5" name="Rechteck: abgerundete Ecken 4">
+            <a:extLst>
+              <a:ext uri="{FF2B5EF4-FFF2-40B4-BE49-F238E27FC236}">
+                <a16:creationId xmlns:a16="http://schemas.microsoft.com/office/drawing/2014/main" id="{245107FE-1E58-58A4-B6E3-1C244AEE4E32}"/>
+              </a:ext>
+            </a:extLst>
+          </p:cNvPr>
+          <p:cNvSpPr/>
+          <p:nvPr/>
+        </p:nvSpPr>
+        <p:spPr>
+          <a:xfrm>
+            <a:off x="1892300" y="2882900"/>
+            <a:ext cx="3251200" cy="800100"/>
+          </a:xfrm>
+          <a:prstGeom prst="roundRect">
+            <a:avLst/>
+          </a:prstGeom>
+        </p:spPr>
+        <p:style>
+          <a:lnRef idx="2">
+            <a:schemeClr val="accent1">
+              <a:shade val="15000"/>
+            </a:schemeClr>
+          </a:lnRef>
+          <a:fillRef idx="1">
+            <a:schemeClr val="accent1"/>
+          </a:fillRef>
+          <a:effectRef idx="0">
+            <a:schemeClr val="accent1"/>
+          </a:effectRef>
+          <a:fontRef idx="minor">
+            <a:schemeClr val="lt1"/>
+          </a:fontRef>
+        </p:style>
+        <p:txBody>
+          <a:bodyPr rtlCol="0" anchor="ctr"/>
+          <a:lstStyle/>
+          <a:p>
+            <a:pPr algn="ctr"/>
+            <a:r>
+              <a:rPr lang="de-DE" sz="2400" b="1" dirty="0" err="1"/>
+              <a:t>Cost</a:t>
+            </a:r>
+            <a:r>
+              <a:rPr lang="de-DE" sz="2400" b="1" dirty="0"/>
+              <a:t> </a:t>
+            </a:r>
+            <a:r>
+              <a:rPr lang="de-DE" sz="2400" b="1" dirty="0" err="1"/>
+              <a:t>Tarifing</a:t>
+            </a:r>
+            <a:r>
+              <a:rPr lang="de-DE" sz="2400" b="1" dirty="0"/>
+              <a:t> &amp; Emission Declaration</a:t>
+            </a:r>
+          </a:p>
+        </p:txBody>
+      </p:sp>
+      <p:sp>
+        <p:nvSpPr>
+          <p:cNvPr id="6" name="Rechteck: abgerundete Ecken 5">
+            <a:extLst>
+              <a:ext uri="{FF2B5EF4-FFF2-40B4-BE49-F238E27FC236}">
+                <a16:creationId xmlns:a16="http://schemas.microsoft.com/office/drawing/2014/main" id="{C57F9945-E8DB-5148-EC0A-3D3674422574}"/>
+              </a:ext>
+            </a:extLst>
+          </p:cNvPr>
+          <p:cNvSpPr/>
+          <p:nvPr/>
+        </p:nvSpPr>
+        <p:spPr>
+          <a:xfrm>
+            <a:off x="1892300" y="4292600"/>
+            <a:ext cx="3251200" cy="800100"/>
+          </a:xfrm>
+          <a:prstGeom prst="roundRect">
+            <a:avLst/>
+          </a:prstGeom>
+        </p:spPr>
+        <p:style>
+          <a:lnRef idx="2">
+            <a:schemeClr val="accent1">
+              <a:shade val="15000"/>
+            </a:schemeClr>
+          </a:lnRef>
+          <a:fillRef idx="1">
+            <a:schemeClr val="accent1"/>
+          </a:fillRef>
+          <a:effectRef idx="0">
+            <a:schemeClr val="accent1"/>
+          </a:effectRef>
+          <a:fontRef idx="minor">
+            <a:schemeClr val="lt1"/>
+          </a:fontRef>
+        </p:style>
+        <p:txBody>
+          <a:bodyPr rtlCol="0" anchor="ctr"/>
+          <a:lstStyle/>
+          <a:p>
+            <a:pPr algn="ctr"/>
+            <a:r>
+              <a:rPr lang="de-DE" sz="2400" b="1" dirty="0"/>
+              <a:t>Preference-</a:t>
+            </a:r>
+            <a:r>
+              <a:rPr lang="de-DE" sz="2400" b="1" dirty="0" err="1"/>
+              <a:t>oriented</a:t>
+            </a:r>
+            <a:r>
+              <a:rPr lang="de-DE" sz="2400" b="1" dirty="0"/>
+              <a:t> Routing &amp; Scheduling</a:t>
+            </a:r>
+          </a:p>
+        </p:txBody>
+      </p:sp>
+      <p:sp>
+        <p:nvSpPr>
+          <p:cNvPr id="7" name="Textfeld 6">
+            <a:extLst>
+              <a:ext uri="{FF2B5EF4-FFF2-40B4-BE49-F238E27FC236}">
+                <a16:creationId xmlns:a16="http://schemas.microsoft.com/office/drawing/2014/main" id="{D83B88CE-86ED-7472-7E48-18EDAA2F1EFC}"/>
+              </a:ext>
+            </a:extLst>
+          </p:cNvPr>
+          <p:cNvSpPr txBox="1"/>
+          <p:nvPr/>
+        </p:nvSpPr>
+        <p:spPr>
+          <a:xfrm>
+            <a:off x="584200" y="1802884"/>
+            <a:ext cx="1046890" cy="369332"/>
+          </a:xfrm>
+          <a:prstGeom prst="rect">
+            <a:avLst/>
+          </a:prstGeom>
+          <a:noFill/>
+        </p:spPr>
+        <p:txBody>
+          <a:bodyPr wrap="none" rtlCol="0">
+            <a:spAutoFit/>
+          </a:bodyPr>
+          <a:lstStyle/>
+          <a:p>
+            <a:r>
+              <a:rPr lang="de-DE" i="1" dirty="0" err="1"/>
+              <a:t>strategic</a:t>
+            </a:r>
+            <a:endParaRPr lang="de-DE" i="1" dirty="0"/>
+          </a:p>
+        </p:txBody>
+      </p:sp>
+      <p:sp>
+        <p:nvSpPr>
+          <p:cNvPr id="8" name="Textfeld 7">
+            <a:extLst>
+              <a:ext uri="{FF2B5EF4-FFF2-40B4-BE49-F238E27FC236}">
+                <a16:creationId xmlns:a16="http://schemas.microsoft.com/office/drawing/2014/main" id="{B9FDE479-4240-7359-3793-33EDA63DC3FA}"/>
+              </a:ext>
+            </a:extLst>
+          </p:cNvPr>
+          <p:cNvSpPr txBox="1"/>
+          <p:nvPr/>
+        </p:nvSpPr>
+        <p:spPr>
+          <a:xfrm>
+            <a:off x="584200" y="3098284"/>
+            <a:ext cx="929742" cy="369332"/>
+          </a:xfrm>
+          <a:prstGeom prst="rect">
+            <a:avLst/>
+          </a:prstGeom>
+          <a:noFill/>
+        </p:spPr>
+        <p:txBody>
+          <a:bodyPr wrap="none" rtlCol="0">
+            <a:spAutoFit/>
+          </a:bodyPr>
+          <a:lstStyle/>
+          <a:p>
+            <a:r>
+              <a:rPr lang="de-DE" i="1" dirty="0" err="1"/>
+              <a:t>tactical</a:t>
+            </a:r>
+            <a:endParaRPr lang="de-DE" i="1" dirty="0"/>
+          </a:p>
+        </p:txBody>
+      </p:sp>
+      <p:sp>
+        <p:nvSpPr>
+          <p:cNvPr id="9" name="Textfeld 8">
+            <a:extLst>
+              <a:ext uri="{FF2B5EF4-FFF2-40B4-BE49-F238E27FC236}">
+                <a16:creationId xmlns:a16="http://schemas.microsoft.com/office/drawing/2014/main" id="{A0080F18-B700-A8D5-7BDE-7B957F197A5F}"/>
+              </a:ext>
+            </a:extLst>
+          </p:cNvPr>
+          <p:cNvSpPr txBox="1"/>
+          <p:nvPr/>
+        </p:nvSpPr>
+        <p:spPr>
+          <a:xfrm>
+            <a:off x="390653" y="4507984"/>
+            <a:ext cx="1316835" cy="369332"/>
+          </a:xfrm>
+          <a:prstGeom prst="rect">
+            <a:avLst/>
+          </a:prstGeom>
+          <a:noFill/>
+        </p:spPr>
+        <p:txBody>
+          <a:bodyPr wrap="none" rtlCol="0">
+            <a:spAutoFit/>
+          </a:bodyPr>
+          <a:lstStyle/>
+          <a:p>
+            <a:r>
+              <a:rPr lang="de-DE" i="1" dirty="0"/>
+              <a:t>operational</a:t>
+            </a:r>
+          </a:p>
+        </p:txBody>
+      </p:sp>
+      <p:cxnSp>
+        <p:nvCxnSpPr>
+          <p:cNvPr id="10" name="Gerade Verbindung mit Pfeil 9">
+            <a:extLst>
+              <a:ext uri="{FF2B5EF4-FFF2-40B4-BE49-F238E27FC236}">
+                <a16:creationId xmlns:a16="http://schemas.microsoft.com/office/drawing/2014/main" id="{9ACE3FFF-FDD5-3D02-42B9-43922E78CB80}"/>
+              </a:ext>
+            </a:extLst>
+          </p:cNvPr>
+          <p:cNvCxnSpPr>
+            <a:cxnSpLocks/>
+          </p:cNvCxnSpPr>
+          <p:nvPr/>
+        </p:nvCxnSpPr>
+        <p:spPr>
+          <a:xfrm>
+            <a:off x="3048000" y="2291318"/>
+            <a:ext cx="0" cy="590898"/>
+          </a:xfrm>
+          <a:prstGeom prst="straightConnector1">
+            <a:avLst/>
+          </a:prstGeom>
+          <a:ln w="31750">
+            <a:tailEnd type="stealth" w="lg" len="lg"/>
+          </a:ln>
+        </p:spPr>
+        <p:style>
+          <a:lnRef idx="2">
+            <a:schemeClr val="accent1"/>
+          </a:lnRef>
+          <a:fillRef idx="0">
+            <a:schemeClr val="accent1"/>
+          </a:fillRef>
+          <a:effectRef idx="1">
+            <a:schemeClr val="accent1"/>
+          </a:effectRef>
+          <a:fontRef idx="minor">
+            <a:schemeClr val="tx1"/>
+          </a:fontRef>
+        </p:style>
+      </p:cxnSp>
+      <p:cxnSp>
+        <p:nvCxnSpPr>
+          <p:cNvPr id="12" name="Gerade Verbindung mit Pfeil 11">
+            <a:extLst>
+              <a:ext uri="{FF2B5EF4-FFF2-40B4-BE49-F238E27FC236}">
+                <a16:creationId xmlns:a16="http://schemas.microsoft.com/office/drawing/2014/main" id="{ADEA4D87-019A-84D9-629F-ED3CC96849D3}"/>
+              </a:ext>
+            </a:extLst>
+          </p:cNvPr>
+          <p:cNvCxnSpPr>
+            <a:cxnSpLocks/>
+          </p:cNvCxnSpPr>
+          <p:nvPr/>
+        </p:nvCxnSpPr>
+        <p:spPr>
+          <a:xfrm>
+            <a:off x="4013200" y="2273300"/>
+            <a:ext cx="0" cy="608916"/>
+          </a:xfrm>
+          <a:prstGeom prst="straightConnector1">
+            <a:avLst/>
+          </a:prstGeom>
+          <a:ln w="31750">
+            <a:headEnd type="stealth" w="lg" len="lg"/>
+            <a:tailEnd type="none" w="lg" len="lg"/>
+          </a:ln>
+        </p:spPr>
+        <p:style>
+          <a:lnRef idx="2">
+            <a:schemeClr val="accent1"/>
+          </a:lnRef>
+          <a:fillRef idx="0">
+            <a:schemeClr val="accent1"/>
+          </a:fillRef>
+          <a:effectRef idx="1">
+            <a:schemeClr val="accent1"/>
+          </a:effectRef>
+          <a:fontRef idx="minor">
+            <a:schemeClr val="tx1"/>
+          </a:fontRef>
+        </p:style>
+      </p:cxnSp>
+      <p:cxnSp>
+        <p:nvCxnSpPr>
+          <p:cNvPr id="14" name="Gerade Verbindung mit Pfeil 13">
+            <a:extLst>
+              <a:ext uri="{FF2B5EF4-FFF2-40B4-BE49-F238E27FC236}">
+                <a16:creationId xmlns:a16="http://schemas.microsoft.com/office/drawing/2014/main" id="{F0EA02AD-4468-44C2-5261-8A4ECB4C01C2}"/>
+              </a:ext>
+            </a:extLst>
+          </p:cNvPr>
+          <p:cNvCxnSpPr>
+            <a:cxnSpLocks/>
+          </p:cNvCxnSpPr>
+          <p:nvPr/>
+        </p:nvCxnSpPr>
+        <p:spPr>
+          <a:xfrm>
+            <a:off x="3048000" y="3701018"/>
+            <a:ext cx="0" cy="590898"/>
+          </a:xfrm>
+          <a:prstGeom prst="straightConnector1">
+            <a:avLst/>
+          </a:prstGeom>
+          <a:ln w="31750">
+            <a:tailEnd type="stealth" w="lg" len="lg"/>
+          </a:ln>
+        </p:spPr>
+        <p:style>
+          <a:lnRef idx="2">
+            <a:schemeClr val="accent1"/>
+          </a:lnRef>
+          <a:fillRef idx="0">
+            <a:schemeClr val="accent1"/>
+          </a:fillRef>
+          <a:effectRef idx="1">
+            <a:schemeClr val="accent1"/>
+          </a:effectRef>
+          <a:fontRef idx="minor">
+            <a:schemeClr val="tx1"/>
+          </a:fontRef>
+        </p:style>
+      </p:cxnSp>
+      <p:cxnSp>
+        <p:nvCxnSpPr>
+          <p:cNvPr id="16" name="Gerade Verbindung mit Pfeil 15">
+            <a:extLst>
+              <a:ext uri="{FF2B5EF4-FFF2-40B4-BE49-F238E27FC236}">
+                <a16:creationId xmlns:a16="http://schemas.microsoft.com/office/drawing/2014/main" id="{997665A2-D909-A6B0-327B-7F4C77ABD878}"/>
+              </a:ext>
+            </a:extLst>
+          </p:cNvPr>
+          <p:cNvCxnSpPr>
+            <a:cxnSpLocks/>
+          </p:cNvCxnSpPr>
+          <p:nvPr/>
+        </p:nvCxnSpPr>
+        <p:spPr>
+          <a:xfrm>
+            <a:off x="4013200" y="3683000"/>
+            <a:ext cx="0" cy="608916"/>
+          </a:xfrm>
+          <a:prstGeom prst="straightConnector1">
+            <a:avLst/>
+          </a:prstGeom>
+          <a:ln w="31750">
+            <a:headEnd type="stealth" w="lg" len="lg"/>
+            <a:tailEnd type="none" w="lg" len="lg"/>
+          </a:ln>
+        </p:spPr>
+        <p:style>
+          <a:lnRef idx="2">
+            <a:schemeClr val="accent1"/>
+          </a:lnRef>
+          <a:fillRef idx="0">
+            <a:schemeClr val="accent1"/>
+          </a:fillRef>
+          <a:effectRef idx="1">
+            <a:schemeClr val="accent1"/>
+          </a:effectRef>
+          <a:fontRef idx="minor">
+            <a:schemeClr val="tx1"/>
+          </a:fontRef>
+        </p:style>
+      </p:cxnSp>
+      <p:sp>
+        <p:nvSpPr>
+          <p:cNvPr id="18" name="Rechteck: abgerundete Ecken 17">
+            <a:extLst>
+              <a:ext uri="{FF2B5EF4-FFF2-40B4-BE49-F238E27FC236}">
+                <a16:creationId xmlns:a16="http://schemas.microsoft.com/office/drawing/2014/main" id="{37621B44-1BB5-A109-EDA4-DED5EABFFBE3}"/>
+              </a:ext>
+            </a:extLst>
+          </p:cNvPr>
+          <p:cNvSpPr/>
+          <p:nvPr/>
+        </p:nvSpPr>
+        <p:spPr>
+          <a:xfrm>
+            <a:off x="1707487" y="2721617"/>
+            <a:ext cx="9620907" cy="3488683"/>
+          </a:xfrm>
+          <a:prstGeom prst="roundRect">
+            <a:avLst/>
+          </a:prstGeom>
+          <a:noFill/>
+          <a:ln w="38100">
+            <a:solidFill>
+              <a:schemeClr val="accent6"/>
+            </a:solidFill>
+          </a:ln>
+        </p:spPr>
+        <p:style>
+          <a:lnRef idx="2">
+            <a:schemeClr val="accent1">
+              <a:shade val="15000"/>
+            </a:schemeClr>
+          </a:lnRef>
+          <a:fillRef idx="1">
+            <a:schemeClr val="accent1"/>
+          </a:fillRef>
+          <a:effectRef idx="0">
+            <a:schemeClr val="accent1"/>
+          </a:effectRef>
+          <a:fontRef idx="minor">
+            <a:schemeClr val="lt1"/>
+          </a:fontRef>
+        </p:style>
+        <p:txBody>
+          <a:bodyPr rtlCol="0" anchor="b"/>
+          <a:lstStyle/>
+          <a:p>
+            <a:pPr algn="r"/>
+            <a:r>
+              <a:rPr lang="de-DE" sz="2000" b="1" dirty="0">
+                <a:solidFill>
+                  <a:schemeClr val="tx1"/>
+                </a:solidFill>
+              </a:rPr>
+              <a:t>Martin-Luther-Universität Halle-Wittenberg</a:t>
+            </a:r>
+          </a:p>
+          <a:p>
+            <a:pPr algn="r"/>
+            <a:r>
+              <a:rPr lang="de-DE" sz="2000" b="1" dirty="0">
+                <a:solidFill>
+                  <a:schemeClr val="tx1"/>
+                </a:solidFill>
+              </a:rPr>
+              <a:t>Lehrstuhl für Produktion &amp; Logistik</a:t>
+            </a:r>
+          </a:p>
+        </p:txBody>
+      </p:sp>
+      <p:sp>
+        <p:nvSpPr>
+          <p:cNvPr id="19" name="Rechteck: abgerundete Ecken 18">
+            <a:extLst>
+              <a:ext uri="{FF2B5EF4-FFF2-40B4-BE49-F238E27FC236}">
+                <a16:creationId xmlns:a16="http://schemas.microsoft.com/office/drawing/2014/main" id="{4258BCDA-916C-72F3-825B-7EBBECD0A673}"/>
+              </a:ext>
+            </a:extLst>
+          </p:cNvPr>
+          <p:cNvSpPr/>
+          <p:nvPr/>
+        </p:nvSpPr>
+        <p:spPr>
+          <a:xfrm>
+            <a:off x="1707488" y="363924"/>
+            <a:ext cx="9620912" cy="3488683"/>
+          </a:xfrm>
+          <a:prstGeom prst="roundRect">
+            <a:avLst/>
+          </a:prstGeom>
+          <a:noFill/>
+          <a:ln w="38100">
+            <a:solidFill>
+              <a:srgbClr val="C00000"/>
+            </a:solidFill>
+          </a:ln>
+        </p:spPr>
+        <p:style>
+          <a:lnRef idx="2">
+            <a:schemeClr val="accent1">
+              <a:shade val="15000"/>
+            </a:schemeClr>
+          </a:lnRef>
+          <a:fillRef idx="1">
+            <a:schemeClr val="accent1"/>
+          </a:fillRef>
+          <a:effectRef idx="0">
+            <a:schemeClr val="accent1"/>
+          </a:effectRef>
+          <a:fontRef idx="minor">
+            <a:schemeClr val="lt1"/>
+          </a:fontRef>
+        </p:style>
+        <p:txBody>
+          <a:bodyPr rtlCol="0" anchor="t"/>
+          <a:lstStyle/>
+          <a:p>
+            <a:pPr algn="r"/>
+            <a:r>
+              <a:rPr lang="de-DE" sz="2000" b="1" dirty="0">
+                <a:solidFill>
+                  <a:schemeClr val="tx1"/>
+                </a:solidFill>
+              </a:rPr>
+              <a:t>Hochschule RheinMain</a:t>
+            </a:r>
+          </a:p>
+          <a:p>
+            <a:pPr algn="r"/>
+            <a:r>
+              <a:rPr lang="de-DE" sz="2000" b="1" dirty="0">
+                <a:solidFill>
+                  <a:schemeClr val="tx1"/>
+                </a:solidFill>
+              </a:rPr>
+              <a:t>Professur für </a:t>
+            </a:r>
+            <a:r>
+              <a:rPr lang="de-DE" sz="2000" b="1" dirty="0" err="1">
+                <a:solidFill>
+                  <a:schemeClr val="tx1"/>
+                </a:solidFill>
+              </a:rPr>
+              <a:t>Sustainable</a:t>
+            </a:r>
+            <a:r>
+              <a:rPr lang="de-DE" sz="2000" b="1" dirty="0">
+                <a:solidFill>
+                  <a:schemeClr val="tx1"/>
+                </a:solidFill>
+              </a:rPr>
+              <a:t> </a:t>
+            </a:r>
+            <a:r>
+              <a:rPr lang="de-DE" sz="2000" b="1" dirty="0" err="1">
+                <a:solidFill>
+                  <a:schemeClr val="tx1"/>
+                </a:solidFill>
+              </a:rPr>
+              <a:t>Operations</a:t>
+            </a:r>
+            <a:r>
+              <a:rPr lang="de-DE" sz="2000" b="1" dirty="0">
+                <a:solidFill>
+                  <a:schemeClr val="tx1"/>
+                </a:solidFill>
+              </a:rPr>
+              <a:t> Management</a:t>
+            </a:r>
+          </a:p>
+        </p:txBody>
+      </p:sp>
+      <p:pic>
+        <p:nvPicPr>
+          <p:cNvPr id="20" name="Grafik 19" descr="Alexander Lunin – PHD Student bei Technische Universität ...">
+            <a:extLst>
+              <a:ext uri="{FF2B5EF4-FFF2-40B4-BE49-F238E27FC236}">
+                <a16:creationId xmlns:a16="http://schemas.microsoft.com/office/drawing/2014/main" id="{D89EFCF6-1933-651A-0734-245FCDC1F0A9}"/>
+              </a:ext>
+            </a:extLst>
+          </p:cNvPr>
+          <p:cNvPicPr>
+            <a:picLocks noChangeAspect="1"/>
+          </p:cNvPicPr>
+          <p:nvPr/>
+        </p:nvPicPr>
+        <p:blipFill>
+          <a:blip r:embed="rId2"/>
+          <a:stretch>
+            <a:fillRect/>
+          </a:stretch>
+        </p:blipFill>
+        <p:spPr>
+          <a:xfrm>
+            <a:off x="8446155" y="1321130"/>
+            <a:ext cx="1283368" cy="1283368"/>
+          </a:xfrm>
+          <a:prstGeom prst="rect">
+            <a:avLst/>
+          </a:prstGeom>
+        </p:spPr>
+      </p:pic>
+      <p:pic>
+        <p:nvPicPr>
+          <p:cNvPr id="22" name="Grafik 21" descr="The image shows a person wearing a suit and tie, dressed formally.&#10;&#10;KI-generierte Inhalte können fehlerhaft sein.">
+            <a:extLst>
+              <a:ext uri="{FF2B5EF4-FFF2-40B4-BE49-F238E27FC236}">
+                <a16:creationId xmlns:a16="http://schemas.microsoft.com/office/drawing/2014/main" id="{27A812A2-5A4B-5F93-74F2-0CCBCA21D0E3}"/>
+              </a:ext>
+            </a:extLst>
+          </p:cNvPr>
+          <p:cNvPicPr>
+            <a:picLocks noChangeAspect="1"/>
+          </p:cNvPicPr>
+          <p:nvPr/>
+        </p:nvPicPr>
+        <p:blipFill>
+          <a:blip r:embed="rId3"/>
+          <a:stretch>
+            <a:fillRect/>
+          </a:stretch>
+        </p:blipFill>
+        <p:spPr>
+          <a:xfrm>
+            <a:off x="5949744" y="1321130"/>
+            <a:ext cx="914400" cy="1283368"/>
+          </a:xfrm>
+          <a:prstGeom prst="rect">
+            <a:avLst/>
+          </a:prstGeom>
+        </p:spPr>
+      </p:pic>
+      <p:sp>
+        <p:nvSpPr>
+          <p:cNvPr id="23" name="Textfeld 22">
+            <a:extLst>
+              <a:ext uri="{FF2B5EF4-FFF2-40B4-BE49-F238E27FC236}">
+                <a16:creationId xmlns:a16="http://schemas.microsoft.com/office/drawing/2014/main" id="{FB12DD8F-635E-4AE9-8B40-A4D697EB0F2C}"/>
+              </a:ext>
+            </a:extLst>
+          </p:cNvPr>
+          <p:cNvSpPr txBox="1"/>
+          <p:nvPr/>
+        </p:nvSpPr>
+        <p:spPr>
+          <a:xfrm>
+            <a:off x="6905786" y="1670426"/>
+            <a:ext cx="1172693" cy="584775"/>
+          </a:xfrm>
+          <a:prstGeom prst="rect">
+            <a:avLst/>
+          </a:prstGeom>
+          <a:noFill/>
+        </p:spPr>
+        <p:txBody>
+          <a:bodyPr wrap="none" rtlCol="0">
+            <a:spAutoFit/>
+          </a:bodyPr>
+          <a:lstStyle/>
+          <a:p>
+            <a:r>
+              <a:rPr lang="de-DE" sz="1600" i="1" dirty="0"/>
+              <a:t>Thomas</a:t>
+            </a:r>
+          </a:p>
+          <a:p>
+            <a:r>
+              <a:rPr lang="de-DE" sz="1600" i="1" dirty="0"/>
+              <a:t>Kirschstein</a:t>
+            </a:r>
+          </a:p>
+        </p:txBody>
+      </p:sp>
+      <p:sp>
+        <p:nvSpPr>
+          <p:cNvPr id="24" name="Textfeld 23">
+            <a:extLst>
+              <a:ext uri="{FF2B5EF4-FFF2-40B4-BE49-F238E27FC236}">
+                <a16:creationId xmlns:a16="http://schemas.microsoft.com/office/drawing/2014/main" id="{20AE08D4-6311-26E5-3D46-F5D8D4869503}"/>
+              </a:ext>
+            </a:extLst>
+          </p:cNvPr>
+          <p:cNvSpPr txBox="1"/>
+          <p:nvPr/>
+        </p:nvSpPr>
+        <p:spPr>
+          <a:xfrm>
+            <a:off x="9805921" y="1670426"/>
+            <a:ext cx="1070037" cy="584775"/>
+          </a:xfrm>
+          <a:prstGeom prst="rect">
+            <a:avLst/>
+          </a:prstGeom>
+          <a:noFill/>
+        </p:spPr>
+        <p:txBody>
+          <a:bodyPr wrap="none" rtlCol="0">
+            <a:spAutoFit/>
+          </a:bodyPr>
+          <a:lstStyle/>
+          <a:p>
+            <a:r>
+              <a:rPr lang="de-DE" sz="1600" i="1" dirty="0"/>
+              <a:t>Alexander</a:t>
+            </a:r>
+          </a:p>
+          <a:p>
+            <a:r>
+              <a:rPr lang="de-DE" sz="1600" i="1" dirty="0"/>
+              <a:t>Lunin</a:t>
+            </a:r>
+          </a:p>
+        </p:txBody>
+      </p:sp>
+      <p:pic>
+        <p:nvPicPr>
+          <p:cNvPr id="25" name="Grafik 24" descr="Prof. Dr. Christian Bierwirth">
+            <a:extLst>
+              <a:ext uri="{FF2B5EF4-FFF2-40B4-BE49-F238E27FC236}">
+                <a16:creationId xmlns:a16="http://schemas.microsoft.com/office/drawing/2014/main" id="{C559242E-1529-0533-3F3F-94FAB17D5E38}"/>
+              </a:ext>
+            </a:extLst>
+          </p:cNvPr>
+          <p:cNvPicPr>
+            <a:picLocks noChangeAspect="1"/>
+          </p:cNvPicPr>
+          <p:nvPr/>
+        </p:nvPicPr>
+        <p:blipFill>
+          <a:blip r:embed="rId4"/>
+          <a:stretch>
+            <a:fillRect/>
+          </a:stretch>
+        </p:blipFill>
+        <p:spPr>
+          <a:xfrm>
+            <a:off x="5949745" y="4011699"/>
+            <a:ext cx="914400" cy="1379095"/>
+          </a:xfrm>
+          <a:prstGeom prst="rect">
+            <a:avLst/>
+          </a:prstGeom>
+        </p:spPr>
+      </p:pic>
+      <p:sp>
+        <p:nvSpPr>
+          <p:cNvPr id="26" name="Textfeld 25">
+            <a:extLst>
+              <a:ext uri="{FF2B5EF4-FFF2-40B4-BE49-F238E27FC236}">
+                <a16:creationId xmlns:a16="http://schemas.microsoft.com/office/drawing/2014/main" id="{9603B61B-0440-6294-02C3-0402024F3495}"/>
+              </a:ext>
+            </a:extLst>
+          </p:cNvPr>
+          <p:cNvSpPr txBox="1"/>
+          <p:nvPr/>
+        </p:nvSpPr>
+        <p:spPr>
+          <a:xfrm>
+            <a:off x="6905786" y="4400262"/>
+            <a:ext cx="991362" cy="584775"/>
+          </a:xfrm>
+          <a:prstGeom prst="rect">
+            <a:avLst/>
+          </a:prstGeom>
+          <a:noFill/>
+        </p:spPr>
+        <p:txBody>
+          <a:bodyPr wrap="none" rtlCol="0">
+            <a:spAutoFit/>
+          </a:bodyPr>
+          <a:lstStyle/>
+          <a:p>
+            <a:r>
+              <a:rPr lang="de-DE" sz="1600" i="1" dirty="0"/>
+              <a:t>Christian</a:t>
+            </a:r>
+          </a:p>
+          <a:p>
+            <a:r>
+              <a:rPr lang="de-DE" sz="1600" i="1" dirty="0"/>
+              <a:t>Bierwirth</a:t>
+            </a:r>
+          </a:p>
+        </p:txBody>
+      </p:sp>
+      <p:pic>
+        <p:nvPicPr>
+          <p:cNvPr id="27" name="Grafik 26" descr="Justin Wittig – Martin-Luther-Universität Halle-Wittenberg | LinkedIn">
+            <a:extLst>
+              <a:ext uri="{FF2B5EF4-FFF2-40B4-BE49-F238E27FC236}">
+                <a16:creationId xmlns:a16="http://schemas.microsoft.com/office/drawing/2014/main" id="{4EF8A4D3-0F0F-5C2A-E552-99C84613FD1B}"/>
+              </a:ext>
+            </a:extLst>
+          </p:cNvPr>
+          <p:cNvPicPr>
+            <a:picLocks noChangeAspect="1"/>
+          </p:cNvPicPr>
+          <p:nvPr/>
+        </p:nvPicPr>
+        <p:blipFill>
+          <a:blip r:embed="rId5"/>
+          <a:srcRect r="12478"/>
+          <a:stretch>
+            <a:fillRect/>
+          </a:stretch>
+        </p:blipFill>
+        <p:spPr>
+          <a:xfrm>
+            <a:off x="8491715" y="3948842"/>
+            <a:ext cx="1237805" cy="1414284"/>
+          </a:xfrm>
+          <a:prstGeom prst="rect">
+            <a:avLst/>
+          </a:prstGeom>
+        </p:spPr>
+      </p:pic>
+      <p:sp>
+        <p:nvSpPr>
+          <p:cNvPr id="28" name="Textfeld 27">
+            <a:extLst>
+              <a:ext uri="{FF2B5EF4-FFF2-40B4-BE49-F238E27FC236}">
+                <a16:creationId xmlns:a16="http://schemas.microsoft.com/office/drawing/2014/main" id="{57C1BEE2-36D1-BDE6-6DE0-AD0B3C53FE42}"/>
+              </a:ext>
+            </a:extLst>
+          </p:cNvPr>
+          <p:cNvSpPr txBox="1"/>
+          <p:nvPr/>
+        </p:nvSpPr>
+        <p:spPr>
+          <a:xfrm>
+            <a:off x="9805921" y="4400261"/>
+            <a:ext cx="689997" cy="584775"/>
+          </a:xfrm>
+          <a:prstGeom prst="rect">
+            <a:avLst/>
+          </a:prstGeom>
+          <a:noFill/>
+        </p:spPr>
+        <p:txBody>
+          <a:bodyPr wrap="none" rtlCol="0">
+            <a:spAutoFit/>
+          </a:bodyPr>
+          <a:lstStyle/>
+          <a:p>
+            <a:r>
+              <a:rPr lang="de-DE" sz="1600" i="1" dirty="0"/>
+              <a:t>Justin</a:t>
+            </a:r>
+          </a:p>
+          <a:p>
+            <a:r>
+              <a:rPr lang="de-DE" sz="1600" i="1" dirty="0"/>
+              <a:t>Wittig</a:t>
+            </a:r>
+          </a:p>
+        </p:txBody>
+      </p:sp>
+    </p:spTree>
+    <p:extLst>
+      <p:ext uri="{BB962C8B-B14F-4D97-AF65-F5344CB8AC3E}">
+        <p14:creationId xmlns:p14="http://schemas.microsoft.com/office/powerpoint/2010/main" val="3210260562"/>
+      </p:ext>
+    </p:extLst>
+  </p:cSld>
+  <p:clrMapOvr>
+    <a:masterClrMapping/>
+  </p:clrMapOvr>
+</p:sld>
+</file>
+
+<file path=ppt/slides/slide16.xml><?xml version="1.0" encoding="utf-8"?>
+<p:sld xmlns:a="http://schemas.openxmlformats.org/drawingml/2006/main" xmlns:r="http://schemas.openxmlformats.org/officeDocument/2006/relationships" xmlns:p="http://schemas.openxmlformats.org/presentationml/2006/main">
+  <p:cSld>
+    <p:spTree>
+      <p:nvGrpSpPr>
+        <p:cNvPr id="1" name="">
+          <a:extLst>
+            <a:ext uri="{FF2B5EF4-FFF2-40B4-BE49-F238E27FC236}">
+              <a16:creationId xmlns:a16="http://schemas.microsoft.com/office/drawing/2014/main" id="{B7CA1367-8E38-FF5A-2A3D-9FE40621E395}"/>
+            </a:ext>
+          </a:extLst>
+        </p:cNvPr>
+        <p:cNvGrpSpPr/>
+        <p:nvPr/>
+      </p:nvGrpSpPr>
+      <p:grpSpPr>
+        <a:xfrm>
+          <a:off x="0" y="0"/>
+          <a:ext cx="0" cy="0"/>
+          <a:chOff x="0" y="0"/>
+          <a:chExt cx="0" cy="0"/>
+        </a:xfrm>
+      </p:grpSpPr>
+      <p:sp>
+        <p:nvSpPr>
+          <p:cNvPr id="4" name="Rechteck: abgerundete Ecken 3">
+            <a:extLst>
+              <a:ext uri="{FF2B5EF4-FFF2-40B4-BE49-F238E27FC236}">
+                <a16:creationId xmlns:a16="http://schemas.microsoft.com/office/drawing/2014/main" id="{73E272E7-18C5-FEA2-CEA3-17B0F74D9D7B}"/>
+              </a:ext>
+            </a:extLst>
+          </p:cNvPr>
+          <p:cNvSpPr/>
+          <p:nvPr/>
+        </p:nvSpPr>
+        <p:spPr>
+          <a:xfrm>
+            <a:off x="1892300" y="1485900"/>
+            <a:ext cx="3251200" cy="800100"/>
+          </a:xfrm>
+          <a:prstGeom prst="roundRect">
+            <a:avLst/>
+          </a:prstGeom>
+        </p:spPr>
+        <p:style>
+          <a:lnRef idx="2">
+            <a:schemeClr val="accent1">
+              <a:shade val="15000"/>
+            </a:schemeClr>
+          </a:lnRef>
+          <a:fillRef idx="1">
+            <a:schemeClr val="accent1"/>
+          </a:fillRef>
+          <a:effectRef idx="0">
+            <a:schemeClr val="accent1"/>
+          </a:effectRef>
+          <a:fontRef idx="minor">
+            <a:schemeClr val="lt1"/>
+          </a:fontRef>
+        </p:style>
+        <p:txBody>
+          <a:bodyPr rtlCol="0" anchor="ctr"/>
+          <a:lstStyle/>
+          <a:p>
+            <a:pPr algn="ctr"/>
+            <a:r>
+              <a:rPr lang="de-DE" sz="2400" b="1" dirty="0"/>
+              <a:t>Fleet </a:t>
+            </a:r>
+            <a:r>
+              <a:rPr lang="de-DE" sz="2400" b="1" dirty="0" err="1"/>
+              <a:t>size</a:t>
+            </a:r>
+            <a:r>
+              <a:rPr lang="de-DE" sz="2400" b="1" dirty="0"/>
+              <a:t> &amp; mix </a:t>
+            </a:r>
+          </a:p>
+        </p:txBody>
+      </p:sp>
+      <p:sp>
+        <p:nvSpPr>
+          <p:cNvPr id="5" name="Rechteck: abgerundete Ecken 4">
+            <a:extLst>
+              <a:ext uri="{FF2B5EF4-FFF2-40B4-BE49-F238E27FC236}">
+                <a16:creationId xmlns:a16="http://schemas.microsoft.com/office/drawing/2014/main" id="{91C8C8CF-5AFA-34A7-EA23-622A68E63136}"/>
+              </a:ext>
+            </a:extLst>
+          </p:cNvPr>
+          <p:cNvSpPr/>
+          <p:nvPr/>
+        </p:nvSpPr>
+        <p:spPr>
+          <a:xfrm>
+            <a:off x="1892300" y="2882900"/>
+            <a:ext cx="3251200" cy="800100"/>
+          </a:xfrm>
+          <a:prstGeom prst="roundRect">
+            <a:avLst/>
+          </a:prstGeom>
+        </p:spPr>
+        <p:style>
+          <a:lnRef idx="2">
+            <a:schemeClr val="accent1">
+              <a:shade val="15000"/>
+            </a:schemeClr>
+          </a:lnRef>
+          <a:fillRef idx="1">
+            <a:schemeClr val="accent1"/>
+          </a:fillRef>
+          <a:effectRef idx="0">
+            <a:schemeClr val="accent1"/>
+          </a:effectRef>
+          <a:fontRef idx="minor">
+            <a:schemeClr val="lt1"/>
+          </a:fontRef>
+        </p:style>
+        <p:txBody>
+          <a:bodyPr rtlCol="0" anchor="ctr"/>
+          <a:lstStyle/>
+          <a:p>
+            <a:pPr algn="ctr"/>
+            <a:r>
+              <a:rPr lang="de-DE" sz="2400" b="1" dirty="0" err="1"/>
+              <a:t>Cost</a:t>
+            </a:r>
+            <a:r>
+              <a:rPr lang="de-DE" sz="2400" b="1" dirty="0"/>
+              <a:t> </a:t>
+            </a:r>
+            <a:r>
+              <a:rPr lang="de-DE" sz="2400" b="1" dirty="0" err="1"/>
+              <a:t>Tarifing</a:t>
+            </a:r>
+            <a:r>
+              <a:rPr lang="de-DE" sz="2400" b="1" dirty="0"/>
+              <a:t> &amp; Emission Declaration</a:t>
+            </a:r>
+          </a:p>
+        </p:txBody>
+      </p:sp>
+      <p:sp>
+        <p:nvSpPr>
+          <p:cNvPr id="6" name="Rechteck: abgerundete Ecken 5">
+            <a:extLst>
+              <a:ext uri="{FF2B5EF4-FFF2-40B4-BE49-F238E27FC236}">
+                <a16:creationId xmlns:a16="http://schemas.microsoft.com/office/drawing/2014/main" id="{9B64FC09-F93F-5B6C-7275-21E27AFFA7E4}"/>
+              </a:ext>
+            </a:extLst>
+          </p:cNvPr>
+          <p:cNvSpPr/>
+          <p:nvPr/>
+        </p:nvSpPr>
+        <p:spPr>
+          <a:xfrm>
+            <a:off x="1892300" y="4292600"/>
+            <a:ext cx="3251200" cy="800100"/>
+          </a:xfrm>
+          <a:prstGeom prst="roundRect">
+            <a:avLst/>
+          </a:prstGeom>
+        </p:spPr>
+        <p:style>
+          <a:lnRef idx="2">
+            <a:schemeClr val="accent1">
+              <a:shade val="15000"/>
+            </a:schemeClr>
+          </a:lnRef>
+          <a:fillRef idx="1">
+            <a:schemeClr val="accent1"/>
+          </a:fillRef>
+          <a:effectRef idx="0">
+            <a:schemeClr val="accent1"/>
+          </a:effectRef>
+          <a:fontRef idx="minor">
+            <a:schemeClr val="lt1"/>
+          </a:fontRef>
+        </p:style>
+        <p:txBody>
+          <a:bodyPr rtlCol="0" anchor="ctr"/>
+          <a:lstStyle/>
+          <a:p>
+            <a:pPr algn="ctr"/>
+            <a:r>
+              <a:rPr lang="de-DE" sz="2400" b="1" dirty="0"/>
+              <a:t>Preference-</a:t>
+            </a:r>
+            <a:r>
+              <a:rPr lang="de-DE" sz="2400" b="1" dirty="0" err="1"/>
+              <a:t>oriented</a:t>
+            </a:r>
+            <a:r>
+              <a:rPr lang="de-DE" sz="2400" b="1" dirty="0"/>
+              <a:t> Routing &amp; Scheduling</a:t>
+            </a:r>
+          </a:p>
+        </p:txBody>
+      </p:sp>
+      <p:sp>
+        <p:nvSpPr>
+          <p:cNvPr id="7" name="Textfeld 6">
+            <a:extLst>
+              <a:ext uri="{FF2B5EF4-FFF2-40B4-BE49-F238E27FC236}">
+                <a16:creationId xmlns:a16="http://schemas.microsoft.com/office/drawing/2014/main" id="{782B252D-F0BE-9A5D-3873-37A42DA04CE4}"/>
+              </a:ext>
+            </a:extLst>
+          </p:cNvPr>
+          <p:cNvSpPr txBox="1"/>
+          <p:nvPr/>
+        </p:nvSpPr>
+        <p:spPr>
+          <a:xfrm>
+            <a:off x="584200" y="1802884"/>
+            <a:ext cx="1046890" cy="369332"/>
+          </a:xfrm>
+          <a:prstGeom prst="rect">
+            <a:avLst/>
+          </a:prstGeom>
+          <a:noFill/>
+        </p:spPr>
+        <p:txBody>
+          <a:bodyPr wrap="none" rtlCol="0">
+            <a:spAutoFit/>
+          </a:bodyPr>
+          <a:lstStyle/>
+          <a:p>
+            <a:r>
+              <a:rPr lang="de-DE" i="1" dirty="0" err="1"/>
+              <a:t>strategic</a:t>
+            </a:r>
+            <a:endParaRPr lang="de-DE" i="1" dirty="0"/>
+          </a:p>
+        </p:txBody>
+      </p:sp>
+      <p:sp>
+        <p:nvSpPr>
+          <p:cNvPr id="8" name="Textfeld 7">
+            <a:extLst>
+              <a:ext uri="{FF2B5EF4-FFF2-40B4-BE49-F238E27FC236}">
+                <a16:creationId xmlns:a16="http://schemas.microsoft.com/office/drawing/2014/main" id="{45A5AC22-8380-EFFA-9DFF-E3F8B953B261}"/>
+              </a:ext>
+            </a:extLst>
+          </p:cNvPr>
+          <p:cNvSpPr txBox="1"/>
+          <p:nvPr/>
+        </p:nvSpPr>
+        <p:spPr>
+          <a:xfrm>
+            <a:off x="584200" y="3098284"/>
+            <a:ext cx="929742" cy="369332"/>
+          </a:xfrm>
+          <a:prstGeom prst="rect">
+            <a:avLst/>
+          </a:prstGeom>
+          <a:noFill/>
+        </p:spPr>
+        <p:txBody>
+          <a:bodyPr wrap="none" rtlCol="0">
+            <a:spAutoFit/>
+          </a:bodyPr>
+          <a:lstStyle/>
+          <a:p>
+            <a:r>
+              <a:rPr lang="de-DE" i="1" dirty="0" err="1"/>
+              <a:t>tactical</a:t>
+            </a:r>
+            <a:endParaRPr lang="de-DE" i="1" dirty="0"/>
+          </a:p>
+        </p:txBody>
+      </p:sp>
+      <p:sp>
+        <p:nvSpPr>
+          <p:cNvPr id="9" name="Textfeld 8">
+            <a:extLst>
+              <a:ext uri="{FF2B5EF4-FFF2-40B4-BE49-F238E27FC236}">
+                <a16:creationId xmlns:a16="http://schemas.microsoft.com/office/drawing/2014/main" id="{F32EA485-C566-14A5-51F7-5C5BEA90F84D}"/>
+              </a:ext>
+            </a:extLst>
+          </p:cNvPr>
+          <p:cNvSpPr txBox="1"/>
+          <p:nvPr/>
+        </p:nvSpPr>
+        <p:spPr>
+          <a:xfrm>
+            <a:off x="390653" y="4507984"/>
+            <a:ext cx="1316835" cy="369332"/>
+          </a:xfrm>
+          <a:prstGeom prst="rect">
+            <a:avLst/>
+          </a:prstGeom>
+          <a:noFill/>
+        </p:spPr>
+        <p:txBody>
+          <a:bodyPr wrap="none" rtlCol="0">
+            <a:spAutoFit/>
+          </a:bodyPr>
+          <a:lstStyle/>
+          <a:p>
+            <a:r>
+              <a:rPr lang="de-DE" i="1" dirty="0"/>
+              <a:t>operational</a:t>
+            </a:r>
+          </a:p>
+        </p:txBody>
+      </p:sp>
+      <p:cxnSp>
+        <p:nvCxnSpPr>
+          <p:cNvPr id="10" name="Gerade Verbindung mit Pfeil 9">
+            <a:extLst>
+              <a:ext uri="{FF2B5EF4-FFF2-40B4-BE49-F238E27FC236}">
+                <a16:creationId xmlns:a16="http://schemas.microsoft.com/office/drawing/2014/main" id="{B64538A9-A412-E5EC-9911-5DE9CFE9B9E8}"/>
+              </a:ext>
+            </a:extLst>
+          </p:cNvPr>
+          <p:cNvCxnSpPr>
+            <a:cxnSpLocks/>
+          </p:cNvCxnSpPr>
+          <p:nvPr/>
+        </p:nvCxnSpPr>
+        <p:spPr>
+          <a:xfrm>
+            <a:off x="3048000" y="2291318"/>
+            <a:ext cx="0" cy="590898"/>
+          </a:xfrm>
+          <a:prstGeom prst="straightConnector1">
+            <a:avLst/>
+          </a:prstGeom>
+          <a:ln w="31750">
+            <a:tailEnd type="stealth" w="lg" len="lg"/>
+          </a:ln>
+        </p:spPr>
+        <p:style>
+          <a:lnRef idx="2">
+            <a:schemeClr val="accent1"/>
+          </a:lnRef>
+          <a:fillRef idx="0">
+            <a:schemeClr val="accent1"/>
+          </a:fillRef>
+          <a:effectRef idx="1">
+            <a:schemeClr val="accent1"/>
+          </a:effectRef>
+          <a:fontRef idx="minor">
+            <a:schemeClr val="tx1"/>
+          </a:fontRef>
+        </p:style>
+      </p:cxnSp>
+      <p:cxnSp>
+        <p:nvCxnSpPr>
+          <p:cNvPr id="12" name="Gerade Verbindung mit Pfeil 11">
+            <a:extLst>
+              <a:ext uri="{FF2B5EF4-FFF2-40B4-BE49-F238E27FC236}">
+                <a16:creationId xmlns:a16="http://schemas.microsoft.com/office/drawing/2014/main" id="{92CF9FE2-A738-E873-7965-0EC9BDA879E7}"/>
+              </a:ext>
+            </a:extLst>
+          </p:cNvPr>
+          <p:cNvCxnSpPr>
+            <a:cxnSpLocks/>
+          </p:cNvCxnSpPr>
+          <p:nvPr/>
+        </p:nvCxnSpPr>
+        <p:spPr>
+          <a:xfrm>
+            <a:off x="4013200" y="2273300"/>
+            <a:ext cx="0" cy="608916"/>
+          </a:xfrm>
+          <a:prstGeom prst="straightConnector1">
+            <a:avLst/>
+          </a:prstGeom>
+          <a:ln w="31750">
+            <a:headEnd type="stealth" w="lg" len="lg"/>
+            <a:tailEnd type="none" w="lg" len="lg"/>
+          </a:ln>
+        </p:spPr>
+        <p:style>
+          <a:lnRef idx="2">
+            <a:schemeClr val="accent1"/>
+          </a:lnRef>
+          <a:fillRef idx="0">
+            <a:schemeClr val="accent1"/>
+          </a:fillRef>
+          <a:effectRef idx="1">
+            <a:schemeClr val="accent1"/>
+          </a:effectRef>
+          <a:fontRef idx="minor">
+            <a:schemeClr val="tx1"/>
+          </a:fontRef>
+        </p:style>
+      </p:cxnSp>
+      <p:cxnSp>
+        <p:nvCxnSpPr>
+          <p:cNvPr id="14" name="Gerade Verbindung mit Pfeil 13">
+            <a:extLst>
+              <a:ext uri="{FF2B5EF4-FFF2-40B4-BE49-F238E27FC236}">
+                <a16:creationId xmlns:a16="http://schemas.microsoft.com/office/drawing/2014/main" id="{10632837-E354-2838-BF92-E79E9D38ECC4}"/>
+              </a:ext>
+            </a:extLst>
+          </p:cNvPr>
+          <p:cNvCxnSpPr>
+            <a:cxnSpLocks/>
+          </p:cNvCxnSpPr>
+          <p:nvPr/>
+        </p:nvCxnSpPr>
+        <p:spPr>
+          <a:xfrm>
+            <a:off x="3048000" y="3701018"/>
+            <a:ext cx="0" cy="590898"/>
+          </a:xfrm>
+          <a:prstGeom prst="straightConnector1">
+            <a:avLst/>
+          </a:prstGeom>
+          <a:ln w="31750">
+            <a:tailEnd type="stealth" w="lg" len="lg"/>
+          </a:ln>
+        </p:spPr>
+        <p:style>
+          <a:lnRef idx="2">
+            <a:schemeClr val="accent1"/>
+          </a:lnRef>
+          <a:fillRef idx="0">
+            <a:schemeClr val="accent1"/>
+          </a:fillRef>
+          <a:effectRef idx="1">
+            <a:schemeClr val="accent1"/>
+          </a:effectRef>
+          <a:fontRef idx="minor">
+            <a:schemeClr val="tx1"/>
+          </a:fontRef>
+        </p:style>
+      </p:cxnSp>
+      <p:cxnSp>
+        <p:nvCxnSpPr>
+          <p:cNvPr id="16" name="Gerade Verbindung mit Pfeil 15">
+            <a:extLst>
+              <a:ext uri="{FF2B5EF4-FFF2-40B4-BE49-F238E27FC236}">
+                <a16:creationId xmlns:a16="http://schemas.microsoft.com/office/drawing/2014/main" id="{52486E54-DFFE-3D51-EEE5-5623BCB71376}"/>
+              </a:ext>
+            </a:extLst>
+          </p:cNvPr>
+          <p:cNvCxnSpPr>
+            <a:cxnSpLocks/>
+          </p:cNvCxnSpPr>
+          <p:nvPr/>
+        </p:nvCxnSpPr>
+        <p:spPr>
+          <a:xfrm>
+            <a:off x="4013200" y="3683000"/>
+            <a:ext cx="0" cy="608916"/>
+          </a:xfrm>
+          <a:prstGeom prst="straightConnector1">
+            <a:avLst/>
+          </a:prstGeom>
+          <a:ln w="31750">
+            <a:headEnd type="stealth" w="lg" len="lg"/>
+            <a:tailEnd type="none" w="lg" len="lg"/>
+          </a:ln>
+        </p:spPr>
+        <p:style>
+          <a:lnRef idx="2">
+            <a:schemeClr val="accent1"/>
+          </a:lnRef>
+          <a:fillRef idx="0">
+            <a:schemeClr val="accent1"/>
+          </a:fillRef>
+          <a:effectRef idx="1">
+            <a:schemeClr val="accent1"/>
+          </a:effectRef>
+          <a:fontRef idx="minor">
+            <a:schemeClr val="tx1"/>
+          </a:fontRef>
+        </p:style>
+      </p:cxnSp>
+      <p:sp>
+        <p:nvSpPr>
+          <p:cNvPr id="18" name="Rechteck: abgerundete Ecken 17">
+            <a:extLst>
+              <a:ext uri="{FF2B5EF4-FFF2-40B4-BE49-F238E27FC236}">
+                <a16:creationId xmlns:a16="http://schemas.microsoft.com/office/drawing/2014/main" id="{F25BF91E-DFF9-F94F-6280-FF856FE1D8A4}"/>
+              </a:ext>
+            </a:extLst>
+          </p:cNvPr>
+          <p:cNvSpPr/>
+          <p:nvPr/>
+        </p:nvSpPr>
+        <p:spPr>
+          <a:xfrm>
+            <a:off x="1707487" y="4098470"/>
+            <a:ext cx="9620907" cy="2111830"/>
+          </a:xfrm>
+          <a:prstGeom prst="roundRect">
+            <a:avLst/>
+          </a:prstGeom>
+          <a:noFill/>
+          <a:ln w="38100">
+            <a:solidFill>
+              <a:schemeClr val="accent6"/>
+            </a:solidFill>
+          </a:ln>
+        </p:spPr>
+        <p:style>
+          <a:lnRef idx="2">
+            <a:schemeClr val="accent1">
+              <a:shade val="15000"/>
+            </a:schemeClr>
+          </a:lnRef>
+          <a:fillRef idx="1">
+            <a:schemeClr val="accent1"/>
+          </a:fillRef>
+          <a:effectRef idx="0">
+            <a:schemeClr val="accent1"/>
+          </a:effectRef>
+          <a:fontRef idx="minor">
+            <a:schemeClr val="lt1"/>
+          </a:fontRef>
+        </p:style>
+        <p:txBody>
+          <a:bodyPr rtlCol="0" anchor="t"/>
+          <a:lstStyle/>
+          <a:p>
+            <a:pPr algn="r"/>
+            <a:r>
+              <a:rPr lang="de-DE" sz="2000" b="1" dirty="0">
+                <a:solidFill>
+                  <a:schemeClr val="tx1"/>
+                </a:solidFill>
+              </a:rPr>
+              <a:t>Präferenz-orientierten Tourenplanungsproblemen </a:t>
+            </a:r>
+          </a:p>
+          <a:p>
+            <a:pPr marL="342900" indent="-342900" algn="r">
+              <a:buFont typeface="Wingdings" panose="05000000000000000000" pitchFamily="2" charset="2"/>
+              <a:buChar char="à"/>
+            </a:pPr>
+            <a:r>
+              <a:rPr lang="de-DE" sz="2000" dirty="0">
+                <a:solidFill>
+                  <a:schemeClr val="tx1"/>
+                </a:solidFill>
+                <a:sym typeface="Wingdings" panose="05000000000000000000" pitchFamily="2" charset="2"/>
+              </a:rPr>
+              <a:t>Entwicklung präferenzorientierter MILPs für VRPs</a:t>
+            </a:r>
+          </a:p>
+          <a:p>
+            <a:pPr marL="342900" indent="-342900" algn="r">
+              <a:buFont typeface="Wingdings" panose="05000000000000000000" pitchFamily="2" charset="2"/>
+              <a:buChar char="à"/>
+            </a:pPr>
+            <a:r>
+              <a:rPr lang="de-DE" sz="2000" dirty="0">
+                <a:solidFill>
+                  <a:schemeClr val="tx1"/>
+                </a:solidFill>
+                <a:sym typeface="Wingdings" panose="05000000000000000000" pitchFamily="2" charset="2"/>
+              </a:rPr>
+              <a:t>Heuristiken für große Probleme</a:t>
+            </a:r>
+          </a:p>
+          <a:p>
+            <a:pPr marL="342900" indent="-342900" algn="r">
+              <a:buFont typeface="Wingdings" panose="05000000000000000000" pitchFamily="2" charset="2"/>
+              <a:buChar char="à"/>
+            </a:pPr>
+            <a:r>
+              <a:rPr lang="de-DE" sz="2000" dirty="0">
+                <a:solidFill>
+                  <a:schemeClr val="tx1"/>
+                </a:solidFill>
+                <a:sym typeface="Wingdings" panose="05000000000000000000" pitchFamily="2" charset="2"/>
+              </a:rPr>
+              <a:t>Integration von Kundenzufriedenheit auf operativer Ebene</a:t>
+            </a:r>
+            <a:endParaRPr lang="de-DE" sz="2000" dirty="0">
+              <a:solidFill>
+                <a:schemeClr val="tx1"/>
+              </a:solidFill>
+            </a:endParaRPr>
+          </a:p>
+          <a:p>
+            <a:pPr algn="r"/>
+            <a:endParaRPr lang="de-DE" sz="2000" b="1" dirty="0">
+              <a:solidFill>
+                <a:schemeClr val="tx1"/>
+              </a:solidFill>
+            </a:endParaRPr>
+          </a:p>
+        </p:txBody>
+      </p:sp>
+      <p:sp>
+        <p:nvSpPr>
+          <p:cNvPr id="19" name="Rechteck: abgerundete Ecken 18">
+            <a:extLst>
+              <a:ext uri="{FF2B5EF4-FFF2-40B4-BE49-F238E27FC236}">
+                <a16:creationId xmlns:a16="http://schemas.microsoft.com/office/drawing/2014/main" id="{939C17DF-A551-4E9D-3E00-123600A4C07B}"/>
+              </a:ext>
+            </a:extLst>
+          </p:cNvPr>
+          <p:cNvSpPr/>
+          <p:nvPr/>
+        </p:nvSpPr>
+        <p:spPr>
+          <a:xfrm>
+            <a:off x="1707488" y="800099"/>
+            <a:ext cx="9620912" cy="1675655"/>
+          </a:xfrm>
+          <a:prstGeom prst="roundRect">
+            <a:avLst/>
+          </a:prstGeom>
+          <a:noFill/>
+          <a:ln w="38100">
+            <a:solidFill>
+              <a:srgbClr val="C00000"/>
+            </a:solidFill>
+          </a:ln>
+        </p:spPr>
+        <p:style>
+          <a:lnRef idx="2">
+            <a:schemeClr val="accent1">
+              <a:shade val="15000"/>
+            </a:schemeClr>
+          </a:lnRef>
+          <a:fillRef idx="1">
+            <a:schemeClr val="accent1"/>
+          </a:fillRef>
+          <a:effectRef idx="0">
+            <a:schemeClr val="accent1"/>
+          </a:effectRef>
+          <a:fontRef idx="minor">
+            <a:schemeClr val="lt1"/>
+          </a:fontRef>
+        </p:style>
+        <p:txBody>
+          <a:bodyPr rtlCol="0" anchor="t"/>
+          <a:lstStyle/>
+          <a:p>
+            <a:pPr algn="r"/>
+            <a:r>
+              <a:rPr lang="de-DE" sz="2000" b="1" dirty="0">
+                <a:solidFill>
+                  <a:schemeClr val="tx1"/>
+                </a:solidFill>
+              </a:rPr>
+              <a:t>Modellierung des kontinuierlicher Investitionsprozesse</a:t>
+            </a:r>
+          </a:p>
+          <a:p>
+            <a:pPr marL="342900" indent="-342900" algn="r">
+              <a:buFont typeface="Wingdings" panose="05000000000000000000" pitchFamily="2" charset="2"/>
+              <a:buChar char="à"/>
+            </a:pPr>
+            <a:r>
+              <a:rPr lang="de-DE" sz="2000" dirty="0">
+                <a:solidFill>
+                  <a:schemeClr val="tx1"/>
+                </a:solidFill>
+                <a:sym typeface="Wingdings" panose="05000000000000000000" pitchFamily="2" charset="2"/>
+              </a:rPr>
+              <a:t>techno-ökonomisch: TCO-Ansatz</a:t>
+            </a:r>
+          </a:p>
+          <a:p>
+            <a:pPr marL="342900" indent="-342900" algn="r">
+              <a:buFont typeface="Wingdings" panose="05000000000000000000" pitchFamily="2" charset="2"/>
+              <a:buChar char="à"/>
+            </a:pPr>
+            <a:r>
+              <a:rPr lang="de-DE" sz="2000" dirty="0">
+                <a:solidFill>
+                  <a:schemeClr val="tx1"/>
+                </a:solidFill>
+                <a:sym typeface="Wingdings" panose="05000000000000000000" pitchFamily="2" charset="2"/>
+              </a:rPr>
+              <a:t>stochastische Prognose Kundenaufkommen</a:t>
+            </a:r>
+          </a:p>
+          <a:p>
+            <a:pPr marL="342900" indent="-342900" algn="r">
+              <a:buFont typeface="Wingdings" panose="05000000000000000000" pitchFamily="2" charset="2"/>
+              <a:buChar char="à"/>
+            </a:pPr>
+            <a:r>
+              <a:rPr lang="de-DE" sz="2000" dirty="0">
+                <a:solidFill>
+                  <a:schemeClr val="tx1"/>
+                </a:solidFill>
+                <a:sym typeface="Wingdings" panose="05000000000000000000" pitchFamily="2" charset="2"/>
+              </a:rPr>
+              <a:t>Dynamische Anschaffungsentscheidungen</a:t>
+            </a:r>
+            <a:endParaRPr lang="de-DE" sz="2000" dirty="0">
+              <a:solidFill>
+                <a:schemeClr val="tx1"/>
+              </a:solidFill>
+            </a:endParaRPr>
+          </a:p>
+        </p:txBody>
+      </p:sp>
+      <p:sp>
+        <p:nvSpPr>
+          <p:cNvPr id="2" name="Rechteck: abgerundete Ecken 1">
+            <a:extLst>
+              <a:ext uri="{FF2B5EF4-FFF2-40B4-BE49-F238E27FC236}">
+                <a16:creationId xmlns:a16="http://schemas.microsoft.com/office/drawing/2014/main" id="{7AB5BABB-AF2A-38F6-A071-E1CFC831DB51}"/>
+              </a:ext>
+            </a:extLst>
+          </p:cNvPr>
+          <p:cNvSpPr/>
+          <p:nvPr/>
+        </p:nvSpPr>
+        <p:spPr>
+          <a:xfrm>
+            <a:off x="1707482" y="2493772"/>
+            <a:ext cx="9620912" cy="1604014"/>
+          </a:xfrm>
+          <a:prstGeom prst="roundRect">
+            <a:avLst/>
+          </a:prstGeom>
+          <a:noFill/>
+          <a:ln w="38100">
+            <a:solidFill>
+              <a:schemeClr val="accent2"/>
+            </a:solidFill>
+          </a:ln>
+        </p:spPr>
+        <p:style>
+          <a:lnRef idx="2">
+            <a:schemeClr val="accent1">
+              <a:shade val="15000"/>
+            </a:schemeClr>
+          </a:lnRef>
+          <a:fillRef idx="1">
+            <a:schemeClr val="accent1"/>
+          </a:fillRef>
+          <a:effectRef idx="0">
+            <a:schemeClr val="accent1"/>
+          </a:effectRef>
+          <a:fontRef idx="minor">
+            <a:schemeClr val="lt1"/>
+          </a:fontRef>
+        </p:style>
+        <p:txBody>
+          <a:bodyPr rtlCol="0" anchor="t"/>
+          <a:lstStyle/>
+          <a:p>
+            <a:pPr algn="r"/>
+            <a:r>
+              <a:rPr lang="de-DE" sz="2000" b="1" dirty="0">
+                <a:solidFill>
+                  <a:schemeClr val="tx1"/>
+                </a:solidFill>
+              </a:rPr>
+              <a:t>Simulationsplattform</a:t>
+            </a:r>
+          </a:p>
+          <a:p>
+            <a:pPr marL="342900" indent="-342900" algn="r">
+              <a:buFont typeface="Wingdings" panose="05000000000000000000" pitchFamily="2" charset="2"/>
+              <a:buChar char="à"/>
+            </a:pPr>
+            <a:r>
+              <a:rPr lang="de-DE" sz="2000" dirty="0">
+                <a:solidFill>
+                  <a:schemeClr val="tx1"/>
+                </a:solidFill>
+                <a:sym typeface="Wingdings" panose="05000000000000000000" pitchFamily="2" charset="2"/>
+              </a:rPr>
+              <a:t>Heuristische Lösung VRPs mit zufälligen Kunden</a:t>
+            </a:r>
+          </a:p>
+          <a:p>
+            <a:pPr marL="342900" indent="-342900" algn="r">
+              <a:buFont typeface="Wingdings" panose="05000000000000000000" pitchFamily="2" charset="2"/>
+              <a:buChar char="à"/>
+            </a:pPr>
+            <a:r>
+              <a:rPr lang="de-DE" sz="2000" dirty="0">
+                <a:solidFill>
+                  <a:schemeClr val="tx1"/>
+                </a:solidFill>
+                <a:sym typeface="Wingdings" panose="05000000000000000000" pitchFamily="2" charset="2"/>
+              </a:rPr>
+              <a:t>Entwicklung techno-ökonomischer Parameter</a:t>
+            </a:r>
+          </a:p>
+          <a:p>
+            <a:pPr marL="342900" indent="-342900" algn="r">
+              <a:buFont typeface="Wingdings" panose="05000000000000000000" pitchFamily="2" charset="2"/>
+              <a:buChar char="à"/>
+            </a:pPr>
+            <a:r>
+              <a:rPr lang="de-DE" sz="2000" dirty="0">
+                <a:solidFill>
+                  <a:schemeClr val="tx1"/>
+                </a:solidFill>
+                <a:sym typeface="Wingdings" panose="05000000000000000000" pitchFamily="2" charset="2"/>
+              </a:rPr>
+              <a:t>Kundenzufriedenheitsprozesse</a:t>
+            </a:r>
+            <a:endParaRPr lang="de-DE" sz="2000" dirty="0">
+              <a:solidFill>
+                <a:schemeClr val="tx1"/>
+              </a:solidFill>
+            </a:endParaRPr>
+          </a:p>
+        </p:txBody>
+      </p:sp>
+    </p:spTree>
+    <p:extLst>
+      <p:ext uri="{BB962C8B-B14F-4D97-AF65-F5344CB8AC3E}">
+        <p14:creationId xmlns:p14="http://schemas.microsoft.com/office/powerpoint/2010/main" val="3073067852"/>
       </p:ext>
     </p:extLst>
   </p:cSld>
